--- a/LOOP_Presentation.pptx
+++ b/LOOP_Presentation.pptx
@@ -5,23 +5,22 @@
     <p:sldMasterId id="2147483648" r:id="rId1"/>
   </p:sldMasterIdLst>
   <p:sldIdLst>
-    <p:sldId id="256" r:id="rId7"/>
-    <p:sldId id="257" r:id="rId8"/>
-    <p:sldId id="258" r:id="rId9"/>
-    <p:sldId id="259" r:id="rId10"/>
-    <p:sldId id="260" r:id="rId11"/>
-    <p:sldId id="261" r:id="rId12"/>
-    <p:sldId id="262" r:id="rId13"/>
-    <p:sldId id="263" r:id="rId14"/>
-    <p:sldId id="264" r:id="rId15"/>
-    <p:sldId id="265" r:id="rId16"/>
-    <p:sldId id="266" r:id="rId17"/>
-    <p:sldId id="267" r:id="rId18"/>
-    <p:sldId id="268" r:id="rId19"/>
-    <p:sldId id="269" r:id="rId20"/>
-    <p:sldId id="270" r:id="rId21"/>
+    <p:sldId id="256" r:id="rId2"/>
+    <p:sldId id="257" r:id="rId3"/>
+    <p:sldId id="258" r:id="rId4"/>
+    <p:sldId id="259" r:id="rId5"/>
+    <p:sldId id="260" r:id="rId6"/>
+    <p:sldId id="261" r:id="rId7"/>
+    <p:sldId id="262" r:id="rId8"/>
+    <p:sldId id="263" r:id="rId9"/>
+    <p:sldId id="264" r:id="rId10"/>
+    <p:sldId id="266" r:id="rId11"/>
+    <p:sldId id="267" r:id="rId12"/>
+    <p:sldId id="268" r:id="rId13"/>
+    <p:sldId id="269" r:id="rId14"/>
+    <p:sldId id="270" r:id="rId15"/>
   </p:sldIdLst>
-  <p:sldSz cx="12191695" cy="6858000" type="screen4x3"/>
+  <p:sldSz cx="12192000" cy="6858000"/>
   <p:notesSz cx="6858000" cy="9144000"/>
   <p:defaultTextStyle>
     <a:defPPr>
@@ -118,6 +117,22 @@
       </a:defRPr>
     </a:lvl9pPr>
   </p:defaultTextStyle>
+  <p:extLst>
+    <p:ext uri="{EFAFB233-063F-42B5-8137-9DF3F51BA10A}">
+      <p15:sldGuideLst xmlns:p15="http://schemas.microsoft.com/office/powerpoint/2012/main">
+        <p15:guide id="1" orient="horz" pos="2160">
+          <p15:clr>
+            <a:srgbClr val="A4A3A4"/>
+          </p15:clr>
+        </p15:guide>
+        <p15:guide id="2" pos="2880">
+          <p15:clr>
+            <a:srgbClr val="A4A3A4"/>
+          </p15:clr>
+        </p15:guide>
+      </p15:sldGuideLst>
+    </p:ext>
+  </p:extLst>
 </p:presentation>
 </file>
 
@@ -159,10 +174,9 @@
           <a:lstStyle/>
           <a:p>
             <a:r>
-              <a:rPr lang="en-US" smtClean="0"/>
+              <a:rPr lang="en-US"/>
               <a:t>Click to edit Master title style</a:t>
             </a:r>
-            <a:endParaRPr lang="en-US"/>
           </a:p>
         </p:txBody>
       </p:sp>
@@ -278,10 +292,9 @@
           </a:lstStyle>
           <a:p>
             <a:r>
-              <a:rPr lang="en-US" smtClean="0"/>
+              <a:rPr lang="en-US"/>
               <a:t>Click to edit Master subtitle style</a:t>
             </a:r>
-            <a:endParaRPr lang="en-US"/>
           </a:p>
         </p:txBody>
       </p:sp>
@@ -302,7 +315,7 @@
           <a:p>
             <a:fld id="{5BCAD085-E8A6-8845-BD4E-CB4CCA059FC4}" type="datetimeFigureOut">
               <a:rPr lang="en-US" smtClean="0"/>
-              <a:t>1/27/13</a:t>
+              <a:t>9/13/2026</a:t>
             </a:fld>
             <a:endParaRPr lang="en-US"/>
           </a:p>
@@ -396,10 +409,9 @@
           <a:lstStyle/>
           <a:p>
             <a:r>
-              <a:rPr lang="en-US" smtClean="0"/>
+              <a:rPr lang="en-US"/>
               <a:t>Click to edit Master title style</a:t>
             </a:r>
-            <a:endParaRPr lang="en-US"/>
           </a:p>
         </p:txBody>
       </p:sp>
@@ -420,38 +432,37 @@
           <a:p>
             <a:pPr lvl="0"/>
             <a:r>
-              <a:rPr lang="en-US" smtClean="0"/>
+              <a:rPr lang="en-US"/>
               <a:t>Click to edit Master text styles</a:t>
             </a:r>
           </a:p>
           <a:p>
             <a:pPr lvl="1"/>
             <a:r>
-              <a:rPr lang="en-US" smtClean="0"/>
+              <a:rPr lang="en-US"/>
               <a:t>Second level</a:t>
             </a:r>
           </a:p>
           <a:p>
             <a:pPr lvl="2"/>
             <a:r>
-              <a:rPr lang="en-US" smtClean="0"/>
+              <a:rPr lang="en-US"/>
               <a:t>Third level</a:t>
             </a:r>
           </a:p>
           <a:p>
             <a:pPr lvl="3"/>
             <a:r>
-              <a:rPr lang="en-US" smtClean="0"/>
+              <a:rPr lang="en-US"/>
               <a:t>Fourth level</a:t>
             </a:r>
           </a:p>
           <a:p>
             <a:pPr lvl="4"/>
             <a:r>
-              <a:rPr lang="en-US" smtClean="0"/>
+              <a:rPr lang="en-US"/>
               <a:t>Fifth level</a:t>
             </a:r>
-            <a:endParaRPr lang="en-US"/>
           </a:p>
         </p:txBody>
       </p:sp>
@@ -472,7 +483,7 @@
           <a:p>
             <a:fld id="{5BCAD085-E8A6-8845-BD4E-CB4CCA059FC4}" type="datetimeFigureOut">
               <a:rPr lang="en-US" smtClean="0"/>
-              <a:t>1/27/13</a:t>
+              <a:t>9/13/2026</a:t>
             </a:fld>
             <a:endParaRPr lang="en-US"/>
           </a:p>
@@ -571,10 +582,9 @@
           <a:lstStyle/>
           <a:p>
             <a:r>
-              <a:rPr lang="en-US" smtClean="0"/>
+              <a:rPr lang="en-US"/>
               <a:t>Click to edit Master title style</a:t>
             </a:r>
-            <a:endParaRPr lang="en-US"/>
           </a:p>
         </p:txBody>
       </p:sp>
@@ -600,38 +610,37 @@
           <a:p>
             <a:pPr lvl="0"/>
             <a:r>
-              <a:rPr lang="en-US" smtClean="0"/>
+              <a:rPr lang="en-US"/>
               <a:t>Click to edit Master text styles</a:t>
             </a:r>
           </a:p>
           <a:p>
             <a:pPr lvl="1"/>
             <a:r>
-              <a:rPr lang="en-US" smtClean="0"/>
+              <a:rPr lang="en-US"/>
               <a:t>Second level</a:t>
             </a:r>
           </a:p>
           <a:p>
             <a:pPr lvl="2"/>
             <a:r>
-              <a:rPr lang="en-US" smtClean="0"/>
+              <a:rPr lang="en-US"/>
               <a:t>Third level</a:t>
             </a:r>
           </a:p>
           <a:p>
             <a:pPr lvl="3"/>
             <a:r>
-              <a:rPr lang="en-US" smtClean="0"/>
+              <a:rPr lang="en-US"/>
               <a:t>Fourth level</a:t>
             </a:r>
           </a:p>
           <a:p>
             <a:pPr lvl="4"/>
             <a:r>
-              <a:rPr lang="en-US" smtClean="0"/>
+              <a:rPr lang="en-US"/>
               <a:t>Fifth level</a:t>
             </a:r>
-            <a:endParaRPr lang="en-US"/>
           </a:p>
         </p:txBody>
       </p:sp>
@@ -652,7 +661,7 @@
           <a:p>
             <a:fld id="{5BCAD085-E8A6-8845-BD4E-CB4CCA059FC4}" type="datetimeFigureOut">
               <a:rPr lang="en-US" smtClean="0"/>
-              <a:t>1/27/13</a:t>
+              <a:t>9/13/2026</a:t>
             </a:fld>
             <a:endParaRPr lang="en-US"/>
           </a:p>
@@ -746,10 +755,9 @@
           <a:lstStyle/>
           <a:p>
             <a:r>
-              <a:rPr lang="en-US" smtClean="0"/>
+              <a:rPr lang="en-US"/>
               <a:t>Click to edit Master title style</a:t>
             </a:r>
-            <a:endParaRPr lang="en-US"/>
           </a:p>
         </p:txBody>
       </p:sp>
@@ -770,38 +778,37 @@
           <a:p>
             <a:pPr lvl="0"/>
             <a:r>
-              <a:rPr lang="en-US" smtClean="0"/>
+              <a:rPr lang="en-US"/>
               <a:t>Click to edit Master text styles</a:t>
             </a:r>
           </a:p>
           <a:p>
             <a:pPr lvl="1"/>
             <a:r>
-              <a:rPr lang="en-US" smtClean="0"/>
+              <a:rPr lang="en-US"/>
               <a:t>Second level</a:t>
             </a:r>
           </a:p>
           <a:p>
             <a:pPr lvl="2"/>
             <a:r>
-              <a:rPr lang="en-US" smtClean="0"/>
+              <a:rPr lang="en-US"/>
               <a:t>Third level</a:t>
             </a:r>
           </a:p>
           <a:p>
             <a:pPr lvl="3"/>
             <a:r>
-              <a:rPr lang="en-US" smtClean="0"/>
+              <a:rPr lang="en-US"/>
               <a:t>Fourth level</a:t>
             </a:r>
           </a:p>
           <a:p>
             <a:pPr lvl="4"/>
             <a:r>
-              <a:rPr lang="en-US" smtClean="0"/>
+              <a:rPr lang="en-US"/>
               <a:t>Fifth level</a:t>
             </a:r>
-            <a:endParaRPr lang="en-US"/>
           </a:p>
         </p:txBody>
       </p:sp>
@@ -822,7 +829,7 @@
           <a:p>
             <a:fld id="{5BCAD085-E8A6-8845-BD4E-CB4CCA059FC4}" type="datetimeFigureOut">
               <a:rPr lang="en-US" smtClean="0"/>
-              <a:t>1/27/13</a:t>
+              <a:t>9/13/2026</a:t>
             </a:fld>
             <a:endParaRPr lang="en-US"/>
           </a:p>
@@ -925,10 +932,9 @@
           </a:lstStyle>
           <a:p>
             <a:r>
-              <a:rPr lang="en-US" smtClean="0"/>
+              <a:rPr lang="en-US"/>
               <a:t>Click to edit Master title style</a:t>
             </a:r>
-            <a:endParaRPr lang="en-US"/>
           </a:p>
         </p:txBody>
       </p:sp>
@@ -1045,7 +1051,7 @@
           <a:p>
             <a:pPr lvl="0"/>
             <a:r>
-              <a:rPr lang="en-US" smtClean="0"/>
+              <a:rPr lang="en-US"/>
               <a:t>Click to edit Master text styles</a:t>
             </a:r>
           </a:p>
@@ -1068,7 +1074,7 @@
           <a:p>
             <a:fld id="{5BCAD085-E8A6-8845-BD4E-CB4CCA059FC4}" type="datetimeFigureOut">
               <a:rPr lang="en-US" smtClean="0"/>
-              <a:t>1/27/13</a:t>
+              <a:t>9/13/2026</a:t>
             </a:fld>
             <a:endParaRPr lang="en-US"/>
           </a:p>
@@ -1162,10 +1168,9 @@
           <a:lstStyle/>
           <a:p>
             <a:r>
-              <a:rPr lang="en-US" smtClean="0"/>
+              <a:rPr lang="en-US"/>
               <a:t>Click to edit Master title style</a:t>
             </a:r>
-            <a:endParaRPr lang="en-US"/>
           </a:p>
         </p:txBody>
       </p:sp>
@@ -1219,38 +1224,37 @@
           <a:p>
             <a:pPr lvl="0"/>
             <a:r>
-              <a:rPr lang="en-US" smtClean="0"/>
+              <a:rPr lang="en-US"/>
               <a:t>Click to edit Master text styles</a:t>
             </a:r>
           </a:p>
           <a:p>
             <a:pPr lvl="1"/>
             <a:r>
-              <a:rPr lang="en-US" smtClean="0"/>
+              <a:rPr lang="en-US"/>
               <a:t>Second level</a:t>
             </a:r>
           </a:p>
           <a:p>
             <a:pPr lvl="2"/>
             <a:r>
-              <a:rPr lang="en-US" smtClean="0"/>
+              <a:rPr lang="en-US"/>
               <a:t>Third level</a:t>
             </a:r>
           </a:p>
           <a:p>
             <a:pPr lvl="3"/>
             <a:r>
-              <a:rPr lang="en-US" smtClean="0"/>
+              <a:rPr lang="en-US"/>
               <a:t>Fourth level</a:t>
             </a:r>
           </a:p>
           <a:p>
             <a:pPr lvl="4"/>
             <a:r>
-              <a:rPr lang="en-US" smtClean="0"/>
+              <a:rPr lang="en-US"/>
               <a:t>Fifth level</a:t>
             </a:r>
-            <a:endParaRPr lang="en-US"/>
           </a:p>
         </p:txBody>
       </p:sp>
@@ -1304,38 +1308,37 @@
           <a:p>
             <a:pPr lvl="0"/>
             <a:r>
-              <a:rPr lang="en-US" smtClean="0"/>
+              <a:rPr lang="en-US"/>
               <a:t>Click to edit Master text styles</a:t>
             </a:r>
           </a:p>
           <a:p>
             <a:pPr lvl="1"/>
             <a:r>
-              <a:rPr lang="en-US" smtClean="0"/>
+              <a:rPr lang="en-US"/>
               <a:t>Second level</a:t>
             </a:r>
           </a:p>
           <a:p>
             <a:pPr lvl="2"/>
             <a:r>
-              <a:rPr lang="en-US" smtClean="0"/>
+              <a:rPr lang="en-US"/>
               <a:t>Third level</a:t>
             </a:r>
           </a:p>
           <a:p>
             <a:pPr lvl="3"/>
             <a:r>
-              <a:rPr lang="en-US" smtClean="0"/>
+              <a:rPr lang="en-US"/>
               <a:t>Fourth level</a:t>
             </a:r>
           </a:p>
           <a:p>
             <a:pPr lvl="4"/>
             <a:r>
-              <a:rPr lang="en-US" smtClean="0"/>
+              <a:rPr lang="en-US"/>
               <a:t>Fifth level</a:t>
             </a:r>
-            <a:endParaRPr lang="en-US"/>
           </a:p>
         </p:txBody>
       </p:sp>
@@ -1356,7 +1359,7 @@
           <a:p>
             <a:fld id="{5BCAD085-E8A6-8845-BD4E-CB4CCA059FC4}" type="datetimeFigureOut">
               <a:rPr lang="en-US" smtClean="0"/>
-              <a:t>1/27/13</a:t>
+              <a:t>9/13/2026</a:t>
             </a:fld>
             <a:endParaRPr lang="en-US"/>
           </a:p>
@@ -1454,10 +1457,9 @@
           </a:lstStyle>
           <a:p>
             <a:r>
-              <a:rPr lang="en-US" smtClean="0"/>
+              <a:rPr lang="en-US"/>
               <a:t>Click to edit Master title style</a:t>
             </a:r>
-            <a:endParaRPr lang="en-US"/>
           </a:p>
         </p:txBody>
       </p:sp>
@@ -1520,7 +1522,7 @@
           <a:p>
             <a:pPr lvl="0"/>
             <a:r>
-              <a:rPr lang="en-US" smtClean="0"/>
+              <a:rPr lang="en-US"/>
               <a:t>Click to edit Master text styles</a:t>
             </a:r>
           </a:p>
@@ -1576,38 +1578,37 @@
           <a:p>
             <a:pPr lvl="0"/>
             <a:r>
-              <a:rPr lang="en-US" smtClean="0"/>
+              <a:rPr lang="en-US"/>
               <a:t>Click to edit Master text styles</a:t>
             </a:r>
           </a:p>
           <a:p>
             <a:pPr lvl="1"/>
             <a:r>
-              <a:rPr lang="en-US" smtClean="0"/>
+              <a:rPr lang="en-US"/>
               <a:t>Second level</a:t>
             </a:r>
           </a:p>
           <a:p>
             <a:pPr lvl="2"/>
             <a:r>
-              <a:rPr lang="en-US" smtClean="0"/>
+              <a:rPr lang="en-US"/>
               <a:t>Third level</a:t>
             </a:r>
           </a:p>
           <a:p>
             <a:pPr lvl="3"/>
             <a:r>
-              <a:rPr lang="en-US" smtClean="0"/>
+              <a:rPr lang="en-US"/>
               <a:t>Fourth level</a:t>
             </a:r>
           </a:p>
           <a:p>
             <a:pPr lvl="4"/>
             <a:r>
-              <a:rPr lang="en-US" smtClean="0"/>
+              <a:rPr lang="en-US"/>
               <a:t>Fifth level</a:t>
             </a:r>
-            <a:endParaRPr lang="en-US"/>
           </a:p>
         </p:txBody>
       </p:sp>
@@ -1670,7 +1671,7 @@
           <a:p>
             <a:pPr lvl="0"/>
             <a:r>
-              <a:rPr lang="en-US" smtClean="0"/>
+              <a:rPr lang="en-US"/>
               <a:t>Click to edit Master text styles</a:t>
             </a:r>
           </a:p>
@@ -1726,38 +1727,37 @@
           <a:p>
             <a:pPr lvl="0"/>
             <a:r>
-              <a:rPr lang="en-US" smtClean="0"/>
+              <a:rPr lang="en-US"/>
               <a:t>Click to edit Master text styles</a:t>
             </a:r>
           </a:p>
           <a:p>
             <a:pPr lvl="1"/>
             <a:r>
-              <a:rPr lang="en-US" smtClean="0"/>
+              <a:rPr lang="en-US"/>
               <a:t>Second level</a:t>
             </a:r>
           </a:p>
           <a:p>
             <a:pPr lvl="2"/>
             <a:r>
-              <a:rPr lang="en-US" smtClean="0"/>
+              <a:rPr lang="en-US"/>
               <a:t>Third level</a:t>
             </a:r>
           </a:p>
           <a:p>
             <a:pPr lvl="3"/>
             <a:r>
-              <a:rPr lang="en-US" smtClean="0"/>
+              <a:rPr lang="en-US"/>
               <a:t>Fourth level</a:t>
             </a:r>
           </a:p>
           <a:p>
             <a:pPr lvl="4"/>
             <a:r>
-              <a:rPr lang="en-US" smtClean="0"/>
+              <a:rPr lang="en-US"/>
               <a:t>Fifth level</a:t>
             </a:r>
-            <a:endParaRPr lang="en-US"/>
           </a:p>
         </p:txBody>
       </p:sp>
@@ -1778,7 +1778,7 @@
           <a:p>
             <a:fld id="{5BCAD085-E8A6-8845-BD4E-CB4CCA059FC4}" type="datetimeFigureOut">
               <a:rPr lang="en-US" smtClean="0"/>
-              <a:t>1/27/13</a:t>
+              <a:t>9/13/2026</a:t>
             </a:fld>
             <a:endParaRPr lang="en-US"/>
           </a:p>
@@ -1872,10 +1872,9 @@
           <a:lstStyle/>
           <a:p>
             <a:r>
-              <a:rPr lang="en-US" smtClean="0"/>
+              <a:rPr lang="en-US"/>
               <a:t>Click to edit Master title style</a:t>
             </a:r>
-            <a:endParaRPr lang="en-US"/>
           </a:p>
         </p:txBody>
       </p:sp>
@@ -1896,7 +1895,7 @@
           <a:p>
             <a:fld id="{5BCAD085-E8A6-8845-BD4E-CB4CCA059FC4}" type="datetimeFigureOut">
               <a:rPr lang="en-US" smtClean="0"/>
-              <a:t>1/27/13</a:t>
+              <a:t>9/13/2026</a:t>
             </a:fld>
             <a:endParaRPr lang="en-US"/>
           </a:p>
@@ -1991,7 +1990,7 @@
           <a:p>
             <a:fld id="{5BCAD085-E8A6-8845-BD4E-CB4CCA059FC4}" type="datetimeFigureOut">
               <a:rPr lang="en-US" smtClean="0"/>
-              <a:t>1/27/13</a:t>
+              <a:t>9/13/2026</a:t>
             </a:fld>
             <a:endParaRPr lang="en-US"/>
           </a:p>
@@ -2094,10 +2093,9 @@
           </a:lstStyle>
           <a:p>
             <a:r>
-              <a:rPr lang="en-US" smtClean="0"/>
+              <a:rPr lang="en-US"/>
               <a:t>Click to edit Master title style</a:t>
             </a:r>
-            <a:endParaRPr lang="en-US"/>
           </a:p>
         </p:txBody>
       </p:sp>
@@ -2151,38 +2149,37 @@
           <a:p>
             <a:pPr lvl="0"/>
             <a:r>
-              <a:rPr lang="en-US" smtClean="0"/>
+              <a:rPr lang="en-US"/>
               <a:t>Click to edit Master text styles</a:t>
             </a:r>
           </a:p>
           <a:p>
             <a:pPr lvl="1"/>
             <a:r>
-              <a:rPr lang="en-US" smtClean="0"/>
+              <a:rPr lang="en-US"/>
               <a:t>Second level</a:t>
             </a:r>
           </a:p>
           <a:p>
             <a:pPr lvl="2"/>
             <a:r>
-              <a:rPr lang="en-US" smtClean="0"/>
+              <a:rPr lang="en-US"/>
               <a:t>Third level</a:t>
             </a:r>
           </a:p>
           <a:p>
             <a:pPr lvl="3"/>
             <a:r>
-              <a:rPr lang="en-US" smtClean="0"/>
+              <a:rPr lang="en-US"/>
               <a:t>Fourth level</a:t>
             </a:r>
           </a:p>
           <a:p>
             <a:pPr lvl="4"/>
             <a:r>
-              <a:rPr lang="en-US" smtClean="0"/>
+              <a:rPr lang="en-US"/>
               <a:t>Fifth level</a:t>
             </a:r>
-            <a:endParaRPr lang="en-US"/>
           </a:p>
         </p:txBody>
       </p:sp>
@@ -2245,7 +2242,7 @@
           <a:p>
             <a:pPr lvl="0"/>
             <a:r>
-              <a:rPr lang="en-US" smtClean="0"/>
+              <a:rPr lang="en-US"/>
               <a:t>Click to edit Master text styles</a:t>
             </a:r>
           </a:p>
@@ -2268,7 +2265,7 @@
           <a:p>
             <a:fld id="{5BCAD085-E8A6-8845-BD4E-CB4CCA059FC4}" type="datetimeFigureOut">
               <a:rPr lang="en-US" smtClean="0"/>
-              <a:t>1/27/13</a:t>
+              <a:t>9/13/2026</a:t>
             </a:fld>
             <a:endParaRPr lang="en-US"/>
           </a:p>
@@ -2371,10 +2368,9 @@
           </a:lstStyle>
           <a:p>
             <a:r>
-              <a:rPr lang="en-US" smtClean="0"/>
+              <a:rPr lang="en-US"/>
               <a:t>Click to edit Master title style</a:t>
             </a:r>
-            <a:endParaRPr lang="en-US"/>
           </a:p>
         </p:txBody>
       </p:sp>
@@ -2498,7 +2494,7 @@
           <a:p>
             <a:pPr lvl="0"/>
             <a:r>
-              <a:rPr lang="en-US" smtClean="0"/>
+              <a:rPr lang="en-US"/>
               <a:t>Click to edit Master text styles</a:t>
             </a:r>
           </a:p>
@@ -2521,7 +2517,7 @@
           <a:p>
             <a:fld id="{5BCAD085-E8A6-8845-BD4E-CB4CCA059FC4}" type="datetimeFigureOut">
               <a:rPr lang="en-US" smtClean="0"/>
-              <a:t>1/27/13</a:t>
+              <a:t>9/13/2026</a:t>
             </a:fld>
             <a:endParaRPr lang="en-US"/>
           </a:p>
@@ -2630,10 +2626,9 @@
           <a:lstStyle/>
           <a:p>
             <a:r>
-              <a:rPr lang="en-US" smtClean="0"/>
+              <a:rPr lang="en-US"/>
               <a:t>Click to edit Master title style</a:t>
             </a:r>
-            <a:endParaRPr lang="en-US"/>
           </a:p>
         </p:txBody>
       </p:sp>
@@ -2664,38 +2659,37 @@
           <a:p>
             <a:pPr lvl="0"/>
             <a:r>
-              <a:rPr lang="en-US" smtClean="0"/>
+              <a:rPr lang="en-US"/>
               <a:t>Click to edit Master text styles</a:t>
             </a:r>
           </a:p>
           <a:p>
             <a:pPr lvl="1"/>
             <a:r>
-              <a:rPr lang="en-US" smtClean="0"/>
+              <a:rPr lang="en-US"/>
               <a:t>Second level</a:t>
             </a:r>
           </a:p>
           <a:p>
             <a:pPr lvl="2"/>
             <a:r>
-              <a:rPr lang="en-US" smtClean="0"/>
+              <a:rPr lang="en-US"/>
               <a:t>Third level</a:t>
             </a:r>
           </a:p>
           <a:p>
             <a:pPr lvl="3"/>
             <a:r>
-              <a:rPr lang="en-US" smtClean="0"/>
+              <a:rPr lang="en-US"/>
               <a:t>Fourth level</a:t>
             </a:r>
           </a:p>
           <a:p>
             <a:pPr lvl="4"/>
             <a:r>
-              <a:rPr lang="en-US" smtClean="0"/>
+              <a:rPr lang="en-US"/>
               <a:t>Fifth level</a:t>
             </a:r>
-            <a:endParaRPr lang="en-US"/>
           </a:p>
         </p:txBody>
       </p:sp>
@@ -2734,7 +2728,7 @@
           <a:p>
             <a:fld id="{5BCAD085-E8A6-8845-BD4E-CB4CCA059FC4}" type="datetimeFigureOut">
               <a:rPr lang="en-US" smtClean="0"/>
-              <a:t>1/27/13</a:t>
+              <a:t>9/13/2026</a:t>
             </a:fld>
             <a:endParaRPr lang="en-US"/>
           </a:p>
@@ -3093,7 +3087,7 @@
 </file>
 
 <file path=ppt/slides/slide1.xml><?xml version="1.0" encoding="utf-8"?>
-<p:sld xmlns:a="http://schemas.openxmlformats.org/drawingml/2006/main" xmlns:p="http://schemas.openxmlformats.org/presentationml/2006/main" xmlns:r="http://schemas.openxmlformats.org/officeDocument/2006/relationships">
+<p:sld xmlns:a="http://schemas.openxmlformats.org/drawingml/2006/main" xmlns:r="http://schemas.openxmlformats.org/officeDocument/2006/relationships" xmlns:p="http://schemas.openxmlformats.org/presentationml/2006/main">
   <p:cSld>
     <p:spTree>
       <p:nvGrpSpPr>
@@ -3101,7 +3095,14 @@
         <p:cNvGrpSpPr/>
         <p:nvPr/>
       </p:nvGrpSpPr>
-      <p:grpSpPr/>
+      <p:grpSpPr>
+        <a:xfrm>
+          <a:off x="0" y="0"/>
+          <a:ext cx="0" cy="0"/>
+          <a:chOff x="0" y="0"/>
+          <a:chExt cx="0" cy="0"/>
+        </a:xfrm>
+      </p:grpSpPr>
       <p:sp>
         <p:nvSpPr>
           <p:cNvPr id="2" name="Rectangle 1"/>
@@ -3142,6 +3143,7 @@
           <a:lstStyle/>
           <a:p>
             <a:pPr algn="ctr"/>
+            <a:endParaRPr/>
           </a:p>
         </p:txBody>
       </p:sp>
@@ -3188,6 +3190,7 @@
           <a:lstStyle/>
           <a:p>
             <a:pPr algn="ctr"/>
+            <a:endParaRPr/>
           </a:p>
         </p:txBody>
       </p:sp>
@@ -3234,6 +3237,7 @@
           <a:lstStyle/>
           <a:p>
             <a:pPr algn="ctr"/>
+            <a:endParaRPr/>
           </a:p>
         </p:txBody>
       </p:sp>
@@ -3390,7 +3394,7 @@
 </file>
 
 <file path=ppt/slides/slide10.xml><?xml version="1.0" encoding="utf-8"?>
-<p:sld xmlns:a="http://schemas.openxmlformats.org/drawingml/2006/main" xmlns:p="http://schemas.openxmlformats.org/presentationml/2006/main" xmlns:r="http://schemas.openxmlformats.org/officeDocument/2006/relationships">
+<p:sld xmlns:a="http://schemas.openxmlformats.org/drawingml/2006/main" xmlns:r="http://schemas.openxmlformats.org/officeDocument/2006/relationships" xmlns:p="http://schemas.openxmlformats.org/presentationml/2006/main">
   <p:cSld>
     <p:spTree>
       <p:nvGrpSpPr>
@@ -3398,7 +3402,14 @@
         <p:cNvGrpSpPr/>
         <p:nvPr/>
       </p:nvGrpSpPr>
-      <p:grpSpPr/>
+      <p:grpSpPr>
+        <a:xfrm>
+          <a:off x="0" y="0"/>
+          <a:ext cx="0" cy="0"/>
+          <a:chOff x="0" y="0"/>
+          <a:chExt cx="0" cy="0"/>
+        </a:xfrm>
+      </p:grpSpPr>
       <p:sp>
         <p:nvSpPr>
           <p:cNvPr id="2" name="Rectangle 1"/>
@@ -3439,6 +3450,7 @@
           <a:lstStyle/>
           <a:p>
             <a:pPr algn="ctr"/>
+            <a:endParaRPr/>
           </a:p>
         </p:txBody>
       </p:sp>
@@ -3473,7 +3485,7 @@
               </a:defRPr>
             </a:pPr>
             <a:r>
-              <a:t>LIVE DEMO</a:t>
+              <a:t>IMPACT</a:t>
             </a:r>
           </a:p>
         </p:txBody>
@@ -3509,7 +3521,7 @@
               </a:defRPr>
             </a:pPr>
             <a:r>
-              <a:t>See LOOP in Action</a:t>
+              <a:t>Driving Real Behavior Change</a:t>
             </a:r>
           </a:p>
         </p:txBody>
@@ -3523,7 +3535,7 @@
         <p:spPr>
           <a:xfrm>
             <a:off x="731520" y="1737360"/>
-            <a:ext cx="3474720" cy="3657600"/>
+            <a:ext cx="3474720" cy="2103120"/>
           </a:xfrm>
           <a:prstGeom prst="roundRect">
             <a:avLst/>
@@ -3556,6 +3568,7 @@
           <a:lstStyle/>
           <a:p>
             <a:pPr algn="ctr"/>
+            <a:endParaRPr/>
           </a:p>
         </p:txBody>
       </p:sp>
@@ -3567,8 +3580,8 @@
         </p:nvSpPr>
         <p:spPr>
           <a:xfrm>
-            <a:off x="731520" y="3200400"/>
-            <a:ext cx="3474720" cy="457200"/>
+            <a:off x="731520" y="1920240"/>
+            <a:ext cx="3474720" cy="914400"/>
           </a:xfrm>
           <a:prstGeom prst="rect">
             <a:avLst/>
@@ -3582,7 +3595,7 @@
           <a:lstStyle/>
           <a:p>
             <a:pPr algn="ctr">
-              <a:defRPr sz="1400" b="0">
+              <a:defRPr sz="4800" b="1">
                 <a:solidFill>
                   <a:srgbClr val="22C55E"/>
                 </a:solidFill>
@@ -3590,7 +3603,7 @@
               </a:defRPr>
             </a:pPr>
             <a:r>
-              <a:t>[LIVE DEMO]</a:t>
+              <a:t>10-15%</a:t>
             </a:r>
           </a:p>
         </p:txBody>
@@ -3603,7 +3616,7 @@
         </p:nvSpPr>
         <p:spPr>
           <a:xfrm>
-            <a:off x="731520" y="5486400"/>
+            <a:off x="731520" y="2834640"/>
             <a:ext cx="3474720" cy="457200"/>
           </a:xfrm>
           <a:prstGeom prst="rect">
@@ -3626,7 +3639,7 @@
               </a:defRPr>
             </a:pPr>
             <a:r>
-              <a:t>Dashboard</a:t>
+              <a:t>Emission Reduction</a:t>
             </a:r>
           </a:p>
         </p:txBody>
@@ -3639,16 +3652,16 @@
         </p:nvSpPr>
         <p:spPr>
           <a:xfrm>
-            <a:off x="731520" y="5897880"/>
-            <a:ext cx="3474720" cy="457200"/>
-          </a:xfrm>
-          <a:prstGeom prst="rect">
-            <a:avLst/>
-          </a:prstGeom>
-          <a:noFill/>
-        </p:spPr>
-        <p:txBody>
-          <a:bodyPr wrap="none">
+            <a:off x="914400" y="3291840"/>
+            <a:ext cx="3108960" cy="548640"/>
+          </a:xfrm>
+          <a:prstGeom prst="rect">
+            <a:avLst/>
+          </a:prstGeom>
+          <a:noFill/>
+        </p:spPr>
+        <p:txBody>
+          <a:bodyPr wrap="square">
             <a:spAutoFit/>
           </a:bodyPr>
           <a:lstStyle/>
@@ -3662,7 +3675,7 @@
               </a:defRPr>
             </a:pPr>
             <a:r>
-              <a:t>Score, personality, breakdown charts</a:t>
+              <a:t>Average reduction by users who track carbon</a:t>
             </a:r>
           </a:p>
         </p:txBody>
@@ -3676,7 +3689,161 @@
         <p:spPr>
           <a:xfrm>
             <a:off x="4480559" y="1737360"/>
-            <a:ext cx="3474720" cy="3657600"/>
+            <a:ext cx="3474720" cy="2103120"/>
+          </a:xfrm>
+          <a:prstGeom prst="roundRect">
+            <a:avLst/>
+          </a:prstGeom>
+          <a:solidFill>
+            <a:srgbClr val="111827"/>
+          </a:solidFill>
+          <a:ln w="25400">
+            <a:solidFill>
+              <a:srgbClr val="4ADE80"/>
+            </a:solidFill>
+          </a:ln>
+        </p:spPr>
+        <p:style>
+          <a:lnRef idx="1">
+            <a:schemeClr val="accent1"/>
+          </a:lnRef>
+          <a:fillRef idx="3">
+            <a:schemeClr val="accent1"/>
+          </a:fillRef>
+          <a:effectRef idx="2">
+            <a:schemeClr val="accent1"/>
+          </a:effectRef>
+          <a:fontRef idx="minor">
+            <a:schemeClr val="lt1"/>
+          </a:fontRef>
+        </p:style>
+        <p:txBody>
+          <a:bodyPr rtlCol="0" anchor="ctr"/>
+          <a:lstStyle/>
+          <a:p>
+            <a:pPr algn="ctr"/>
+            <a:endParaRPr/>
+          </a:p>
+        </p:txBody>
+      </p:sp>
+      <p:sp>
+        <p:nvSpPr>
+          <p:cNvPr id="10" name="TextBox 9"/>
+          <p:cNvSpPr txBox="1"/>
+          <p:nvPr/>
+        </p:nvSpPr>
+        <p:spPr>
+          <a:xfrm>
+            <a:off x="4480559" y="1920240"/>
+            <a:ext cx="3474720" cy="914400"/>
+          </a:xfrm>
+          <a:prstGeom prst="rect">
+            <a:avLst/>
+          </a:prstGeom>
+          <a:noFill/>
+        </p:spPr>
+        <p:txBody>
+          <a:bodyPr wrap="none">
+            <a:spAutoFit/>
+          </a:bodyPr>
+          <a:lstStyle/>
+          <a:p>
+            <a:pPr algn="ctr">
+              <a:defRPr sz="4800" b="1">
+                <a:solidFill>
+                  <a:srgbClr val="4ADE80"/>
+                </a:solidFill>
+                <a:latin typeface="Segoe UI"/>
+              </a:defRPr>
+            </a:pPr>
+            <a:r>
+              <a:t>3x</a:t>
+            </a:r>
+          </a:p>
+        </p:txBody>
+      </p:sp>
+      <p:sp>
+        <p:nvSpPr>
+          <p:cNvPr id="11" name="TextBox 10"/>
+          <p:cNvSpPr txBox="1"/>
+          <p:nvPr/>
+        </p:nvSpPr>
+        <p:spPr>
+          <a:xfrm>
+            <a:off x="4480559" y="2834640"/>
+            <a:ext cx="3474720" cy="457200"/>
+          </a:xfrm>
+          <a:prstGeom prst="rect">
+            <a:avLst/>
+          </a:prstGeom>
+          <a:noFill/>
+        </p:spPr>
+        <p:txBody>
+          <a:bodyPr wrap="none">
+            <a:spAutoFit/>
+          </a:bodyPr>
+          <a:lstStyle/>
+          <a:p>
+            <a:pPr algn="ctr">
+              <a:defRPr sz="1800" b="1">
+                <a:solidFill>
+                  <a:srgbClr val="F1F5F9"/>
+                </a:solidFill>
+                <a:latin typeface="Segoe UI"/>
+              </a:defRPr>
+            </a:pPr>
+            <a:r>
+              <a:t>Engagement</a:t>
+            </a:r>
+          </a:p>
+        </p:txBody>
+      </p:sp>
+      <p:sp>
+        <p:nvSpPr>
+          <p:cNvPr id="12" name="TextBox 11"/>
+          <p:cNvSpPr txBox="1"/>
+          <p:nvPr/>
+        </p:nvSpPr>
+        <p:spPr>
+          <a:xfrm>
+            <a:off x="4663439" y="3291840"/>
+            <a:ext cx="3108960" cy="548640"/>
+          </a:xfrm>
+          <a:prstGeom prst="rect">
+            <a:avLst/>
+          </a:prstGeom>
+          <a:noFill/>
+        </p:spPr>
+        <p:txBody>
+          <a:bodyPr wrap="square">
+            <a:spAutoFit/>
+          </a:bodyPr>
+          <a:lstStyle/>
+          <a:p>
+            <a:pPr algn="ctr">
+              <a:defRPr sz="1200" b="0">
+                <a:solidFill>
+                  <a:srgbClr val="94A3B8"/>
+                </a:solidFill>
+                <a:latin typeface="Segoe UI"/>
+              </a:defRPr>
+            </a:pPr>
+            <a:r>
+              <a:t>Social comparison increases engagement over solo tracking</a:t>
+            </a:r>
+          </a:p>
+        </p:txBody>
+      </p:sp>
+      <p:sp>
+        <p:nvSpPr>
+          <p:cNvPr id="13" name="Rounded Rectangle 12"/>
+          <p:cNvSpPr/>
+          <p:nvPr/>
+        </p:nvSpPr>
+        <p:spPr>
+          <a:xfrm>
+            <a:off x="8229600" y="1737360"/>
+            <a:ext cx="3474720" cy="2103120"/>
           </a:xfrm>
           <a:prstGeom prst="roundRect">
             <a:avLst/>
@@ -3709,19 +3876,20 @@
           <a:lstStyle/>
           <a:p>
             <a:pPr algn="ctr"/>
-          </a:p>
-        </p:txBody>
-      </p:sp>
-      <p:sp>
-        <p:nvSpPr>
-          <p:cNvPr id="10" name="TextBox 9"/>
-          <p:cNvSpPr txBox="1"/>
-          <p:nvPr/>
-        </p:nvSpPr>
-        <p:spPr>
-          <a:xfrm>
-            <a:off x="4480559" y="3200400"/>
-            <a:ext cx="3474720" cy="457200"/>
+            <a:endParaRPr/>
+          </a:p>
+        </p:txBody>
+      </p:sp>
+      <p:sp>
+        <p:nvSpPr>
+          <p:cNvPr id="14" name="TextBox 13"/>
+          <p:cNvSpPr txBox="1"/>
+          <p:nvPr/>
+        </p:nvSpPr>
+        <p:spPr>
+          <a:xfrm>
+            <a:off x="8229600" y="1920240"/>
+            <a:ext cx="3474720" cy="914400"/>
           </a:xfrm>
           <a:prstGeom prst="rect">
             <a:avLst/>
@@ -3735,7 +3903,7 @@
           <a:lstStyle/>
           <a:p>
             <a:pPr algn="ctr">
-              <a:defRPr sz="1400" b="0">
+              <a:defRPr sz="4800" b="1">
                 <a:solidFill>
                   <a:srgbClr val="22C55E"/>
                 </a:solidFill>
@@ -3743,20 +3911,20 @@
               </a:defRPr>
             </a:pPr>
             <a:r>
-              <a:t>[LIVE DEMO]</a:t>
-            </a:r>
-          </a:p>
-        </p:txBody>
-      </p:sp>
-      <p:sp>
-        <p:nvSpPr>
-          <p:cNvPr id="11" name="TextBox 10"/>
-          <p:cNvSpPr txBox="1"/>
-          <p:nvPr/>
-        </p:nvSpPr>
-        <p:spPr>
-          <a:xfrm>
-            <a:off x="4480559" y="5486400"/>
+              <a:t>5x</a:t>
+            </a:r>
+          </a:p>
+        </p:txBody>
+      </p:sp>
+      <p:sp>
+        <p:nvSpPr>
+          <p:cNvPr id="15" name="TextBox 14"/>
+          <p:cNvSpPr txBox="1"/>
+          <p:nvPr/>
+        </p:nvSpPr>
+        <p:spPr>
+          <a:xfrm>
+            <a:off x="8229600" y="2834640"/>
             <a:ext cx="3474720" cy="457200"/>
           </a:xfrm>
           <a:prstGeom prst="rect">
@@ -3779,29 +3947,29 @@
               </a:defRPr>
             </a:pPr>
             <a:r>
-              <a:t>Action Map</a:t>
-            </a:r>
-          </a:p>
-        </p:txBody>
-      </p:sp>
-      <p:sp>
-        <p:nvSpPr>
-          <p:cNvPr id="12" name="TextBox 11"/>
-          <p:cNvSpPr txBox="1"/>
-          <p:nvPr/>
-        </p:nvSpPr>
-        <p:spPr>
-          <a:xfrm>
-            <a:off x="4480559" y="5897880"/>
-            <a:ext cx="3474720" cy="457200"/>
-          </a:xfrm>
-          <a:prstGeom prst="rect">
-            <a:avLst/>
-          </a:prstGeom>
-          <a:noFill/>
-        </p:spPr>
-        <p:txBody>
-          <a:bodyPr wrap="none">
+              <a:t>Retention</a:t>
+            </a:r>
+          </a:p>
+        </p:txBody>
+      </p:sp>
+      <p:sp>
+        <p:nvSpPr>
+          <p:cNvPr id="16" name="TextBox 15"/>
+          <p:cNvSpPr txBox="1"/>
+          <p:nvPr/>
+        </p:nvSpPr>
+        <p:spPr>
+          <a:xfrm>
+            <a:off x="8412480" y="3291840"/>
+            <a:ext cx="3108960" cy="548640"/>
+          </a:xfrm>
+          <a:prstGeom prst="rect">
+            <a:avLst/>
+          </a:prstGeom>
+          <a:noFill/>
+        </p:spPr>
+        <p:txBody>
+          <a:bodyPr wrap="square">
             <a:spAutoFit/>
           </a:bodyPr>
           <a:lstStyle/>
@@ -3815,80 +3983,71 @@
               </a:defRPr>
             </a:pPr>
             <a:r>
-              <a:t>Local recycling &amp; repair points</a:t>
-            </a:r>
-          </a:p>
-        </p:txBody>
-      </p:sp>
-      <p:sp>
-        <p:nvSpPr>
-          <p:cNvPr id="13" name="Rounded Rectangle 12"/>
-          <p:cNvSpPr/>
-          <p:nvPr/>
-        </p:nvSpPr>
-        <p:spPr>
-          <a:xfrm>
-            <a:off x="8229600" y="1737360"/>
-            <a:ext cx="3474720" cy="3657600"/>
-          </a:xfrm>
-          <a:prstGeom prst="roundRect">
-            <a:avLst/>
-          </a:prstGeom>
-          <a:solidFill>
-            <a:srgbClr val="111827"/>
-          </a:solidFill>
-          <a:ln w="25400">
-            <a:solidFill>
-              <a:srgbClr val="22C55E"/>
-            </a:solidFill>
-          </a:ln>
-        </p:spPr>
-        <p:style>
-          <a:lnRef idx="1">
-            <a:schemeClr val="accent1"/>
-          </a:lnRef>
-          <a:fillRef idx="3">
-            <a:schemeClr val="accent1"/>
-          </a:fillRef>
-          <a:effectRef idx="2">
-            <a:schemeClr val="accent1"/>
-          </a:effectRef>
-          <a:fontRef idx="minor">
-            <a:schemeClr val="lt1"/>
-          </a:fontRef>
-        </p:style>
-        <p:txBody>
-          <a:bodyPr rtlCol="0" anchor="ctr"/>
-          <a:lstStyle/>
-          <a:p>
-            <a:pPr algn="ctr"/>
-          </a:p>
-        </p:txBody>
-      </p:sp>
-      <p:sp>
-        <p:nvSpPr>
-          <p:cNvPr id="14" name="TextBox 13"/>
-          <p:cNvSpPr txBox="1"/>
-          <p:nvPr/>
-        </p:nvSpPr>
-        <p:spPr>
-          <a:xfrm>
-            <a:off x="8229600" y="3200400"/>
-            <a:ext cx="3474720" cy="457200"/>
-          </a:xfrm>
-          <a:prstGeom prst="rect">
-            <a:avLst/>
-          </a:prstGeom>
-          <a:noFill/>
-        </p:spPr>
-        <p:txBody>
-          <a:bodyPr wrap="none">
-            <a:spAutoFit/>
-          </a:bodyPr>
-          <a:lstStyle/>
-          <a:p>
-            <a:pPr algn="ctr">
-              <a:defRPr sz="1400" b="0">
+              <a:t>Gamification improves retention vs basic tracking apps</a:t>
+            </a:r>
+          </a:p>
+        </p:txBody>
+      </p:sp>
+      <p:sp>
+        <p:nvSpPr>
+          <p:cNvPr id="17" name="TextBox 16"/>
+          <p:cNvSpPr txBox="1"/>
+          <p:nvPr/>
+        </p:nvSpPr>
+        <p:spPr>
+          <a:xfrm>
+            <a:off x="731520" y="4114800"/>
+            <a:ext cx="10058400" cy="457200"/>
+          </a:xfrm>
+          <a:prstGeom prst="rect">
+            <a:avLst/>
+          </a:prstGeom>
+          <a:noFill/>
+        </p:spPr>
+        <p:txBody>
+          <a:bodyPr wrap="none">
+            <a:spAutoFit/>
+          </a:bodyPr>
+          <a:lstStyle/>
+          <a:p>
+            <a:pPr algn="l">
+              <a:defRPr sz="2000" b="1">
+                <a:solidFill>
+                  <a:srgbClr val="F1F5F9"/>
+                </a:solidFill>
+                <a:latin typeface="Segoe UI"/>
+              </a:defRPr>
+            </a:pPr>
+            <a:r>
+              <a:t>Three Levels of Impact</a:t>
+            </a:r>
+          </a:p>
+        </p:txBody>
+      </p:sp>
+      <p:sp>
+        <p:nvSpPr>
+          <p:cNvPr id="18" name="TextBox 17"/>
+          <p:cNvSpPr txBox="1"/>
+          <p:nvPr/>
+        </p:nvSpPr>
+        <p:spPr>
+          <a:xfrm>
+            <a:off x="731520" y="4663440"/>
+            <a:ext cx="3474720" cy="365760"/>
+          </a:xfrm>
+          <a:prstGeom prst="rect">
+            <a:avLst/>
+          </a:prstGeom>
+          <a:noFill/>
+        </p:spPr>
+        <p:txBody>
+          <a:bodyPr wrap="none">
+            <a:spAutoFit/>
+          </a:bodyPr>
+          <a:lstStyle/>
+          <a:p>
+            <a:pPr algn="l">
+              <a:defRPr sz="1600" b="1">
                 <a:solidFill>
                   <a:srgbClr val="22C55E"/>
                 </a:solidFill>
@@ -3896,71 +4055,35 @@
               </a:defRPr>
             </a:pPr>
             <a:r>
-              <a:t>[LIVE DEMO]</a:t>
-            </a:r>
-          </a:p>
-        </p:txBody>
-      </p:sp>
-      <p:sp>
-        <p:nvSpPr>
-          <p:cNvPr id="15" name="TextBox 14"/>
-          <p:cNvSpPr txBox="1"/>
-          <p:nvPr/>
-        </p:nvSpPr>
-        <p:spPr>
-          <a:xfrm>
-            <a:off x="8229600" y="5486400"/>
-            <a:ext cx="3474720" cy="457200"/>
-          </a:xfrm>
-          <a:prstGeom prst="rect">
-            <a:avLst/>
-          </a:prstGeom>
-          <a:noFill/>
-        </p:spPr>
-        <p:txBody>
-          <a:bodyPr wrap="none">
-            <a:spAutoFit/>
-          </a:bodyPr>
-          <a:lstStyle/>
-          <a:p>
-            <a:pPr algn="ctr">
-              <a:defRPr sz="1800" b="1">
-                <a:solidFill>
-                  <a:srgbClr val="F1F5F9"/>
-                </a:solidFill>
-                <a:latin typeface="Segoe UI"/>
-              </a:defRPr>
-            </a:pPr>
-            <a:r>
-              <a:t>Circles</a:t>
-            </a:r>
-          </a:p>
-        </p:txBody>
-      </p:sp>
-      <p:sp>
-        <p:nvSpPr>
-          <p:cNvPr id="16" name="TextBox 15"/>
-          <p:cNvSpPr txBox="1"/>
-          <p:nvPr/>
-        </p:nvSpPr>
-        <p:spPr>
-          <a:xfrm>
-            <a:off x="8229600" y="5897880"/>
-            <a:ext cx="3474720" cy="457200"/>
-          </a:xfrm>
-          <a:prstGeom prst="rect">
-            <a:avLst/>
-          </a:prstGeom>
-          <a:noFill/>
-        </p:spPr>
-        <p:txBody>
-          <a:bodyPr wrap="none">
-            <a:spAutoFit/>
-          </a:bodyPr>
-          <a:lstStyle/>
-          <a:p>
-            <a:pPr algn="ctr">
-              <a:defRPr sz="1200" b="0">
+              <a:t>Individual</a:t>
+            </a:r>
+          </a:p>
+        </p:txBody>
+      </p:sp>
+      <p:sp>
+        <p:nvSpPr>
+          <p:cNvPr id="19" name="TextBox 18"/>
+          <p:cNvSpPr txBox="1"/>
+          <p:nvPr/>
+        </p:nvSpPr>
+        <p:spPr>
+          <a:xfrm>
+            <a:off x="731520" y="5029200"/>
+            <a:ext cx="3474720" cy="1097280"/>
+          </a:xfrm>
+          <a:prstGeom prst="rect">
+            <a:avLst/>
+          </a:prstGeom>
+          <a:noFill/>
+        </p:spPr>
+        <p:txBody>
+          <a:bodyPr wrap="square">
+            <a:spAutoFit/>
+          </a:bodyPr>
+          <a:lstStyle/>
+          <a:p>
+            <a:pPr algn="l">
+              <a:defRPr sz="1300" b="0">
                 <a:solidFill>
                   <a:srgbClr val="94A3B8"/>
                 </a:solidFill>
@@ -3968,7 +4091,151 @@
               </a:defRPr>
             </a:pPr>
             <a:r>
-              <a:t>Social leaderboards</a:t>
+              <a:t>Awareness of where carbon comes from. Actionable insights specific to spending.</a:t>
+            </a:r>
+          </a:p>
+        </p:txBody>
+      </p:sp>
+      <p:sp>
+        <p:nvSpPr>
+          <p:cNvPr id="20" name="TextBox 19"/>
+          <p:cNvSpPr txBox="1"/>
+          <p:nvPr/>
+        </p:nvSpPr>
+        <p:spPr>
+          <a:xfrm>
+            <a:off x="4480559" y="4663440"/>
+            <a:ext cx="3474720" cy="365760"/>
+          </a:xfrm>
+          <a:prstGeom prst="rect">
+            <a:avLst/>
+          </a:prstGeom>
+          <a:noFill/>
+        </p:spPr>
+        <p:txBody>
+          <a:bodyPr wrap="none">
+            <a:spAutoFit/>
+          </a:bodyPr>
+          <a:lstStyle/>
+          <a:p>
+            <a:pPr algn="l">
+              <a:defRPr sz="1600" b="1">
+                <a:solidFill>
+                  <a:srgbClr val="22C55E"/>
+                </a:solidFill>
+                <a:latin typeface="Segoe UI"/>
+              </a:defRPr>
+            </a:pPr>
+            <a:r>
+              <a:t>Social</a:t>
+            </a:r>
+          </a:p>
+        </p:txBody>
+      </p:sp>
+      <p:sp>
+        <p:nvSpPr>
+          <p:cNvPr id="21" name="TextBox 20"/>
+          <p:cNvSpPr txBox="1"/>
+          <p:nvPr/>
+        </p:nvSpPr>
+        <p:spPr>
+          <a:xfrm>
+            <a:off x="4480559" y="5029200"/>
+            <a:ext cx="3474720" cy="1097280"/>
+          </a:xfrm>
+          <a:prstGeom prst="rect">
+            <a:avLst/>
+          </a:prstGeom>
+          <a:noFill/>
+        </p:spPr>
+        <p:txBody>
+          <a:bodyPr wrap="square">
+            <a:spAutoFit/>
+          </a:bodyPr>
+          <a:lstStyle/>
+          <a:p>
+            <a:pPr algn="l">
+              <a:defRPr sz="1300" b="0">
+                <a:solidFill>
+                  <a:srgbClr val="94A3B8"/>
+                </a:solidFill>
+                <a:latin typeface="Segoe UI"/>
+              </a:defRPr>
+            </a:pPr>
+            <a:r>
+              <a:t>City rankings and friend circles create healthy competition and accountability.</a:t>
+            </a:r>
+          </a:p>
+        </p:txBody>
+      </p:sp>
+      <p:sp>
+        <p:nvSpPr>
+          <p:cNvPr id="22" name="TextBox 21"/>
+          <p:cNvSpPr txBox="1"/>
+          <p:nvPr/>
+        </p:nvSpPr>
+        <p:spPr>
+          <a:xfrm>
+            <a:off x="8229600" y="4663440"/>
+            <a:ext cx="3474720" cy="365760"/>
+          </a:xfrm>
+          <a:prstGeom prst="rect">
+            <a:avLst/>
+          </a:prstGeom>
+          <a:noFill/>
+        </p:spPr>
+        <p:txBody>
+          <a:bodyPr wrap="none">
+            <a:spAutoFit/>
+          </a:bodyPr>
+          <a:lstStyle/>
+          <a:p>
+            <a:pPr algn="l">
+              <a:defRPr sz="1600" b="1">
+                <a:solidFill>
+                  <a:srgbClr val="22C55E"/>
+                </a:solidFill>
+                <a:latin typeface="Segoe UI"/>
+              </a:defRPr>
+            </a:pPr>
+            <a:r>
+              <a:t>Systemic</a:t>
+            </a:r>
+          </a:p>
+        </p:txBody>
+      </p:sp>
+      <p:sp>
+        <p:nvSpPr>
+          <p:cNvPr id="23" name="TextBox 22"/>
+          <p:cNvSpPr txBox="1"/>
+          <p:nvPr/>
+        </p:nvSpPr>
+        <p:spPr>
+          <a:xfrm>
+            <a:off x="8229600" y="5029200"/>
+            <a:ext cx="3474720" cy="1097280"/>
+          </a:xfrm>
+          <a:prstGeom prst="rect">
+            <a:avLst/>
+          </a:prstGeom>
+          <a:noFill/>
+        </p:spPr>
+        <p:txBody>
+          <a:bodyPr wrap="square">
+            <a:spAutoFit/>
+          </a:bodyPr>
+          <a:lstStyle/>
+          <a:p>
+            <a:pPr algn="l">
+              <a:defRPr sz="1300" b="0">
+                <a:solidFill>
+                  <a:srgbClr val="94A3B8"/>
+                </a:solidFill>
+                <a:latin typeface="Segoe UI"/>
+              </a:defRPr>
+            </a:pPr>
+            <a:r>
+              <a:t>Aggregated data reveals consumption patterns. Connects users to local solutions.</a:t>
             </a:r>
           </a:p>
         </p:txBody>
@@ -3982,7 +4249,7 @@
 </file>
 
 <file path=ppt/slides/slide11.xml><?xml version="1.0" encoding="utf-8"?>
-<p:sld xmlns:a="http://schemas.openxmlformats.org/drawingml/2006/main" xmlns:p="http://schemas.openxmlformats.org/presentationml/2006/main" xmlns:r="http://schemas.openxmlformats.org/officeDocument/2006/relationships">
+<p:sld xmlns:a="http://schemas.openxmlformats.org/drawingml/2006/main" xmlns:r="http://schemas.openxmlformats.org/officeDocument/2006/relationships" xmlns:p="http://schemas.openxmlformats.org/presentationml/2006/main">
   <p:cSld>
     <p:spTree>
       <p:nvGrpSpPr>
@@ -3990,7 +4257,14 @@
         <p:cNvGrpSpPr/>
         <p:nvPr/>
       </p:nvGrpSpPr>
-      <p:grpSpPr/>
+      <p:grpSpPr>
+        <a:xfrm>
+          <a:off x="0" y="0"/>
+          <a:ext cx="0" cy="0"/>
+          <a:chOff x="0" y="0"/>
+          <a:chExt cx="0" cy="0"/>
+        </a:xfrm>
+      </p:grpSpPr>
       <p:sp>
         <p:nvSpPr>
           <p:cNvPr id="2" name="Rectangle 1"/>
@@ -4031,6 +4305,7 @@
           <a:lstStyle/>
           <a:p>
             <a:pPr algn="ctr"/>
+            <a:endParaRPr/>
           </a:p>
         </p:txBody>
       </p:sp>
@@ -4065,7 +4340,7 @@
               </a:defRPr>
             </a:pPr>
             <a:r>
-              <a:t>IMPACT</a:t>
+              <a:t>COMPETITIVE EDGE</a:t>
             </a:r>
           </a:p>
         </p:txBody>
@@ -4101,32 +4376,30 @@
               </a:defRPr>
             </a:pPr>
             <a:r>
-              <a:t>Driving Real Behavior Change</a:t>
-            </a:r>
-          </a:p>
-        </p:txBody>
-      </p:sp>
-      <p:sp>
-        <p:nvSpPr>
-          <p:cNvPr id="5" name="Rounded Rectangle 4"/>
+              <a:t>Why LOOP is Different</a:t>
+            </a:r>
+          </a:p>
+        </p:txBody>
+      </p:sp>
+      <p:sp>
+        <p:nvSpPr>
+          <p:cNvPr id="5" name="Rectangle 4"/>
           <p:cNvSpPr/>
           <p:nvPr/>
         </p:nvSpPr>
         <p:spPr>
           <a:xfrm>
             <a:off x="731520" y="1737360"/>
-            <a:ext cx="3474720" cy="2103120"/>
-          </a:xfrm>
-          <a:prstGeom prst="roundRect">
+            <a:ext cx="3657600" cy="548640"/>
+          </a:xfrm>
+          <a:prstGeom prst="rect">
             <a:avLst/>
           </a:prstGeom>
           <a:solidFill>
             <a:srgbClr val="111827"/>
           </a:solidFill>
-          <a:ln w="25400">
-            <a:solidFill>
-              <a:srgbClr val="22C55E"/>
-            </a:solidFill>
+          <a:ln>
+            <a:noFill/>
           </a:ln>
         </p:spPr>
         <p:style>
@@ -4148,6 +4421,7 @@
           <a:lstStyle/>
           <a:p>
             <a:pPr algn="ctr"/>
+            <a:endParaRPr/>
           </a:p>
         </p:txBody>
       </p:sp>
@@ -4159,8 +4433,8 @@
         </p:nvSpPr>
         <p:spPr>
           <a:xfrm>
-            <a:off x="731520" y="1920240"/>
-            <a:ext cx="3474720" cy="914400"/>
+            <a:off x="731520" y="1828800"/>
+            <a:ext cx="3657600" cy="457200"/>
           </a:xfrm>
           <a:prstGeom prst="rect">
             <a:avLst/>
@@ -4174,43 +4448,7 @@
           <a:lstStyle/>
           <a:p>
             <a:pPr algn="ctr">
-              <a:defRPr sz="4800" b="1">
-                <a:solidFill>
-                  <a:srgbClr val="22C55E"/>
-                </a:solidFill>
-                <a:latin typeface="Segoe UI"/>
-              </a:defRPr>
-            </a:pPr>
-            <a:r>
-              <a:t>10-15%</a:t>
-            </a:r>
-          </a:p>
-        </p:txBody>
-      </p:sp>
-      <p:sp>
-        <p:nvSpPr>
-          <p:cNvPr id="7" name="TextBox 6"/>
-          <p:cNvSpPr txBox="1"/>
-          <p:nvPr/>
-        </p:nvSpPr>
-        <p:spPr>
-          <a:xfrm>
-            <a:off x="731520" y="2834640"/>
-            <a:ext cx="3474720" cy="457200"/>
-          </a:xfrm>
-          <a:prstGeom prst="rect">
-            <a:avLst/>
-          </a:prstGeom>
-          <a:noFill/>
-        </p:spPr>
-        <p:txBody>
-          <a:bodyPr wrap="none">
-            <a:spAutoFit/>
-          </a:bodyPr>
-          <a:lstStyle/>
-          <a:p>
-            <a:pPr algn="ctr">
-              <a:defRPr sz="1800" b="1">
+              <a:defRPr sz="1400" b="1">
                 <a:solidFill>
                   <a:srgbClr val="F1F5F9"/>
                 </a:solidFill>
@@ -4218,68 +4456,30 @@
               </a:defRPr>
             </a:pPr>
             <a:r>
-              <a:t>Emission Reduction</a:t>
-            </a:r>
-          </a:p>
-        </p:txBody>
-      </p:sp>
-      <p:sp>
-        <p:nvSpPr>
-          <p:cNvPr id="8" name="TextBox 7"/>
-          <p:cNvSpPr txBox="1"/>
-          <p:nvPr/>
-        </p:nvSpPr>
-        <p:spPr>
-          <a:xfrm>
-            <a:off x="914400" y="3291840"/>
-            <a:ext cx="3108960" cy="548640"/>
-          </a:xfrm>
-          <a:prstGeom prst="rect">
-            <a:avLst/>
-          </a:prstGeom>
-          <a:noFill/>
-        </p:spPr>
-        <p:txBody>
-          <a:bodyPr wrap="square">
-            <a:spAutoFit/>
-          </a:bodyPr>
-          <a:lstStyle/>
-          <a:p>
-            <a:pPr algn="ctr">
-              <a:defRPr sz="1200" b="0">
-                <a:solidFill>
-                  <a:srgbClr val="94A3B8"/>
-                </a:solidFill>
-                <a:latin typeface="Segoe UI"/>
-              </a:defRPr>
-            </a:pPr>
-            <a:r>
-              <a:t>Average reduction by users who track carbon</a:t>
-            </a:r>
-          </a:p>
-        </p:txBody>
-      </p:sp>
-      <p:sp>
-        <p:nvSpPr>
-          <p:cNvPr id="9" name="Rounded Rectangle 8"/>
+              <a:t>Feature</a:t>
+            </a:r>
+          </a:p>
+        </p:txBody>
+      </p:sp>
+      <p:sp>
+        <p:nvSpPr>
+          <p:cNvPr id="7" name="Rectangle 6"/>
           <p:cNvSpPr/>
           <p:nvPr/>
         </p:nvSpPr>
         <p:spPr>
           <a:xfrm>
-            <a:off x="4480559" y="1737360"/>
-            <a:ext cx="3474720" cy="2103120"/>
-          </a:xfrm>
-          <a:prstGeom prst="roundRect">
+            <a:off x="4572000" y="1737360"/>
+            <a:ext cx="3200400" cy="548640"/>
+          </a:xfrm>
+          <a:prstGeom prst="rect">
             <a:avLst/>
           </a:prstGeom>
           <a:solidFill>
             <a:srgbClr val="111827"/>
           </a:solidFill>
-          <a:ln w="25400">
-            <a:solidFill>
-              <a:srgbClr val="4ADE80"/>
-            </a:solidFill>
+          <a:ln>
+            <a:noFill/>
           </a:ln>
         </p:spPr>
         <p:style>
@@ -4301,19 +4501,20 @@
           <a:lstStyle/>
           <a:p>
             <a:pPr algn="ctr"/>
-          </a:p>
-        </p:txBody>
-      </p:sp>
-      <p:sp>
-        <p:nvSpPr>
-          <p:cNvPr id="10" name="TextBox 9"/>
-          <p:cNvSpPr txBox="1"/>
-          <p:nvPr/>
-        </p:nvSpPr>
-        <p:spPr>
-          <a:xfrm>
-            <a:off x="4480559" y="1920240"/>
-            <a:ext cx="3474720" cy="914400"/>
+            <a:endParaRPr/>
+          </a:p>
+        </p:txBody>
+      </p:sp>
+      <p:sp>
+        <p:nvSpPr>
+          <p:cNvPr id="8" name="TextBox 7"/>
+          <p:cNvSpPr txBox="1"/>
+          <p:nvPr/>
+        </p:nvSpPr>
+        <p:spPr>
+          <a:xfrm>
+            <a:off x="4572000" y="1828800"/>
+            <a:ext cx="3200400" cy="457200"/>
           </a:xfrm>
           <a:prstGeom prst="rect">
             <a:avLst/>
@@ -4327,43 +4528,7 @@
           <a:lstStyle/>
           <a:p>
             <a:pPr algn="ctr">
-              <a:defRPr sz="4800" b="1">
-                <a:solidFill>
-                  <a:srgbClr val="4ADE80"/>
-                </a:solidFill>
-                <a:latin typeface="Segoe UI"/>
-              </a:defRPr>
-            </a:pPr>
-            <a:r>
-              <a:t>3x</a:t>
-            </a:r>
-          </a:p>
-        </p:txBody>
-      </p:sp>
-      <p:sp>
-        <p:nvSpPr>
-          <p:cNvPr id="11" name="TextBox 10"/>
-          <p:cNvSpPr txBox="1"/>
-          <p:nvPr/>
-        </p:nvSpPr>
-        <p:spPr>
-          <a:xfrm>
-            <a:off x="4480559" y="2834640"/>
-            <a:ext cx="3474720" cy="457200"/>
-          </a:xfrm>
-          <a:prstGeom prst="rect">
-            <a:avLst/>
-          </a:prstGeom>
-          <a:noFill/>
-        </p:spPr>
-        <p:txBody>
-          <a:bodyPr wrap="none">
-            <a:spAutoFit/>
-          </a:bodyPr>
-          <a:lstStyle/>
-          <a:p>
-            <a:pPr algn="ctr">
-              <a:defRPr sz="1800" b="1">
+              <a:defRPr sz="1400" b="1">
                 <a:solidFill>
                   <a:srgbClr val="F1F5F9"/>
                 </a:solidFill>
@@ -4371,68 +4536,30 @@
               </a:defRPr>
             </a:pPr>
             <a:r>
-              <a:t>Engagement</a:t>
-            </a:r>
-          </a:p>
-        </p:txBody>
-      </p:sp>
-      <p:sp>
-        <p:nvSpPr>
-          <p:cNvPr id="12" name="TextBox 11"/>
-          <p:cNvSpPr txBox="1"/>
-          <p:nvPr/>
-        </p:nvSpPr>
-        <p:spPr>
-          <a:xfrm>
-            <a:off x="4663439" y="3291840"/>
-            <a:ext cx="3108960" cy="548640"/>
-          </a:xfrm>
-          <a:prstGeom prst="rect">
-            <a:avLst/>
-          </a:prstGeom>
-          <a:noFill/>
-        </p:spPr>
-        <p:txBody>
-          <a:bodyPr wrap="square">
-            <a:spAutoFit/>
-          </a:bodyPr>
-          <a:lstStyle/>
-          <a:p>
-            <a:pPr algn="ctr">
-              <a:defRPr sz="1200" b="0">
-                <a:solidFill>
-                  <a:srgbClr val="94A3B8"/>
-                </a:solidFill>
-                <a:latin typeface="Segoe UI"/>
-              </a:defRPr>
-            </a:pPr>
-            <a:r>
-              <a:t>Social comparison increases engagement over solo tracking</a:t>
-            </a:r>
-          </a:p>
-        </p:txBody>
-      </p:sp>
-      <p:sp>
-        <p:nvSpPr>
-          <p:cNvPr id="13" name="Rounded Rectangle 12"/>
+              <a:t>Other Apps</a:t>
+            </a:r>
+          </a:p>
+        </p:txBody>
+      </p:sp>
+      <p:sp>
+        <p:nvSpPr>
+          <p:cNvPr id="9" name="Rectangle 8"/>
           <p:cNvSpPr/>
           <p:nvPr/>
         </p:nvSpPr>
         <p:spPr>
           <a:xfrm>
-            <a:off x="8229600" y="1737360"/>
-            <a:ext cx="3474720" cy="2103120"/>
-          </a:xfrm>
-          <a:prstGeom prst="roundRect">
+            <a:off x="7955279" y="1737360"/>
+            <a:ext cx="3200400" cy="548640"/>
+          </a:xfrm>
+          <a:prstGeom prst="rect">
             <a:avLst/>
           </a:prstGeom>
           <a:solidFill>
             <a:srgbClr val="111827"/>
           </a:solidFill>
-          <a:ln w="25400">
-            <a:solidFill>
-              <a:srgbClr val="22C55E"/>
-            </a:solidFill>
+          <a:ln>
+            <a:noFill/>
           </a:ln>
         </p:spPr>
         <p:style>
@@ -4454,19 +4581,20 @@
           <a:lstStyle/>
           <a:p>
             <a:pPr algn="ctr"/>
-          </a:p>
-        </p:txBody>
-      </p:sp>
-      <p:sp>
-        <p:nvSpPr>
-          <p:cNvPr id="14" name="TextBox 13"/>
-          <p:cNvSpPr txBox="1"/>
-          <p:nvPr/>
-        </p:nvSpPr>
-        <p:spPr>
-          <a:xfrm>
-            <a:off x="8229600" y="1920240"/>
-            <a:ext cx="3474720" cy="914400"/>
+            <a:endParaRPr/>
+          </a:p>
+        </p:txBody>
+      </p:sp>
+      <p:sp>
+        <p:nvSpPr>
+          <p:cNvPr id="10" name="TextBox 9"/>
+          <p:cNvSpPr txBox="1"/>
+          <p:nvPr/>
+        </p:nvSpPr>
+        <p:spPr>
+          <a:xfrm>
+            <a:off x="7955279" y="1828800"/>
+            <a:ext cx="3200400" cy="457200"/>
           </a:xfrm>
           <a:prstGeom prst="rect">
             <a:avLst/>
@@ -4480,7 +4608,7 @@
           <a:lstStyle/>
           <a:p>
             <a:pPr algn="ctr">
-              <a:defRPr sz="4800" b="1">
+              <a:defRPr sz="1400" b="1">
                 <a:solidFill>
                   <a:srgbClr val="22C55E"/>
                 </a:solidFill>
@@ -4488,8 +4616,160 @@
               </a:defRPr>
             </a:pPr>
             <a:r>
-              <a:t>5x</a:t>
-            </a:r>
+              <a:t>LOOP</a:t>
+            </a:r>
+          </a:p>
+        </p:txBody>
+      </p:sp>
+      <p:sp>
+        <p:nvSpPr>
+          <p:cNvPr id="11" name="TextBox 10"/>
+          <p:cNvSpPr txBox="1"/>
+          <p:nvPr/>
+        </p:nvSpPr>
+        <p:spPr>
+          <a:xfrm>
+            <a:off x="731520" y="2377440"/>
+            <a:ext cx="3657600" cy="457200"/>
+          </a:xfrm>
+          <a:prstGeom prst="rect">
+            <a:avLst/>
+          </a:prstGeom>
+          <a:noFill/>
+        </p:spPr>
+        <p:txBody>
+          <a:bodyPr wrap="none">
+            <a:spAutoFit/>
+          </a:bodyPr>
+          <a:lstStyle/>
+          <a:p>
+            <a:pPr algn="l">
+              <a:defRPr sz="1400" b="0">
+                <a:solidFill>
+                  <a:srgbClr val="F1F5F9"/>
+                </a:solidFill>
+                <a:latin typeface="Segoe UI"/>
+              </a:defRPr>
+            </a:pPr>
+            <a:r>
+              <a:t>Data Entry</a:t>
+            </a:r>
+          </a:p>
+        </p:txBody>
+      </p:sp>
+      <p:sp>
+        <p:nvSpPr>
+          <p:cNvPr id="12" name="TextBox 11"/>
+          <p:cNvSpPr txBox="1"/>
+          <p:nvPr/>
+        </p:nvSpPr>
+        <p:spPr>
+          <a:xfrm>
+            <a:off x="4572000" y="2377440"/>
+            <a:ext cx="3200400" cy="457200"/>
+          </a:xfrm>
+          <a:prstGeom prst="rect">
+            <a:avLst/>
+          </a:prstGeom>
+          <a:noFill/>
+        </p:spPr>
+        <p:txBody>
+          <a:bodyPr wrap="none">
+            <a:spAutoFit/>
+          </a:bodyPr>
+          <a:lstStyle/>
+          <a:p>
+            <a:pPr algn="ctr">
+              <a:defRPr sz="1300" b="0">
+                <a:solidFill>
+                  <a:srgbClr val="94A3B8"/>
+                </a:solidFill>
+                <a:latin typeface="Segoe UI"/>
+              </a:defRPr>
+            </a:pPr>
+            <a:r>
+              <a:t>✗ Manual logging</a:t>
+            </a:r>
+          </a:p>
+        </p:txBody>
+      </p:sp>
+      <p:sp>
+        <p:nvSpPr>
+          <p:cNvPr id="13" name="TextBox 12"/>
+          <p:cNvSpPr txBox="1"/>
+          <p:nvPr/>
+        </p:nvSpPr>
+        <p:spPr>
+          <a:xfrm>
+            <a:off x="7955279" y="2377440"/>
+            <a:ext cx="3200400" cy="457200"/>
+          </a:xfrm>
+          <a:prstGeom prst="rect">
+            <a:avLst/>
+          </a:prstGeom>
+          <a:noFill/>
+        </p:spPr>
+        <p:txBody>
+          <a:bodyPr wrap="none">
+            <a:spAutoFit/>
+          </a:bodyPr>
+          <a:lstStyle/>
+          <a:p>
+            <a:pPr algn="ctr">
+              <a:defRPr sz="1300" b="0">
+                <a:solidFill>
+                  <a:srgbClr val="22C55E"/>
+                </a:solidFill>
+                <a:latin typeface="Segoe UI"/>
+              </a:defRPr>
+            </a:pPr>
+            <a:r>
+              <a:t>✓ Auto CSV parsing</a:t>
+            </a:r>
+          </a:p>
+        </p:txBody>
+      </p:sp>
+      <p:sp>
+        <p:nvSpPr>
+          <p:cNvPr id="14" name="Rectangle 13"/>
+          <p:cNvSpPr/>
+          <p:nvPr/>
+        </p:nvSpPr>
+        <p:spPr>
+          <a:xfrm>
+            <a:off x="731520" y="2880360"/>
+            <a:ext cx="10424160" cy="12700"/>
+          </a:xfrm>
+          <a:prstGeom prst="rect">
+            <a:avLst/>
+          </a:prstGeom>
+          <a:solidFill>
+            <a:srgbClr val="1E293B"/>
+          </a:solidFill>
+          <a:ln>
+            <a:noFill/>
+          </a:ln>
+        </p:spPr>
+        <p:style>
+          <a:lnRef idx="1">
+            <a:schemeClr val="accent1"/>
+          </a:lnRef>
+          <a:fillRef idx="3">
+            <a:schemeClr val="accent1"/>
+          </a:fillRef>
+          <a:effectRef idx="2">
+            <a:schemeClr val="accent1"/>
+          </a:effectRef>
+          <a:fontRef idx="minor">
+            <a:schemeClr val="lt1"/>
+          </a:fontRef>
+        </p:style>
+        <p:txBody>
+          <a:bodyPr rtlCol="0" anchor="ctr"/>
+          <a:lstStyle/>
+          <a:p>
+            <a:pPr algn="ctr"/>
+            <a:endParaRPr/>
           </a:p>
         </p:txBody>
       </p:sp>
@@ -4501,8 +4781,44 @@
         </p:nvSpPr>
         <p:spPr>
           <a:xfrm>
-            <a:off x="8229600" y="2834640"/>
-            <a:ext cx="3474720" cy="457200"/>
+            <a:off x="731520" y="3017520"/>
+            <a:ext cx="3657600" cy="457200"/>
+          </a:xfrm>
+          <a:prstGeom prst="rect">
+            <a:avLst/>
+          </a:prstGeom>
+          <a:noFill/>
+        </p:spPr>
+        <p:txBody>
+          <a:bodyPr wrap="none">
+            <a:spAutoFit/>
+          </a:bodyPr>
+          <a:lstStyle/>
+          <a:p>
+            <a:pPr algn="l">
+              <a:defRPr sz="1400" b="0">
+                <a:solidFill>
+                  <a:srgbClr val="F1F5F9"/>
+                </a:solidFill>
+                <a:latin typeface="Segoe UI"/>
+              </a:defRPr>
+            </a:pPr>
+            <a:r>
+              <a:t>Benchmarking</a:t>
+            </a:r>
+          </a:p>
+        </p:txBody>
+      </p:sp>
+      <p:sp>
+        <p:nvSpPr>
+          <p:cNvPr id="16" name="TextBox 15"/>
+          <p:cNvSpPr txBox="1"/>
+          <p:nvPr/>
+        </p:nvSpPr>
+        <p:spPr>
+          <a:xfrm>
+            <a:off x="4572000" y="3017520"/>
+            <a:ext cx="3200400" cy="457200"/>
           </a:xfrm>
           <a:prstGeom prst="rect">
             <a:avLst/>
@@ -4516,7 +4832,123 @@
           <a:lstStyle/>
           <a:p>
             <a:pPr algn="ctr">
-              <a:defRPr sz="1800" b="1">
+              <a:defRPr sz="1300" b="0">
+                <a:solidFill>
+                  <a:srgbClr val="94A3B8"/>
+                </a:solidFill>
+                <a:latin typeface="Segoe UI"/>
+              </a:defRPr>
+            </a:pPr>
+            <a:r>
+              <a:t>✗ Global averages</a:t>
+            </a:r>
+          </a:p>
+        </p:txBody>
+      </p:sp>
+      <p:sp>
+        <p:nvSpPr>
+          <p:cNvPr id="17" name="TextBox 16"/>
+          <p:cNvSpPr txBox="1"/>
+          <p:nvPr/>
+        </p:nvSpPr>
+        <p:spPr>
+          <a:xfrm>
+            <a:off x="7955279" y="3017520"/>
+            <a:ext cx="3200400" cy="457200"/>
+          </a:xfrm>
+          <a:prstGeom prst="rect">
+            <a:avLst/>
+          </a:prstGeom>
+          <a:noFill/>
+        </p:spPr>
+        <p:txBody>
+          <a:bodyPr wrap="none">
+            <a:spAutoFit/>
+          </a:bodyPr>
+          <a:lstStyle/>
+          <a:p>
+            <a:pPr algn="ctr">
+              <a:defRPr sz="1300" b="0">
+                <a:solidFill>
+                  <a:srgbClr val="22C55E"/>
+                </a:solidFill>
+                <a:latin typeface="Segoe UI"/>
+              </a:defRPr>
+            </a:pPr>
+            <a:r>
+              <a:t>✓ City-specific peers</a:t>
+            </a:r>
+          </a:p>
+        </p:txBody>
+      </p:sp>
+      <p:sp>
+        <p:nvSpPr>
+          <p:cNvPr id="18" name="Rectangle 17"/>
+          <p:cNvSpPr/>
+          <p:nvPr/>
+        </p:nvSpPr>
+        <p:spPr>
+          <a:xfrm>
+            <a:off x="731520" y="3520440"/>
+            <a:ext cx="10424160" cy="12700"/>
+          </a:xfrm>
+          <a:prstGeom prst="rect">
+            <a:avLst/>
+          </a:prstGeom>
+          <a:solidFill>
+            <a:srgbClr val="1E293B"/>
+          </a:solidFill>
+          <a:ln>
+            <a:noFill/>
+          </a:ln>
+        </p:spPr>
+        <p:style>
+          <a:lnRef idx="1">
+            <a:schemeClr val="accent1"/>
+          </a:lnRef>
+          <a:fillRef idx="3">
+            <a:schemeClr val="accent1"/>
+          </a:fillRef>
+          <a:effectRef idx="2">
+            <a:schemeClr val="accent1"/>
+          </a:effectRef>
+          <a:fontRef idx="minor">
+            <a:schemeClr val="lt1"/>
+          </a:fontRef>
+        </p:style>
+        <p:txBody>
+          <a:bodyPr rtlCol="0" anchor="ctr"/>
+          <a:lstStyle/>
+          <a:p>
+            <a:pPr algn="ctr"/>
+            <a:endParaRPr/>
+          </a:p>
+        </p:txBody>
+      </p:sp>
+      <p:sp>
+        <p:nvSpPr>
+          <p:cNvPr id="19" name="TextBox 18"/>
+          <p:cNvSpPr txBox="1"/>
+          <p:nvPr/>
+        </p:nvSpPr>
+        <p:spPr>
+          <a:xfrm>
+            <a:off x="731520" y="3657600"/>
+            <a:ext cx="3657600" cy="457200"/>
+          </a:xfrm>
+          <a:prstGeom prst="rect">
+            <a:avLst/>
+          </a:prstGeom>
+          <a:noFill/>
+        </p:spPr>
+        <p:txBody>
+          <a:bodyPr wrap="none">
+            <a:spAutoFit/>
+          </a:bodyPr>
+          <a:lstStyle/>
+          <a:p>
+            <a:pPr algn="l">
+              <a:defRPr sz="1400" b="0">
                 <a:solidFill>
                   <a:srgbClr val="F1F5F9"/>
                 </a:solidFill>
@@ -4524,35 +4956,35 @@
               </a:defRPr>
             </a:pPr>
             <a:r>
-              <a:t>Retention</a:t>
-            </a:r>
-          </a:p>
-        </p:txBody>
-      </p:sp>
-      <p:sp>
-        <p:nvSpPr>
-          <p:cNvPr id="16" name="TextBox 15"/>
-          <p:cNvSpPr txBox="1"/>
-          <p:nvPr/>
-        </p:nvSpPr>
-        <p:spPr>
-          <a:xfrm>
-            <a:off x="8412480" y="3291840"/>
-            <a:ext cx="3108960" cy="548640"/>
-          </a:xfrm>
-          <a:prstGeom prst="rect">
-            <a:avLst/>
-          </a:prstGeom>
-          <a:noFill/>
-        </p:spPr>
-        <p:txBody>
-          <a:bodyPr wrap="square">
+              <a:t>Suggestions</a:t>
+            </a:r>
+          </a:p>
+        </p:txBody>
+      </p:sp>
+      <p:sp>
+        <p:nvSpPr>
+          <p:cNvPr id="20" name="TextBox 19"/>
+          <p:cNvSpPr txBox="1"/>
+          <p:nvPr/>
+        </p:nvSpPr>
+        <p:spPr>
+          <a:xfrm>
+            <a:off x="4572000" y="3657600"/>
+            <a:ext cx="3200400" cy="457200"/>
+          </a:xfrm>
+          <a:prstGeom prst="rect">
+            <a:avLst/>
+          </a:prstGeom>
+          <a:noFill/>
+        </p:spPr>
+        <p:txBody>
+          <a:bodyPr wrap="none">
             <a:spAutoFit/>
           </a:bodyPr>
           <a:lstStyle/>
           <a:p>
             <a:pPr algn="ctr">
-              <a:defRPr sz="1200" b="0">
+              <a:defRPr sz="1300" b="0">
                 <a:solidFill>
                   <a:srgbClr val="94A3B8"/>
                 </a:solidFill>
@@ -4560,21 +4992,101 @@
               </a:defRPr>
             </a:pPr>
             <a:r>
-              <a:t>Gamification improves retention vs basic tracking apps</a:t>
-            </a:r>
-          </a:p>
-        </p:txBody>
-      </p:sp>
-      <p:sp>
-        <p:nvSpPr>
-          <p:cNvPr id="17" name="TextBox 16"/>
-          <p:cNvSpPr txBox="1"/>
-          <p:nvPr/>
-        </p:nvSpPr>
-        <p:spPr>
-          <a:xfrm>
-            <a:off x="731520" y="4114800"/>
-            <a:ext cx="10058400" cy="457200"/>
+              <a:t>✗ Generic tips</a:t>
+            </a:r>
+          </a:p>
+        </p:txBody>
+      </p:sp>
+      <p:sp>
+        <p:nvSpPr>
+          <p:cNvPr id="21" name="TextBox 20"/>
+          <p:cNvSpPr txBox="1"/>
+          <p:nvPr/>
+        </p:nvSpPr>
+        <p:spPr>
+          <a:xfrm>
+            <a:off x="7955279" y="3657600"/>
+            <a:ext cx="3200400" cy="457200"/>
+          </a:xfrm>
+          <a:prstGeom prst="rect">
+            <a:avLst/>
+          </a:prstGeom>
+          <a:noFill/>
+        </p:spPr>
+        <p:txBody>
+          <a:bodyPr wrap="none">
+            <a:spAutoFit/>
+          </a:bodyPr>
+          <a:lstStyle/>
+          <a:p>
+            <a:pPr algn="ctr">
+              <a:defRPr sz="1300" b="0">
+                <a:solidFill>
+                  <a:srgbClr val="22C55E"/>
+                </a:solidFill>
+                <a:latin typeface="Segoe UI"/>
+              </a:defRPr>
+            </a:pPr>
+            <a:r>
+              <a:t>✓ City + spending filtered</a:t>
+            </a:r>
+          </a:p>
+        </p:txBody>
+      </p:sp>
+      <p:sp>
+        <p:nvSpPr>
+          <p:cNvPr id="22" name="Rectangle 21"/>
+          <p:cNvSpPr/>
+          <p:nvPr/>
+        </p:nvSpPr>
+        <p:spPr>
+          <a:xfrm>
+            <a:off x="731520" y="4160520"/>
+            <a:ext cx="10424160" cy="12700"/>
+          </a:xfrm>
+          <a:prstGeom prst="rect">
+            <a:avLst/>
+          </a:prstGeom>
+          <a:solidFill>
+            <a:srgbClr val="1E293B"/>
+          </a:solidFill>
+          <a:ln>
+            <a:noFill/>
+          </a:ln>
+        </p:spPr>
+        <p:style>
+          <a:lnRef idx="1">
+            <a:schemeClr val="accent1"/>
+          </a:lnRef>
+          <a:fillRef idx="3">
+            <a:schemeClr val="accent1"/>
+          </a:fillRef>
+          <a:effectRef idx="2">
+            <a:schemeClr val="accent1"/>
+          </a:effectRef>
+          <a:fontRef idx="minor">
+            <a:schemeClr val="lt1"/>
+          </a:fontRef>
+        </p:style>
+        <p:txBody>
+          <a:bodyPr rtlCol="0" anchor="ctr"/>
+          <a:lstStyle/>
+          <a:p>
+            <a:pPr algn="ctr"/>
+            <a:endParaRPr/>
+          </a:p>
+        </p:txBody>
+      </p:sp>
+      <p:sp>
+        <p:nvSpPr>
+          <p:cNvPr id="23" name="TextBox 22"/>
+          <p:cNvSpPr txBox="1"/>
+          <p:nvPr/>
+        </p:nvSpPr>
+        <p:spPr>
+          <a:xfrm>
+            <a:off x="731520" y="4297679"/>
+            <a:ext cx="3657600" cy="457200"/>
           </a:xfrm>
           <a:prstGeom prst="rect">
             <a:avLst/>
@@ -4588,7 +5100,7 @@
           <a:lstStyle/>
           <a:p>
             <a:pPr algn="l">
-              <a:defRPr sz="2000" b="1">
+              <a:defRPr sz="1400" b="0">
                 <a:solidFill>
                   <a:srgbClr val="F1F5F9"/>
                 </a:solidFill>
@@ -4596,21 +5108,137 @@
               </a:defRPr>
             </a:pPr>
             <a:r>
-              <a:t>Three Levels of Impact</a:t>
-            </a:r>
-          </a:p>
-        </p:txBody>
-      </p:sp>
-      <p:sp>
-        <p:nvSpPr>
-          <p:cNvPr id="18" name="TextBox 17"/>
-          <p:cNvSpPr txBox="1"/>
-          <p:nvPr/>
-        </p:nvSpPr>
-        <p:spPr>
-          <a:xfrm>
-            <a:off x="731520" y="4663440"/>
-            <a:ext cx="3474720" cy="365760"/>
+              <a:t>Social</a:t>
+            </a:r>
+          </a:p>
+        </p:txBody>
+      </p:sp>
+      <p:sp>
+        <p:nvSpPr>
+          <p:cNvPr id="24" name="TextBox 23"/>
+          <p:cNvSpPr txBox="1"/>
+          <p:nvPr/>
+        </p:nvSpPr>
+        <p:spPr>
+          <a:xfrm>
+            <a:off x="4572000" y="4297679"/>
+            <a:ext cx="3200400" cy="457200"/>
+          </a:xfrm>
+          <a:prstGeom prst="rect">
+            <a:avLst/>
+          </a:prstGeom>
+          <a:noFill/>
+        </p:spPr>
+        <p:txBody>
+          <a:bodyPr wrap="none">
+            <a:spAutoFit/>
+          </a:bodyPr>
+          <a:lstStyle/>
+          <a:p>
+            <a:pPr algn="ctr">
+              <a:defRPr sz="1300" b="0">
+                <a:solidFill>
+                  <a:srgbClr val="94A3B8"/>
+                </a:solidFill>
+                <a:latin typeface="Segoe UI"/>
+              </a:defRPr>
+            </a:pPr>
+            <a:r>
+              <a:t>✗ None</a:t>
+            </a:r>
+          </a:p>
+        </p:txBody>
+      </p:sp>
+      <p:sp>
+        <p:nvSpPr>
+          <p:cNvPr id="25" name="TextBox 24"/>
+          <p:cNvSpPr txBox="1"/>
+          <p:nvPr/>
+        </p:nvSpPr>
+        <p:spPr>
+          <a:xfrm>
+            <a:off x="7955279" y="4297679"/>
+            <a:ext cx="3200400" cy="457200"/>
+          </a:xfrm>
+          <a:prstGeom prst="rect">
+            <a:avLst/>
+          </a:prstGeom>
+          <a:noFill/>
+        </p:spPr>
+        <p:txBody>
+          <a:bodyPr wrap="none">
+            <a:spAutoFit/>
+          </a:bodyPr>
+          <a:lstStyle/>
+          <a:p>
+            <a:pPr algn="ctr">
+              <a:defRPr sz="1300" b="0">
+                <a:solidFill>
+                  <a:srgbClr val="22C55E"/>
+                </a:solidFill>
+                <a:latin typeface="Segoe UI"/>
+              </a:defRPr>
+            </a:pPr>
+            <a:r>
+              <a:t>✓ Circles &amp; leaderboards</a:t>
+            </a:r>
+          </a:p>
+        </p:txBody>
+      </p:sp>
+      <p:sp>
+        <p:nvSpPr>
+          <p:cNvPr id="26" name="Rectangle 25"/>
+          <p:cNvSpPr/>
+          <p:nvPr/>
+        </p:nvSpPr>
+        <p:spPr>
+          <a:xfrm>
+            <a:off x="731520" y="4800599"/>
+            <a:ext cx="10424160" cy="12700"/>
+          </a:xfrm>
+          <a:prstGeom prst="rect">
+            <a:avLst/>
+          </a:prstGeom>
+          <a:solidFill>
+            <a:srgbClr val="1E293B"/>
+          </a:solidFill>
+          <a:ln>
+            <a:noFill/>
+          </a:ln>
+        </p:spPr>
+        <p:style>
+          <a:lnRef idx="1">
+            <a:schemeClr val="accent1"/>
+          </a:lnRef>
+          <a:fillRef idx="3">
+            <a:schemeClr val="accent1"/>
+          </a:fillRef>
+          <a:effectRef idx="2">
+            <a:schemeClr val="accent1"/>
+          </a:effectRef>
+          <a:fontRef idx="minor">
+            <a:schemeClr val="lt1"/>
+          </a:fontRef>
+        </p:style>
+        <p:txBody>
+          <a:bodyPr rtlCol="0" anchor="ctr"/>
+          <a:lstStyle/>
+          <a:p>
+            <a:pPr algn="ctr"/>
+            <a:endParaRPr/>
+          </a:p>
+        </p:txBody>
+      </p:sp>
+      <p:sp>
+        <p:nvSpPr>
+          <p:cNvPr id="27" name="TextBox 26"/>
+          <p:cNvSpPr txBox="1"/>
+          <p:nvPr/>
+        </p:nvSpPr>
+        <p:spPr>
+          <a:xfrm>
+            <a:off x="731520" y="4937760"/>
+            <a:ext cx="3657600" cy="457200"/>
           </a:xfrm>
           <a:prstGeom prst="rect">
             <a:avLst/>
@@ -4624,7 +5252,79 @@
           <a:lstStyle/>
           <a:p>
             <a:pPr algn="l">
-              <a:defRPr sz="1600" b="1">
+              <a:defRPr sz="1400" b="0">
+                <a:solidFill>
+                  <a:srgbClr val="F1F5F9"/>
+                </a:solidFill>
+                <a:latin typeface="Segoe UI"/>
+              </a:defRPr>
+            </a:pPr>
+            <a:r>
+              <a:t>Personality</a:t>
+            </a:r>
+          </a:p>
+        </p:txBody>
+      </p:sp>
+      <p:sp>
+        <p:nvSpPr>
+          <p:cNvPr id="28" name="TextBox 27"/>
+          <p:cNvSpPr txBox="1"/>
+          <p:nvPr/>
+        </p:nvSpPr>
+        <p:spPr>
+          <a:xfrm>
+            <a:off x="4572000" y="4937760"/>
+            <a:ext cx="3200400" cy="457200"/>
+          </a:xfrm>
+          <a:prstGeom prst="rect">
+            <a:avLst/>
+          </a:prstGeom>
+          <a:noFill/>
+        </p:spPr>
+        <p:txBody>
+          <a:bodyPr wrap="none">
+            <a:spAutoFit/>
+          </a:bodyPr>
+          <a:lstStyle/>
+          <a:p>
+            <a:pPr algn="ctr">
+              <a:defRPr sz="1300" b="0">
+                <a:solidFill>
+                  <a:srgbClr val="94A3B8"/>
+                </a:solidFill>
+                <a:latin typeface="Segoe UI"/>
+              </a:defRPr>
+            </a:pPr>
+            <a:r>
+              <a:t>✗ Just numbers</a:t>
+            </a:r>
+          </a:p>
+        </p:txBody>
+      </p:sp>
+      <p:sp>
+        <p:nvSpPr>
+          <p:cNvPr id="29" name="TextBox 28"/>
+          <p:cNvSpPr txBox="1"/>
+          <p:nvPr/>
+        </p:nvSpPr>
+        <p:spPr>
+          <a:xfrm>
+            <a:off x="7955279" y="4937760"/>
+            <a:ext cx="3200400" cy="457200"/>
+          </a:xfrm>
+          <a:prstGeom prst="rect">
+            <a:avLst/>
+          </a:prstGeom>
+          <a:noFill/>
+        </p:spPr>
+        <p:txBody>
+          <a:bodyPr wrap="none">
+            <a:spAutoFit/>
+          </a:bodyPr>
+          <a:lstStyle/>
+          <a:p>
+            <a:pPr algn="ctr">
+              <a:defRPr sz="1300" b="0">
                 <a:solidFill>
                   <a:srgbClr val="22C55E"/>
                 </a:solidFill>
@@ -4632,34 +5332,114 @@
               </a:defRPr>
             </a:pPr>
             <a:r>
-              <a:t>Individual</a:t>
-            </a:r>
-          </a:p>
-        </p:txBody>
-      </p:sp>
-      <p:sp>
-        <p:nvSpPr>
-          <p:cNvPr id="19" name="TextBox 18"/>
-          <p:cNvSpPr txBox="1"/>
-          <p:nvPr/>
-        </p:nvSpPr>
-        <p:spPr>
-          <a:xfrm>
-            <a:off x="731520" y="5029200"/>
-            <a:ext cx="3474720" cy="1097280"/>
-          </a:xfrm>
-          <a:prstGeom prst="rect">
-            <a:avLst/>
-          </a:prstGeom>
-          <a:noFill/>
-        </p:spPr>
-        <p:txBody>
-          <a:bodyPr wrap="square">
+              <a:t>✓ 6 evolving personas</a:t>
+            </a:r>
+          </a:p>
+        </p:txBody>
+      </p:sp>
+      <p:sp>
+        <p:nvSpPr>
+          <p:cNvPr id="30" name="Rectangle 29"/>
+          <p:cNvSpPr/>
+          <p:nvPr/>
+        </p:nvSpPr>
+        <p:spPr>
+          <a:xfrm>
+            <a:off x="731520" y="5440680"/>
+            <a:ext cx="10424160" cy="12700"/>
+          </a:xfrm>
+          <a:prstGeom prst="rect">
+            <a:avLst/>
+          </a:prstGeom>
+          <a:solidFill>
+            <a:srgbClr val="1E293B"/>
+          </a:solidFill>
+          <a:ln>
+            <a:noFill/>
+          </a:ln>
+        </p:spPr>
+        <p:style>
+          <a:lnRef idx="1">
+            <a:schemeClr val="accent1"/>
+          </a:lnRef>
+          <a:fillRef idx="3">
+            <a:schemeClr val="accent1"/>
+          </a:fillRef>
+          <a:effectRef idx="2">
+            <a:schemeClr val="accent1"/>
+          </a:effectRef>
+          <a:fontRef idx="minor">
+            <a:schemeClr val="lt1"/>
+          </a:fontRef>
+        </p:style>
+        <p:txBody>
+          <a:bodyPr rtlCol="0" anchor="ctr"/>
+          <a:lstStyle/>
+          <a:p>
+            <a:pPr algn="ctr"/>
+            <a:endParaRPr/>
+          </a:p>
+        </p:txBody>
+      </p:sp>
+      <p:sp>
+        <p:nvSpPr>
+          <p:cNvPr id="31" name="TextBox 30"/>
+          <p:cNvSpPr txBox="1"/>
+          <p:nvPr/>
+        </p:nvSpPr>
+        <p:spPr>
+          <a:xfrm>
+            <a:off x="731520" y="5577840"/>
+            <a:ext cx="3657600" cy="457200"/>
+          </a:xfrm>
+          <a:prstGeom prst="rect">
+            <a:avLst/>
+          </a:prstGeom>
+          <a:noFill/>
+        </p:spPr>
+        <p:txBody>
+          <a:bodyPr wrap="none">
             <a:spAutoFit/>
           </a:bodyPr>
           <a:lstStyle/>
           <a:p>
             <a:pPr algn="l">
+              <a:defRPr sz="1400" b="0">
+                <a:solidFill>
+                  <a:srgbClr val="F1F5F9"/>
+                </a:solidFill>
+                <a:latin typeface="Segoe UI"/>
+              </a:defRPr>
+            </a:pPr>
+            <a:r>
+              <a:t>AI Features</a:t>
+            </a:r>
+          </a:p>
+        </p:txBody>
+      </p:sp>
+      <p:sp>
+        <p:nvSpPr>
+          <p:cNvPr id="32" name="TextBox 31"/>
+          <p:cNvSpPr txBox="1"/>
+          <p:nvPr/>
+        </p:nvSpPr>
+        <p:spPr>
+          <a:xfrm>
+            <a:off x="4572000" y="5577840"/>
+            <a:ext cx="3200400" cy="457200"/>
+          </a:xfrm>
+          <a:prstGeom prst="rect">
+            <a:avLst/>
+          </a:prstGeom>
+          <a:noFill/>
+        </p:spPr>
+        <p:txBody>
+          <a:bodyPr wrap="none">
+            <a:spAutoFit/>
+          </a:bodyPr>
+          <a:lstStyle/>
+          <a:p>
+            <a:pPr algn="ctr">
               <a:defRPr sz="1300" b="0">
                 <a:solidFill>
                   <a:srgbClr val="94A3B8"/>
@@ -4668,35 +5448,35 @@
               </a:defRPr>
             </a:pPr>
             <a:r>
-              <a:t>Awareness of where carbon comes from. Actionable insights specific to spending.</a:t>
-            </a:r>
-          </a:p>
-        </p:txBody>
-      </p:sp>
-      <p:sp>
-        <p:nvSpPr>
-          <p:cNvPr id="20" name="TextBox 19"/>
-          <p:cNvSpPr txBox="1"/>
-          <p:nvPr/>
-        </p:nvSpPr>
-        <p:spPr>
-          <a:xfrm>
-            <a:off x="4480559" y="4663440"/>
-            <a:ext cx="3474720" cy="365760"/>
-          </a:xfrm>
-          <a:prstGeom prst="rect">
-            <a:avLst/>
-          </a:prstGeom>
-          <a:noFill/>
-        </p:spPr>
-        <p:txBody>
-          <a:bodyPr wrap="none">
-            <a:spAutoFit/>
-          </a:bodyPr>
-          <a:lstStyle/>
-          <a:p>
-            <a:pPr algn="l">
-              <a:defRPr sz="1600" b="1">
+              <a:t>✗ Basic</a:t>
+            </a:r>
+          </a:p>
+        </p:txBody>
+      </p:sp>
+      <p:sp>
+        <p:nvSpPr>
+          <p:cNvPr id="33" name="TextBox 32"/>
+          <p:cNvSpPr txBox="1"/>
+          <p:nvPr/>
+        </p:nvSpPr>
+        <p:spPr>
+          <a:xfrm>
+            <a:off x="7955279" y="5577840"/>
+            <a:ext cx="3200400" cy="457200"/>
+          </a:xfrm>
+          <a:prstGeom prst="rect">
+            <a:avLst/>
+          </a:prstGeom>
+          <a:noFill/>
+        </p:spPr>
+        <p:txBody>
+          <a:bodyPr wrap="none">
+            <a:spAutoFit/>
+          </a:bodyPr>
+          <a:lstStyle/>
+          <a:p>
+            <a:pPr algn="ctr">
+              <a:defRPr sz="1300" b="0">
                 <a:solidFill>
                   <a:srgbClr val="22C55E"/>
                 </a:solidFill>
@@ -4704,115 +5484,7 @@
               </a:defRPr>
             </a:pPr>
             <a:r>
-              <a:t>Social</a:t>
-            </a:r>
-          </a:p>
-        </p:txBody>
-      </p:sp>
-      <p:sp>
-        <p:nvSpPr>
-          <p:cNvPr id="21" name="TextBox 20"/>
-          <p:cNvSpPr txBox="1"/>
-          <p:nvPr/>
-        </p:nvSpPr>
-        <p:spPr>
-          <a:xfrm>
-            <a:off x="4480559" y="5029200"/>
-            <a:ext cx="3474720" cy="1097280"/>
-          </a:xfrm>
-          <a:prstGeom prst="rect">
-            <a:avLst/>
-          </a:prstGeom>
-          <a:noFill/>
-        </p:spPr>
-        <p:txBody>
-          <a:bodyPr wrap="square">
-            <a:spAutoFit/>
-          </a:bodyPr>
-          <a:lstStyle/>
-          <a:p>
-            <a:pPr algn="l">
-              <a:defRPr sz="1300" b="0">
-                <a:solidFill>
-                  <a:srgbClr val="94A3B8"/>
-                </a:solidFill>
-                <a:latin typeface="Segoe UI"/>
-              </a:defRPr>
-            </a:pPr>
-            <a:r>
-              <a:t>City rankings and friend circles create healthy competition and accountability.</a:t>
-            </a:r>
-          </a:p>
-        </p:txBody>
-      </p:sp>
-      <p:sp>
-        <p:nvSpPr>
-          <p:cNvPr id="22" name="TextBox 21"/>
-          <p:cNvSpPr txBox="1"/>
-          <p:nvPr/>
-        </p:nvSpPr>
-        <p:spPr>
-          <a:xfrm>
-            <a:off x="8229600" y="4663440"/>
-            <a:ext cx="3474720" cy="365760"/>
-          </a:xfrm>
-          <a:prstGeom prst="rect">
-            <a:avLst/>
-          </a:prstGeom>
-          <a:noFill/>
-        </p:spPr>
-        <p:txBody>
-          <a:bodyPr wrap="none">
-            <a:spAutoFit/>
-          </a:bodyPr>
-          <a:lstStyle/>
-          <a:p>
-            <a:pPr algn="l">
-              <a:defRPr sz="1600" b="1">
-                <a:solidFill>
-                  <a:srgbClr val="22C55E"/>
-                </a:solidFill>
-                <a:latin typeface="Segoe UI"/>
-              </a:defRPr>
-            </a:pPr>
-            <a:r>
-              <a:t>Systemic</a:t>
-            </a:r>
-          </a:p>
-        </p:txBody>
-      </p:sp>
-      <p:sp>
-        <p:nvSpPr>
-          <p:cNvPr id="23" name="TextBox 22"/>
-          <p:cNvSpPr txBox="1"/>
-          <p:nvPr/>
-        </p:nvSpPr>
-        <p:spPr>
-          <a:xfrm>
-            <a:off x="8229600" y="5029200"/>
-            <a:ext cx="3474720" cy="1097280"/>
-          </a:xfrm>
-          <a:prstGeom prst="rect">
-            <a:avLst/>
-          </a:prstGeom>
-          <a:noFill/>
-        </p:spPr>
-        <p:txBody>
-          <a:bodyPr wrap="square">
-            <a:spAutoFit/>
-          </a:bodyPr>
-          <a:lstStyle/>
-          <a:p>
-            <a:pPr algn="l">
-              <a:defRPr sz="1300" b="0">
-                <a:solidFill>
-                  <a:srgbClr val="94A3B8"/>
-                </a:solidFill>
-                <a:latin typeface="Segoe UI"/>
-              </a:defRPr>
-            </a:pPr>
-            <a:r>
-              <a:t>Aggregated data reveals consumption patterns. Connects users to local solutions.</a:t>
+              <a:t>✓ LLM classification + stories</a:t>
             </a:r>
           </a:p>
         </p:txBody>
@@ -4826,7 +5498,7 @@
 </file>
 
 <file path=ppt/slides/slide12.xml><?xml version="1.0" encoding="utf-8"?>
-<p:sld xmlns:a="http://schemas.openxmlformats.org/drawingml/2006/main" xmlns:p="http://schemas.openxmlformats.org/presentationml/2006/main" xmlns:r="http://schemas.openxmlformats.org/officeDocument/2006/relationships">
+<p:sld xmlns:a="http://schemas.openxmlformats.org/drawingml/2006/main" xmlns:r="http://schemas.openxmlformats.org/officeDocument/2006/relationships" xmlns:p="http://schemas.openxmlformats.org/presentationml/2006/main">
   <p:cSld>
     <p:spTree>
       <p:nvGrpSpPr>
@@ -4834,7 +5506,14 @@
         <p:cNvGrpSpPr/>
         <p:nvPr/>
       </p:nvGrpSpPr>
-      <p:grpSpPr/>
+      <p:grpSpPr>
+        <a:xfrm>
+          <a:off x="0" y="0"/>
+          <a:ext cx="0" cy="0"/>
+          <a:chOff x="0" y="0"/>
+          <a:chExt cx="0" cy="0"/>
+        </a:xfrm>
+      </p:grpSpPr>
       <p:sp>
         <p:nvSpPr>
           <p:cNvPr id="2" name="Rectangle 1"/>
@@ -4875,6 +5554,7 @@
           <a:lstStyle/>
           <a:p>
             <a:pPr algn="ctr"/>
+            <a:endParaRPr/>
           </a:p>
         </p:txBody>
       </p:sp>
@@ -4909,7 +5589,7 @@
               </a:defRPr>
             </a:pPr>
             <a:r>
-              <a:t>COMPETITIVE EDGE</a:t>
+              <a:t>SECURITY &amp; INTEGRITY</a:t>
             </a:r>
           </a:p>
         </p:txBody>
@@ -4945,30 +5625,68 @@
               </a:defRPr>
             </a:pPr>
             <a:r>
-              <a:t>Why LOOP is Different</a:t>
-            </a:r>
-          </a:p>
-        </p:txBody>
-      </p:sp>
-      <p:sp>
-        <p:nvSpPr>
-          <p:cNvPr id="5" name="Rectangle 4"/>
+              <a:t>Built to Prevent Gaming the System</a:t>
+            </a:r>
+          </a:p>
+        </p:txBody>
+      </p:sp>
+      <p:sp>
+        <p:nvSpPr>
+          <p:cNvPr id="5" name="TextBox 4"/>
+          <p:cNvSpPr txBox="1"/>
+          <p:nvPr/>
+        </p:nvSpPr>
+        <p:spPr>
+          <a:xfrm>
+            <a:off x="731520" y="1463040"/>
+            <a:ext cx="10058400" cy="457200"/>
+          </a:xfrm>
+          <a:prstGeom prst="rect">
+            <a:avLst/>
+          </a:prstGeom>
+          <a:noFill/>
+        </p:spPr>
+        <p:txBody>
+          <a:bodyPr wrap="none">
+            <a:spAutoFit/>
+          </a:bodyPr>
+          <a:lstStyle/>
+          <a:p>
+            <a:pPr algn="l">
+              <a:defRPr sz="1600" b="0">
+                <a:solidFill>
+                  <a:srgbClr val="94A3B8"/>
+                </a:solidFill>
+                <a:latin typeface="Segoe UI"/>
+              </a:defRPr>
+            </a:pPr>
+            <a:r>
+              <a:t>Leaderboards are only meaningful if they cannot be cheated</a:t>
+            </a:r>
+          </a:p>
+        </p:txBody>
+      </p:sp>
+      <p:sp>
+        <p:nvSpPr>
+          <p:cNvPr id="6" name="Rounded Rectangle 5"/>
           <p:cNvSpPr/>
           <p:nvPr/>
         </p:nvSpPr>
         <p:spPr>
           <a:xfrm>
-            <a:off x="731520" y="1737360"/>
-            <a:ext cx="3657600" cy="548640"/>
-          </a:xfrm>
-          <a:prstGeom prst="rect">
+            <a:off x="731520" y="2103120"/>
+            <a:ext cx="5212080" cy="2011680"/>
+          </a:xfrm>
+          <a:prstGeom prst="roundRect">
             <a:avLst/>
           </a:prstGeom>
           <a:solidFill>
             <a:srgbClr val="111827"/>
           </a:solidFill>
-          <a:ln>
-            <a:noFill/>
+          <a:ln w="25400">
+            <a:solidFill>
+              <a:srgbClr val="22C55E"/>
+            </a:solidFill>
           </a:ln>
         </p:spPr>
         <p:style>
@@ -4990,61 +5708,29 @@
           <a:lstStyle/>
           <a:p>
             <a:pPr algn="ctr"/>
-          </a:p>
-        </p:txBody>
-      </p:sp>
-      <p:sp>
-        <p:nvSpPr>
-          <p:cNvPr id="6" name="TextBox 5"/>
-          <p:cNvSpPr txBox="1"/>
-          <p:nvPr/>
-        </p:nvSpPr>
-        <p:spPr>
-          <a:xfrm>
-            <a:off x="731520" y="1828800"/>
-            <a:ext cx="3657600" cy="457200"/>
-          </a:xfrm>
-          <a:prstGeom prst="rect">
-            <a:avLst/>
-          </a:prstGeom>
-          <a:noFill/>
-        </p:spPr>
-        <p:txBody>
-          <a:bodyPr wrap="none">
-            <a:spAutoFit/>
-          </a:bodyPr>
-          <a:lstStyle/>
-          <a:p>
-            <a:pPr algn="ctr">
-              <a:defRPr sz="1400" b="1">
-                <a:solidFill>
-                  <a:srgbClr val="F1F5F9"/>
-                </a:solidFill>
-                <a:latin typeface="Segoe UI"/>
-              </a:defRPr>
-            </a:pPr>
-            <a:r>
-              <a:t>Feature</a:t>
-            </a:r>
-          </a:p>
-        </p:txBody>
-      </p:sp>
-      <p:sp>
-        <p:nvSpPr>
-          <p:cNvPr id="7" name="Rectangle 6"/>
+            <a:endParaRPr/>
+          </a:p>
+        </p:txBody>
+      </p:sp>
+      <p:sp>
+        <p:nvSpPr>
+          <p:cNvPr id="7" name="Hexagon 6"/>
           <p:cNvSpPr/>
           <p:nvPr/>
         </p:nvSpPr>
         <p:spPr>
           <a:xfrm>
-            <a:off x="4572000" y="1737360"/>
-            <a:ext cx="3200400" cy="548640"/>
-          </a:xfrm>
-          <a:prstGeom prst="rect">
+            <a:off x="1005840" y="2377440"/>
+            <a:ext cx="548640" cy="548640"/>
+          </a:xfrm>
+          <a:prstGeom prst="hexagon">
             <a:avLst/>
           </a:prstGeom>
           <a:solidFill>
-            <a:srgbClr val="111827"/>
+            <a:srgbClr val="22C55E">
+              <a:lumMod val="30000"/>
+              <a:lumOff val="70000"/>
+            </a:srgbClr>
           </a:solidFill>
           <a:ln>
             <a:noFill/>
@@ -5069,6 +5755,7 @@
           <a:lstStyle/>
           <a:p>
             <a:pPr algn="ctr"/>
+            <a:endParaRPr/>
           </a:p>
         </p:txBody>
       </p:sp>
@@ -5080,8 +5767,8 @@
         </p:nvSpPr>
         <p:spPr>
           <a:xfrm>
-            <a:off x="4572000" y="1828800"/>
-            <a:ext cx="3200400" cy="457200"/>
+            <a:off x="1005840" y="2468880"/>
+            <a:ext cx="548640" cy="457200"/>
           </a:xfrm>
           <a:prstGeom prst="rect">
             <a:avLst/>
@@ -5095,7 +5782,43 @@
           <a:lstStyle/>
           <a:p>
             <a:pPr algn="ctr">
-              <a:defRPr sz="1400" b="1">
+              <a:defRPr sz="2000" b="1">
+                <a:solidFill>
+                  <a:srgbClr val="22C55E"/>
+                </a:solidFill>
+                <a:latin typeface="Segoe UI"/>
+              </a:defRPr>
+            </a:pPr>
+            <a:r>
+              <a:t>#</a:t>
+            </a:r>
+          </a:p>
+        </p:txBody>
+      </p:sp>
+      <p:sp>
+        <p:nvSpPr>
+          <p:cNvPr id="9" name="TextBox 8"/>
+          <p:cNvSpPr txBox="1"/>
+          <p:nvPr/>
+        </p:nvSpPr>
+        <p:spPr>
+          <a:xfrm>
+            <a:off x="1737360" y="2331720"/>
+            <a:ext cx="3931920" cy="457200"/>
+          </a:xfrm>
+          <a:prstGeom prst="rect">
+            <a:avLst/>
+          </a:prstGeom>
+          <a:noFill/>
+        </p:spPr>
+        <p:txBody>
+          <a:bodyPr wrap="none">
+            <a:spAutoFit/>
+          </a:bodyPr>
+          <a:lstStyle/>
+          <a:p>
+            <a:pPr algn="l">
+              <a:defRPr sz="1800" b="1">
                 <a:solidFill>
                   <a:srgbClr val="F1F5F9"/>
                 </a:solidFill>
@@ -5103,30 +5826,68 @@
               </a:defRPr>
             </a:pPr>
             <a:r>
-              <a:t>Other Apps</a:t>
-            </a:r>
-          </a:p>
-        </p:txBody>
-      </p:sp>
-      <p:sp>
-        <p:nvSpPr>
-          <p:cNvPr id="9" name="Rectangle 8"/>
+              <a:t>SHA-256 CSV Hash Verification</a:t>
+            </a:r>
+          </a:p>
+        </p:txBody>
+      </p:sp>
+      <p:sp>
+        <p:nvSpPr>
+          <p:cNvPr id="10" name="TextBox 9"/>
+          <p:cNvSpPr txBox="1"/>
+          <p:nvPr/>
+        </p:nvSpPr>
+        <p:spPr>
+          <a:xfrm>
+            <a:off x="1005840" y="3017520"/>
+            <a:ext cx="4663440" cy="1005840"/>
+          </a:xfrm>
+          <a:prstGeom prst="rect">
+            <a:avLst/>
+          </a:prstGeom>
+          <a:noFill/>
+        </p:spPr>
+        <p:txBody>
+          <a:bodyPr wrap="square">
+            <a:spAutoFit/>
+          </a:bodyPr>
+          <a:lstStyle/>
+          <a:p>
+            <a:pPr algn="l">
+              <a:defRPr sz="1300" b="0">
+                <a:solidFill>
+                  <a:srgbClr val="94A3B8"/>
+                </a:solidFill>
+                <a:latin typeface="Segoe UI"/>
+              </a:defRPr>
+            </a:pPr>
+            <a:r>
+              <a:t>Every uploaded CSV is hashed using SHA-256. If a user tries to re-upload the same file (even with a different filename), the system detects it and blocks the upload. This prevents users from inflating their scores by uploading the same transactions multiple times.</a:t>
+            </a:r>
+          </a:p>
+        </p:txBody>
+      </p:sp>
+      <p:sp>
+        <p:nvSpPr>
+          <p:cNvPr id="11" name="Rounded Rectangle 10"/>
           <p:cNvSpPr/>
           <p:nvPr/>
         </p:nvSpPr>
         <p:spPr>
           <a:xfrm>
-            <a:off x="7955279" y="1737360"/>
-            <a:ext cx="3200400" cy="548640"/>
-          </a:xfrm>
-          <a:prstGeom prst="rect">
+            <a:off x="6217920" y="2103120"/>
+            <a:ext cx="5212080" cy="2011680"/>
+          </a:xfrm>
+          <a:prstGeom prst="roundRect">
             <a:avLst/>
           </a:prstGeom>
           <a:solidFill>
             <a:srgbClr val="111827"/>
           </a:solidFill>
-          <a:ln>
-            <a:noFill/>
+          <a:ln w="25400">
+            <a:solidFill>
+              <a:srgbClr val="8B5CF6"/>
+            </a:solidFill>
           </a:ln>
         </p:spPr>
         <p:style>
@@ -5148,169 +5909,29 @@
           <a:lstStyle/>
           <a:p>
             <a:pPr algn="ctr"/>
-          </a:p>
-        </p:txBody>
-      </p:sp>
-      <p:sp>
-        <p:nvSpPr>
-          <p:cNvPr id="10" name="TextBox 9"/>
-          <p:cNvSpPr txBox="1"/>
-          <p:nvPr/>
-        </p:nvSpPr>
-        <p:spPr>
-          <a:xfrm>
-            <a:off x="7955279" y="1828800"/>
-            <a:ext cx="3200400" cy="457200"/>
-          </a:xfrm>
-          <a:prstGeom prst="rect">
-            <a:avLst/>
-          </a:prstGeom>
-          <a:noFill/>
-        </p:spPr>
-        <p:txBody>
-          <a:bodyPr wrap="none">
-            <a:spAutoFit/>
-          </a:bodyPr>
-          <a:lstStyle/>
-          <a:p>
-            <a:pPr algn="ctr">
-              <a:defRPr sz="1400" b="1">
-                <a:solidFill>
-                  <a:srgbClr val="22C55E"/>
-                </a:solidFill>
-                <a:latin typeface="Segoe UI"/>
-              </a:defRPr>
-            </a:pPr>
-            <a:r>
-              <a:t>LOOP</a:t>
-            </a:r>
-          </a:p>
-        </p:txBody>
-      </p:sp>
-      <p:sp>
-        <p:nvSpPr>
-          <p:cNvPr id="11" name="TextBox 10"/>
-          <p:cNvSpPr txBox="1"/>
-          <p:nvPr/>
-        </p:nvSpPr>
-        <p:spPr>
-          <a:xfrm>
-            <a:off x="731520" y="2377440"/>
-            <a:ext cx="3657600" cy="457200"/>
-          </a:xfrm>
-          <a:prstGeom prst="rect">
-            <a:avLst/>
-          </a:prstGeom>
-          <a:noFill/>
-        </p:spPr>
-        <p:txBody>
-          <a:bodyPr wrap="none">
-            <a:spAutoFit/>
-          </a:bodyPr>
-          <a:lstStyle/>
-          <a:p>
-            <a:pPr algn="l">
-              <a:defRPr sz="1400" b="0">
-                <a:solidFill>
-                  <a:srgbClr val="F1F5F9"/>
-                </a:solidFill>
-                <a:latin typeface="Segoe UI"/>
-              </a:defRPr>
-            </a:pPr>
-            <a:r>
-              <a:t>Data Entry</a:t>
-            </a:r>
-          </a:p>
-        </p:txBody>
-      </p:sp>
-      <p:sp>
-        <p:nvSpPr>
-          <p:cNvPr id="12" name="TextBox 11"/>
-          <p:cNvSpPr txBox="1"/>
-          <p:nvPr/>
-        </p:nvSpPr>
-        <p:spPr>
-          <a:xfrm>
-            <a:off x="4572000" y="2377440"/>
-            <a:ext cx="3200400" cy="457200"/>
-          </a:xfrm>
-          <a:prstGeom prst="rect">
-            <a:avLst/>
-          </a:prstGeom>
-          <a:noFill/>
-        </p:spPr>
-        <p:txBody>
-          <a:bodyPr wrap="none">
-            <a:spAutoFit/>
-          </a:bodyPr>
-          <a:lstStyle/>
-          <a:p>
-            <a:pPr algn="ctr">
-              <a:defRPr sz="1300" b="0">
-                <a:solidFill>
-                  <a:srgbClr val="94A3B8"/>
-                </a:solidFill>
-                <a:latin typeface="Segoe UI"/>
-              </a:defRPr>
-            </a:pPr>
-            <a:r>
-              <a:t>✗ Manual logging</a:t>
-            </a:r>
-          </a:p>
-        </p:txBody>
-      </p:sp>
-      <p:sp>
-        <p:nvSpPr>
-          <p:cNvPr id="13" name="TextBox 12"/>
-          <p:cNvSpPr txBox="1"/>
-          <p:nvPr/>
-        </p:nvSpPr>
-        <p:spPr>
-          <a:xfrm>
-            <a:off x="7955279" y="2377440"/>
-            <a:ext cx="3200400" cy="457200"/>
-          </a:xfrm>
-          <a:prstGeom prst="rect">
-            <a:avLst/>
-          </a:prstGeom>
-          <a:noFill/>
-        </p:spPr>
-        <p:txBody>
-          <a:bodyPr wrap="none">
-            <a:spAutoFit/>
-          </a:bodyPr>
-          <a:lstStyle/>
-          <a:p>
-            <a:pPr algn="ctr">
-              <a:defRPr sz="1300" b="0">
-                <a:solidFill>
-                  <a:srgbClr val="22C55E"/>
-                </a:solidFill>
-                <a:latin typeface="Segoe UI"/>
-              </a:defRPr>
-            </a:pPr>
-            <a:r>
-              <a:t>✓ Auto CSV parsing</a:t>
-            </a:r>
-          </a:p>
-        </p:txBody>
-      </p:sp>
-      <p:sp>
-        <p:nvSpPr>
-          <p:cNvPr id="14" name="Rectangle 13"/>
+            <a:endParaRPr/>
+          </a:p>
+        </p:txBody>
+      </p:sp>
+      <p:sp>
+        <p:nvSpPr>
+          <p:cNvPr id="12" name="Oval 11"/>
           <p:cNvSpPr/>
           <p:nvPr/>
         </p:nvSpPr>
         <p:spPr>
           <a:xfrm>
-            <a:off x="731520" y="2880360"/>
-            <a:ext cx="10424160" cy="12700"/>
-          </a:xfrm>
-          <a:prstGeom prst="rect">
+            <a:off x="6492240" y="2377440"/>
+            <a:ext cx="548640" cy="548640"/>
+          </a:xfrm>
+          <a:prstGeom prst="ellipse">
             <a:avLst/>
           </a:prstGeom>
           <a:solidFill>
-            <a:srgbClr val="1E293B"/>
+            <a:srgbClr val="8B5CF6">
+              <a:lumMod val="30000"/>
+              <a:lumOff val="70000"/>
+            </a:srgbClr>
           </a:solidFill>
           <a:ln>
             <a:noFill/>
@@ -5335,6 +5956,79 @@
           <a:lstStyle/>
           <a:p>
             <a:pPr algn="ctr"/>
+            <a:endParaRPr/>
+          </a:p>
+        </p:txBody>
+      </p:sp>
+      <p:sp>
+        <p:nvSpPr>
+          <p:cNvPr id="13" name="TextBox 12"/>
+          <p:cNvSpPr txBox="1"/>
+          <p:nvPr/>
+        </p:nvSpPr>
+        <p:spPr>
+          <a:xfrm>
+            <a:off x="6492240" y="2468880"/>
+            <a:ext cx="548640" cy="457200"/>
+          </a:xfrm>
+          <a:prstGeom prst="rect">
+            <a:avLst/>
+          </a:prstGeom>
+          <a:noFill/>
+        </p:spPr>
+        <p:txBody>
+          <a:bodyPr wrap="none">
+            <a:spAutoFit/>
+          </a:bodyPr>
+          <a:lstStyle/>
+          <a:p>
+            <a:pPr algn="ctr">
+              <a:defRPr sz="2000" b="1">
+                <a:solidFill>
+                  <a:srgbClr val="8B5CF6"/>
+                </a:solidFill>
+                <a:latin typeface="Segoe UI"/>
+              </a:defRPr>
+            </a:pPr>
+            <a:r>
+              <a:t>✓</a:t>
+            </a:r>
+          </a:p>
+        </p:txBody>
+      </p:sp>
+      <p:sp>
+        <p:nvSpPr>
+          <p:cNvPr id="14" name="TextBox 13"/>
+          <p:cNvSpPr txBox="1"/>
+          <p:nvPr/>
+        </p:nvSpPr>
+        <p:spPr>
+          <a:xfrm>
+            <a:off x="7223760" y="2331720"/>
+            <a:ext cx="3931920" cy="457200"/>
+          </a:xfrm>
+          <a:prstGeom prst="rect">
+            <a:avLst/>
+          </a:prstGeom>
+          <a:noFill/>
+        </p:spPr>
+        <p:txBody>
+          <a:bodyPr wrap="none">
+            <a:spAutoFit/>
+          </a:bodyPr>
+          <a:lstStyle/>
+          <a:p>
+            <a:pPr algn="l">
+              <a:defRPr sz="1800" b="1">
+                <a:solidFill>
+                  <a:srgbClr val="F1F5F9"/>
+                </a:solidFill>
+                <a:latin typeface="Segoe UI"/>
+              </a:defRPr>
+            </a:pPr>
+            <a:r>
+              <a:t>OTP Email Verification</a:t>
+            </a:r>
           </a:p>
         </p:txBody>
       </p:sp>
@@ -5346,22 +6040,58 @@
         </p:nvSpPr>
         <p:spPr>
           <a:xfrm>
-            <a:off x="731520" y="3017520"/>
-            <a:ext cx="3657600" cy="457200"/>
-          </a:xfrm>
-          <a:prstGeom prst="rect">
-            <a:avLst/>
-          </a:prstGeom>
-          <a:noFill/>
-        </p:spPr>
-        <p:txBody>
-          <a:bodyPr wrap="none">
+            <a:off x="6492240" y="3017520"/>
+            <a:ext cx="4663440" cy="1005840"/>
+          </a:xfrm>
+          <a:prstGeom prst="rect">
+            <a:avLst/>
+          </a:prstGeom>
+          <a:noFill/>
+        </p:spPr>
+        <p:txBody>
+          <a:bodyPr wrap="square">
             <a:spAutoFit/>
           </a:bodyPr>
           <a:lstStyle/>
           <a:p>
             <a:pPr algn="l">
-              <a:defRPr sz="1400" b="0">
+              <a:defRPr sz="1300" b="0">
+                <a:solidFill>
+                  <a:srgbClr val="94A3B8"/>
+                </a:solidFill>
+                <a:latin typeface="Segoe UI"/>
+              </a:defRPr>
+            </a:pPr>
+            <a:r>
+              <a:t>All user accounts require email verification via one-time password (OTP). This prevents bot account creation and ensures each user on the leaderboard is a real person with a verified email address.</a:t>
+            </a:r>
+          </a:p>
+        </p:txBody>
+      </p:sp>
+      <p:sp>
+        <p:nvSpPr>
+          <p:cNvPr id="16" name="TextBox 15"/>
+          <p:cNvSpPr txBox="1"/>
+          <p:nvPr/>
+        </p:nvSpPr>
+        <p:spPr>
+          <a:xfrm>
+            <a:off x="731520" y="4389120"/>
+            <a:ext cx="10058400" cy="365760"/>
+          </a:xfrm>
+          <a:prstGeom prst="rect">
+            <a:avLst/>
+          </a:prstGeom>
+          <a:noFill/>
+        </p:spPr>
+        <p:txBody>
+          <a:bodyPr wrap="none">
+            <a:spAutoFit/>
+          </a:bodyPr>
+          <a:lstStyle/>
+          <a:p>
+            <a:pPr algn="l">
+              <a:defRPr sz="1800" b="1">
                 <a:solidFill>
                   <a:srgbClr val="F1F5F9"/>
                 </a:solidFill>
@@ -5369,102 +6099,32 @@
               </a:defRPr>
             </a:pPr>
             <a:r>
-              <a:t>Benchmarking</a:t>
-            </a:r>
-          </a:p>
-        </p:txBody>
-      </p:sp>
-      <p:sp>
-        <p:nvSpPr>
-          <p:cNvPr id="16" name="TextBox 15"/>
-          <p:cNvSpPr txBox="1"/>
-          <p:nvPr/>
-        </p:nvSpPr>
-        <p:spPr>
-          <a:xfrm>
-            <a:off x="4572000" y="3017520"/>
-            <a:ext cx="3200400" cy="457200"/>
-          </a:xfrm>
-          <a:prstGeom prst="rect">
-            <a:avLst/>
-          </a:prstGeom>
-          <a:noFill/>
-        </p:spPr>
-        <p:txBody>
-          <a:bodyPr wrap="none">
-            <a:spAutoFit/>
-          </a:bodyPr>
-          <a:lstStyle/>
-          <a:p>
-            <a:pPr algn="ctr">
-              <a:defRPr sz="1300" b="0">
-                <a:solidFill>
-                  <a:srgbClr val="94A3B8"/>
-                </a:solidFill>
-                <a:latin typeface="Segoe UI"/>
-              </a:defRPr>
-            </a:pPr>
-            <a:r>
-              <a:t>✗ Global averages</a:t>
-            </a:r>
-          </a:p>
-        </p:txBody>
-      </p:sp>
-      <p:sp>
-        <p:nvSpPr>
-          <p:cNvPr id="17" name="TextBox 16"/>
-          <p:cNvSpPr txBox="1"/>
-          <p:nvPr/>
-        </p:nvSpPr>
-        <p:spPr>
-          <a:xfrm>
-            <a:off x="7955279" y="3017520"/>
-            <a:ext cx="3200400" cy="457200"/>
-          </a:xfrm>
-          <a:prstGeom prst="rect">
-            <a:avLst/>
-          </a:prstGeom>
-          <a:noFill/>
-        </p:spPr>
-        <p:txBody>
-          <a:bodyPr wrap="none">
-            <a:spAutoFit/>
-          </a:bodyPr>
-          <a:lstStyle/>
-          <a:p>
-            <a:pPr algn="ctr">
-              <a:defRPr sz="1300" b="0">
-                <a:solidFill>
-                  <a:srgbClr val="22C55E"/>
-                </a:solidFill>
-                <a:latin typeface="Segoe UI"/>
-              </a:defRPr>
-            </a:pPr>
-            <a:r>
-              <a:t>✓ City-specific peers</a:t>
-            </a:r>
-          </a:p>
-        </p:txBody>
-      </p:sp>
-      <p:sp>
-        <p:nvSpPr>
-          <p:cNvPr id="18" name="Rectangle 17"/>
+              <a:t>How It Protects Leaderboard Integrity</a:t>
+            </a:r>
+          </a:p>
+        </p:txBody>
+      </p:sp>
+      <p:sp>
+        <p:nvSpPr>
+          <p:cNvPr id="17" name="Rounded Rectangle 16"/>
           <p:cNvSpPr/>
           <p:nvPr/>
         </p:nvSpPr>
         <p:spPr>
           <a:xfrm>
-            <a:off x="731520" y="3520440"/>
-            <a:ext cx="10424160" cy="12700"/>
-          </a:xfrm>
-          <a:prstGeom prst="rect">
+            <a:off x="731520" y="4846320"/>
+            <a:ext cx="3474720" cy="1188720"/>
+          </a:xfrm>
+          <a:prstGeom prst="roundRect">
             <a:avLst/>
           </a:prstGeom>
           <a:solidFill>
-            <a:srgbClr val="1E293B"/>
+            <a:srgbClr val="141E2D"/>
           </a:solidFill>
-          <a:ln>
-            <a:noFill/>
+          <a:ln w="12700">
+            <a:solidFill>
+              <a:srgbClr val="1E293B"/>
+            </a:solidFill>
           </a:ln>
         </p:spPr>
         <p:style>
@@ -5486,6 +6146,43 @@
           <a:lstStyle/>
           <a:p>
             <a:pPr algn="ctr"/>
+            <a:endParaRPr/>
+          </a:p>
+        </p:txBody>
+      </p:sp>
+      <p:sp>
+        <p:nvSpPr>
+          <p:cNvPr id="18" name="TextBox 17"/>
+          <p:cNvSpPr txBox="1"/>
+          <p:nvPr/>
+        </p:nvSpPr>
+        <p:spPr>
+          <a:xfrm>
+            <a:off x="914400" y="4983480"/>
+            <a:ext cx="365760" cy="365760"/>
+          </a:xfrm>
+          <a:prstGeom prst="rect">
+            <a:avLst/>
+          </a:prstGeom>
+          <a:noFill/>
+        </p:spPr>
+        <p:txBody>
+          <a:bodyPr wrap="none">
+            <a:spAutoFit/>
+          </a:bodyPr>
+          <a:lstStyle/>
+          <a:p>
+            <a:pPr algn="l">
+              <a:defRPr sz="1600" b="1">
+                <a:solidFill>
+                  <a:srgbClr val="22C55E"/>
+                </a:solidFill>
+                <a:latin typeface="Segoe UI"/>
+              </a:defRPr>
+            </a:pPr>
+            <a:r>
+              <a:t>◉</a:t>
+            </a:r>
           </a:p>
         </p:txBody>
       </p:sp>
@@ -5497,8 +6194,8 @@
         </p:nvSpPr>
         <p:spPr>
           <a:xfrm>
-            <a:off x="731520" y="3657600"/>
-            <a:ext cx="3657600" cy="457200"/>
+            <a:off x="1188720" y="4983480"/>
+            <a:ext cx="2834640" cy="365760"/>
           </a:xfrm>
           <a:prstGeom prst="rect">
             <a:avLst/>
@@ -5512,7 +6209,7 @@
           <a:lstStyle/>
           <a:p>
             <a:pPr algn="l">
-              <a:defRPr sz="1400" b="0">
+              <a:defRPr sz="1400" b="1">
                 <a:solidFill>
                   <a:srgbClr val="F1F5F9"/>
                 </a:solidFill>
@@ -5520,7 +6217,7 @@
               </a:defRPr>
             </a:pPr>
             <a:r>
-              <a:t>Suggestions</a:t>
+              <a:t>Duplicate Detection</a:t>
             </a:r>
           </a:p>
         </p:txBody>
@@ -5533,22 +6230,22 @@
         </p:nvSpPr>
         <p:spPr>
           <a:xfrm>
-            <a:off x="4572000" y="3657600"/>
-            <a:ext cx="3200400" cy="457200"/>
-          </a:xfrm>
-          <a:prstGeom prst="rect">
-            <a:avLst/>
-          </a:prstGeom>
-          <a:noFill/>
-        </p:spPr>
-        <p:txBody>
-          <a:bodyPr wrap="none">
-            <a:spAutoFit/>
-          </a:bodyPr>
-          <a:lstStyle/>
-          <a:p>
-            <a:pPr algn="ctr">
-              <a:defRPr sz="1300" b="0">
+            <a:off x="914400" y="5394960"/>
+            <a:ext cx="3108960" cy="548640"/>
+          </a:xfrm>
+          <a:prstGeom prst="rect">
+            <a:avLst/>
+          </a:prstGeom>
+          <a:noFill/>
+        </p:spPr>
+        <p:txBody>
+          <a:bodyPr wrap="square">
+            <a:spAutoFit/>
+          </a:bodyPr>
+          <a:lstStyle/>
+          <a:p>
+            <a:pPr algn="l">
+              <a:defRPr sz="1100" b="0">
                 <a:solidFill>
                   <a:srgbClr val="94A3B8"/>
                 </a:solidFill>
@@ -5556,66 +6253,32 @@
               </a:defRPr>
             </a:pPr>
             <a:r>
-              <a:t>✗ Generic tips</a:t>
-            </a:r>
-          </a:p>
-        </p:txBody>
-      </p:sp>
-      <p:sp>
-        <p:nvSpPr>
-          <p:cNvPr id="21" name="TextBox 20"/>
-          <p:cNvSpPr txBox="1"/>
-          <p:nvPr/>
-        </p:nvSpPr>
-        <p:spPr>
-          <a:xfrm>
-            <a:off x="7955279" y="3657600"/>
-            <a:ext cx="3200400" cy="457200"/>
-          </a:xfrm>
-          <a:prstGeom prst="rect">
-            <a:avLst/>
-          </a:prstGeom>
-          <a:noFill/>
-        </p:spPr>
-        <p:txBody>
-          <a:bodyPr wrap="none">
-            <a:spAutoFit/>
-          </a:bodyPr>
-          <a:lstStyle/>
-          <a:p>
-            <a:pPr algn="ctr">
-              <a:defRPr sz="1300" b="0">
-                <a:solidFill>
-                  <a:srgbClr val="22C55E"/>
-                </a:solidFill>
-                <a:latin typeface="Segoe UI"/>
-              </a:defRPr>
-            </a:pPr>
-            <a:r>
-              <a:t>✓ City + spending filtered</a:t>
-            </a:r>
-          </a:p>
-        </p:txBody>
-      </p:sp>
-      <p:sp>
-        <p:nvSpPr>
-          <p:cNvPr id="22" name="Rectangle 21"/>
+              <a:t>Same CSV content = blocked, regardless of filename</a:t>
+            </a:r>
+          </a:p>
+        </p:txBody>
+      </p:sp>
+      <p:sp>
+        <p:nvSpPr>
+          <p:cNvPr id="21" name="Rounded Rectangle 20"/>
           <p:cNvSpPr/>
           <p:nvPr/>
         </p:nvSpPr>
         <p:spPr>
           <a:xfrm>
-            <a:off x="731520" y="4160520"/>
-            <a:ext cx="10424160" cy="12700"/>
-          </a:xfrm>
-          <a:prstGeom prst="rect">
+            <a:off x="4480559" y="4846320"/>
+            <a:ext cx="3474720" cy="1188720"/>
+          </a:xfrm>
+          <a:prstGeom prst="roundRect">
             <a:avLst/>
           </a:prstGeom>
           <a:solidFill>
-            <a:srgbClr val="1E293B"/>
+            <a:srgbClr val="141E2D"/>
           </a:solidFill>
-          <a:ln>
-            <a:noFill/>
+          <a:ln w="12700">
+            <a:solidFill>
+              <a:srgbClr val="1E293B"/>
+            </a:solidFill>
           </a:ln>
         </p:spPr>
         <p:style>
@@ -5637,6 +6300,43 @@
           <a:lstStyle/>
           <a:p>
             <a:pPr algn="ctr"/>
+            <a:endParaRPr/>
+          </a:p>
+        </p:txBody>
+      </p:sp>
+      <p:sp>
+        <p:nvSpPr>
+          <p:cNvPr id="22" name="TextBox 21"/>
+          <p:cNvSpPr txBox="1"/>
+          <p:nvPr/>
+        </p:nvSpPr>
+        <p:spPr>
+          <a:xfrm>
+            <a:off x="4663439" y="4983480"/>
+            <a:ext cx="365760" cy="365760"/>
+          </a:xfrm>
+          <a:prstGeom prst="rect">
+            <a:avLst/>
+          </a:prstGeom>
+          <a:noFill/>
+        </p:spPr>
+        <p:txBody>
+          <a:bodyPr wrap="none">
+            <a:spAutoFit/>
+          </a:bodyPr>
+          <a:lstStyle/>
+          <a:p>
+            <a:pPr algn="l">
+              <a:defRPr sz="1600" b="1">
+                <a:solidFill>
+                  <a:srgbClr val="22C55E"/>
+                </a:solidFill>
+                <a:latin typeface="Segoe UI"/>
+              </a:defRPr>
+            </a:pPr>
+            <a:r>
+              <a:t>◉</a:t>
+            </a:r>
           </a:p>
         </p:txBody>
       </p:sp>
@@ -5648,8 +6348,8 @@
         </p:nvSpPr>
         <p:spPr>
           <a:xfrm>
-            <a:off x="731520" y="4297679"/>
-            <a:ext cx="3657600" cy="457200"/>
+            <a:off x="4937759" y="4983480"/>
+            <a:ext cx="2834640" cy="365760"/>
           </a:xfrm>
           <a:prstGeom prst="rect">
             <a:avLst/>
@@ -5663,7 +6363,7 @@
           <a:lstStyle/>
           <a:p>
             <a:pPr algn="l">
-              <a:defRPr sz="1400" b="0">
+              <a:defRPr sz="1400" b="1">
                 <a:solidFill>
                   <a:srgbClr val="F1F5F9"/>
                 </a:solidFill>
@@ -5671,7 +6371,7 @@
               </a:defRPr>
             </a:pPr>
             <a:r>
-              <a:t>Social</a:t>
+              <a:t>Real Users Only</a:t>
             </a:r>
           </a:p>
         </p:txBody>
@@ -5684,22 +6384,22 @@
         </p:nvSpPr>
         <p:spPr>
           <a:xfrm>
-            <a:off x="4572000" y="4297679"/>
-            <a:ext cx="3200400" cy="457200"/>
-          </a:xfrm>
-          <a:prstGeom prst="rect">
-            <a:avLst/>
-          </a:prstGeom>
-          <a:noFill/>
-        </p:spPr>
-        <p:txBody>
-          <a:bodyPr wrap="none">
-            <a:spAutoFit/>
-          </a:bodyPr>
-          <a:lstStyle/>
-          <a:p>
-            <a:pPr algn="ctr">
-              <a:defRPr sz="1300" b="0">
+            <a:off x="4663439" y="5394960"/>
+            <a:ext cx="3108960" cy="548640"/>
+          </a:xfrm>
+          <a:prstGeom prst="rect">
+            <a:avLst/>
+          </a:prstGeom>
+          <a:noFill/>
+        </p:spPr>
+        <p:txBody>
+          <a:bodyPr wrap="square">
+            <a:spAutoFit/>
+          </a:bodyPr>
+          <a:lstStyle/>
+          <a:p>
+            <a:pPr algn="l">
+              <a:defRPr sz="1100" b="0">
                 <a:solidFill>
                   <a:srgbClr val="94A3B8"/>
                 </a:solidFill>
@@ -5707,66 +6407,32 @@
               </a:defRPr>
             </a:pPr>
             <a:r>
-              <a:t>✗ None</a:t>
-            </a:r>
-          </a:p>
-        </p:txBody>
-      </p:sp>
-      <p:sp>
-        <p:nvSpPr>
-          <p:cNvPr id="25" name="TextBox 24"/>
-          <p:cNvSpPr txBox="1"/>
-          <p:nvPr/>
-        </p:nvSpPr>
-        <p:spPr>
-          <a:xfrm>
-            <a:off x="7955279" y="4297679"/>
-            <a:ext cx="3200400" cy="457200"/>
-          </a:xfrm>
-          <a:prstGeom prst="rect">
-            <a:avLst/>
-          </a:prstGeom>
-          <a:noFill/>
-        </p:spPr>
-        <p:txBody>
-          <a:bodyPr wrap="none">
-            <a:spAutoFit/>
-          </a:bodyPr>
-          <a:lstStyle/>
-          <a:p>
-            <a:pPr algn="ctr">
-              <a:defRPr sz="1300" b="0">
-                <a:solidFill>
-                  <a:srgbClr val="22C55E"/>
-                </a:solidFill>
-                <a:latin typeface="Segoe UI"/>
-              </a:defRPr>
-            </a:pPr>
-            <a:r>
-              <a:t>✓ Circles &amp; leaderboards</a:t>
-            </a:r>
-          </a:p>
-        </p:txBody>
-      </p:sp>
-      <p:sp>
-        <p:nvSpPr>
-          <p:cNvPr id="26" name="Rectangle 25"/>
+              <a:t>Email OTP verification prevents fake accounts</a:t>
+            </a:r>
+          </a:p>
+        </p:txBody>
+      </p:sp>
+      <p:sp>
+        <p:nvSpPr>
+          <p:cNvPr id="25" name="Rounded Rectangle 24"/>
           <p:cNvSpPr/>
           <p:nvPr/>
         </p:nvSpPr>
         <p:spPr>
           <a:xfrm>
-            <a:off x="731520" y="4800599"/>
-            <a:ext cx="10424160" cy="12700"/>
-          </a:xfrm>
-          <a:prstGeom prst="rect">
+            <a:off x="8229600" y="4846320"/>
+            <a:ext cx="3474720" cy="1188720"/>
+          </a:xfrm>
+          <a:prstGeom prst="roundRect">
             <a:avLst/>
           </a:prstGeom>
           <a:solidFill>
-            <a:srgbClr val="1E293B"/>
+            <a:srgbClr val="141E2D"/>
           </a:solidFill>
-          <a:ln>
-            <a:noFill/>
+          <a:ln w="12700">
+            <a:solidFill>
+              <a:srgbClr val="1E293B"/>
+            </a:solidFill>
           </a:ln>
         </p:spPr>
         <p:style>
@@ -5788,6 +6454,43 @@
           <a:lstStyle/>
           <a:p>
             <a:pPr algn="ctr"/>
+            <a:endParaRPr/>
+          </a:p>
+        </p:txBody>
+      </p:sp>
+      <p:sp>
+        <p:nvSpPr>
+          <p:cNvPr id="26" name="TextBox 25"/>
+          <p:cNvSpPr txBox="1"/>
+          <p:nvPr/>
+        </p:nvSpPr>
+        <p:spPr>
+          <a:xfrm>
+            <a:off x="8412480" y="4983480"/>
+            <a:ext cx="365760" cy="365760"/>
+          </a:xfrm>
+          <a:prstGeom prst="rect">
+            <a:avLst/>
+          </a:prstGeom>
+          <a:noFill/>
+        </p:spPr>
+        <p:txBody>
+          <a:bodyPr wrap="none">
+            <a:spAutoFit/>
+          </a:bodyPr>
+          <a:lstStyle/>
+          <a:p>
+            <a:pPr algn="l">
+              <a:defRPr sz="1600" b="1">
+                <a:solidFill>
+                  <a:srgbClr val="22C55E"/>
+                </a:solidFill>
+                <a:latin typeface="Segoe UI"/>
+              </a:defRPr>
+            </a:pPr>
+            <a:r>
+              <a:t>◉</a:t>
+            </a:r>
           </a:p>
         </p:txBody>
       </p:sp>
@@ -5799,8 +6502,8 @@
         </p:nvSpPr>
         <p:spPr>
           <a:xfrm>
-            <a:off x="731520" y="4937760"/>
-            <a:ext cx="3657600" cy="457200"/>
+            <a:off x="8686800" y="4983480"/>
+            <a:ext cx="2834640" cy="365760"/>
           </a:xfrm>
           <a:prstGeom prst="rect">
             <a:avLst/>
@@ -5814,7 +6517,7 @@
           <a:lstStyle/>
           <a:p>
             <a:pPr algn="l">
-              <a:defRPr sz="1400" b="0">
+              <a:defRPr sz="1400" b="1">
                 <a:solidFill>
                   <a:srgbClr val="F1F5F9"/>
                 </a:solidFill>
@@ -5822,7 +6525,7 @@
               </a:defRPr>
             </a:pPr>
             <a:r>
-              <a:t>Personality</a:t>
+              <a:t>Fair Competition</a:t>
             </a:r>
           </a:p>
         </p:txBody>
@@ -5835,22 +6538,22 @@
         </p:nvSpPr>
         <p:spPr>
           <a:xfrm>
-            <a:off x="4572000" y="4937760"/>
-            <a:ext cx="3200400" cy="457200"/>
-          </a:xfrm>
-          <a:prstGeom prst="rect">
-            <a:avLst/>
-          </a:prstGeom>
-          <a:noFill/>
-        </p:spPr>
-        <p:txBody>
-          <a:bodyPr wrap="none">
-            <a:spAutoFit/>
-          </a:bodyPr>
-          <a:lstStyle/>
-          <a:p>
-            <a:pPr algn="ctr">
-              <a:defRPr sz="1300" b="0">
+            <a:off x="8412480" y="5394960"/>
+            <a:ext cx="3108960" cy="548640"/>
+          </a:xfrm>
+          <a:prstGeom prst="rect">
+            <a:avLst/>
+          </a:prstGeom>
+          <a:noFill/>
+        </p:spPr>
+        <p:txBody>
+          <a:bodyPr wrap="square">
+            <a:spAutoFit/>
+          </a:bodyPr>
+          <a:lstStyle/>
+          <a:p>
+            <a:pPr algn="l">
+              <a:defRPr sz="1100" b="0">
                 <a:solidFill>
                   <a:srgbClr val="94A3B8"/>
                 </a:solidFill>
@@ -5858,194 +6561,7 @@
               </a:defRPr>
             </a:pPr>
             <a:r>
-              <a:t>✗ Just numbers</a:t>
-            </a:r>
-          </a:p>
-        </p:txBody>
-      </p:sp>
-      <p:sp>
-        <p:nvSpPr>
-          <p:cNvPr id="29" name="TextBox 28"/>
-          <p:cNvSpPr txBox="1"/>
-          <p:nvPr/>
-        </p:nvSpPr>
-        <p:spPr>
-          <a:xfrm>
-            <a:off x="7955279" y="4937760"/>
-            <a:ext cx="3200400" cy="457200"/>
-          </a:xfrm>
-          <a:prstGeom prst="rect">
-            <a:avLst/>
-          </a:prstGeom>
-          <a:noFill/>
-        </p:spPr>
-        <p:txBody>
-          <a:bodyPr wrap="none">
-            <a:spAutoFit/>
-          </a:bodyPr>
-          <a:lstStyle/>
-          <a:p>
-            <a:pPr algn="ctr">
-              <a:defRPr sz="1300" b="0">
-                <a:solidFill>
-                  <a:srgbClr val="22C55E"/>
-                </a:solidFill>
-                <a:latin typeface="Segoe UI"/>
-              </a:defRPr>
-            </a:pPr>
-            <a:r>
-              <a:t>✓ 6 evolving personas</a:t>
-            </a:r>
-          </a:p>
-        </p:txBody>
-      </p:sp>
-      <p:sp>
-        <p:nvSpPr>
-          <p:cNvPr id="30" name="Rectangle 29"/>
-          <p:cNvSpPr/>
-          <p:nvPr/>
-        </p:nvSpPr>
-        <p:spPr>
-          <a:xfrm>
-            <a:off x="731520" y="5440680"/>
-            <a:ext cx="10424160" cy="12700"/>
-          </a:xfrm>
-          <a:prstGeom prst="rect">
-            <a:avLst/>
-          </a:prstGeom>
-          <a:solidFill>
-            <a:srgbClr val="1E293B"/>
-          </a:solidFill>
-          <a:ln>
-            <a:noFill/>
-          </a:ln>
-        </p:spPr>
-        <p:style>
-          <a:lnRef idx="1">
-            <a:schemeClr val="accent1"/>
-          </a:lnRef>
-          <a:fillRef idx="3">
-            <a:schemeClr val="accent1"/>
-          </a:fillRef>
-          <a:effectRef idx="2">
-            <a:schemeClr val="accent1"/>
-          </a:effectRef>
-          <a:fontRef idx="minor">
-            <a:schemeClr val="lt1"/>
-          </a:fontRef>
-        </p:style>
-        <p:txBody>
-          <a:bodyPr rtlCol="0" anchor="ctr"/>
-          <a:lstStyle/>
-          <a:p>
-            <a:pPr algn="ctr"/>
-          </a:p>
-        </p:txBody>
-      </p:sp>
-      <p:sp>
-        <p:nvSpPr>
-          <p:cNvPr id="31" name="TextBox 30"/>
-          <p:cNvSpPr txBox="1"/>
-          <p:nvPr/>
-        </p:nvSpPr>
-        <p:spPr>
-          <a:xfrm>
-            <a:off x="731520" y="5577840"/>
-            <a:ext cx="3657600" cy="457200"/>
-          </a:xfrm>
-          <a:prstGeom prst="rect">
-            <a:avLst/>
-          </a:prstGeom>
-          <a:noFill/>
-        </p:spPr>
-        <p:txBody>
-          <a:bodyPr wrap="none">
-            <a:spAutoFit/>
-          </a:bodyPr>
-          <a:lstStyle/>
-          <a:p>
-            <a:pPr algn="l">
-              <a:defRPr sz="1400" b="0">
-                <a:solidFill>
-                  <a:srgbClr val="F1F5F9"/>
-                </a:solidFill>
-                <a:latin typeface="Segoe UI"/>
-              </a:defRPr>
-            </a:pPr>
-            <a:r>
-              <a:t>AI Features</a:t>
-            </a:r>
-          </a:p>
-        </p:txBody>
-      </p:sp>
-      <p:sp>
-        <p:nvSpPr>
-          <p:cNvPr id="32" name="TextBox 31"/>
-          <p:cNvSpPr txBox="1"/>
-          <p:nvPr/>
-        </p:nvSpPr>
-        <p:spPr>
-          <a:xfrm>
-            <a:off x="4572000" y="5577840"/>
-            <a:ext cx="3200400" cy="457200"/>
-          </a:xfrm>
-          <a:prstGeom prst="rect">
-            <a:avLst/>
-          </a:prstGeom>
-          <a:noFill/>
-        </p:spPr>
-        <p:txBody>
-          <a:bodyPr wrap="none">
-            <a:spAutoFit/>
-          </a:bodyPr>
-          <a:lstStyle/>
-          <a:p>
-            <a:pPr algn="ctr">
-              <a:defRPr sz="1300" b="0">
-                <a:solidFill>
-                  <a:srgbClr val="94A3B8"/>
-                </a:solidFill>
-                <a:latin typeface="Segoe UI"/>
-              </a:defRPr>
-            </a:pPr>
-            <a:r>
-              <a:t>✗ Basic</a:t>
-            </a:r>
-          </a:p>
-        </p:txBody>
-      </p:sp>
-      <p:sp>
-        <p:nvSpPr>
-          <p:cNvPr id="33" name="TextBox 32"/>
-          <p:cNvSpPr txBox="1"/>
-          <p:nvPr/>
-        </p:nvSpPr>
-        <p:spPr>
-          <a:xfrm>
-            <a:off x="7955279" y="5577840"/>
-            <a:ext cx="3200400" cy="457200"/>
-          </a:xfrm>
-          <a:prstGeom prst="rect">
-            <a:avLst/>
-          </a:prstGeom>
-          <a:noFill/>
-        </p:spPr>
-        <p:txBody>
-          <a:bodyPr wrap="none">
-            <a:spAutoFit/>
-          </a:bodyPr>
-          <a:lstStyle/>
-          <a:p>
-            <a:pPr algn="ctr">
-              <a:defRPr sz="1300" b="0">
-                <a:solidFill>
-                  <a:srgbClr val="22C55E"/>
-                </a:solidFill>
-                <a:latin typeface="Segoe UI"/>
-              </a:defRPr>
-            </a:pPr>
-            <a:r>
-              <a:t>✓ LLM classification + stories</a:t>
+              <a:t>Rankings reflect actual behavior, not gaming</a:t>
             </a:r>
           </a:p>
         </p:txBody>
@@ -6059,7 +6575,7 @@
 </file>
 
 <file path=ppt/slides/slide13.xml><?xml version="1.0" encoding="utf-8"?>
-<p:sld xmlns:a="http://schemas.openxmlformats.org/drawingml/2006/main" xmlns:p="http://schemas.openxmlformats.org/presentationml/2006/main" xmlns:r="http://schemas.openxmlformats.org/officeDocument/2006/relationships">
+<p:sld xmlns:a="http://schemas.openxmlformats.org/drawingml/2006/main" xmlns:r="http://schemas.openxmlformats.org/officeDocument/2006/relationships" xmlns:p="http://schemas.openxmlformats.org/presentationml/2006/main">
   <p:cSld>
     <p:spTree>
       <p:nvGrpSpPr>
@@ -6067,7 +6583,14 @@
         <p:cNvGrpSpPr/>
         <p:nvPr/>
       </p:nvGrpSpPr>
-      <p:grpSpPr/>
+      <p:grpSpPr>
+        <a:xfrm>
+          <a:off x="0" y="0"/>
+          <a:ext cx="0" cy="0"/>
+          <a:chOff x="0" y="0"/>
+          <a:chExt cx="0" cy="0"/>
+        </a:xfrm>
+      </p:grpSpPr>
       <p:sp>
         <p:nvSpPr>
           <p:cNvPr id="2" name="Rectangle 1"/>
@@ -6108,6 +6631,7 @@
           <a:lstStyle/>
           <a:p>
             <a:pPr algn="ctr"/>
+            <a:endParaRPr/>
           </a:p>
         </p:txBody>
       </p:sp>
@@ -6142,7 +6666,7 @@
               </a:defRPr>
             </a:pPr>
             <a:r>
-              <a:t>SECURITY &amp; INTEGRITY</a:t>
+              <a:t>ROADMAP</a:t>
             </a:r>
           </a:p>
         </p:txBody>
@@ -6178,21 +6702,150 @@
               </a:defRPr>
             </a:pPr>
             <a:r>
-              <a:t>Built to Prevent Gaming the System</a:t>
-            </a:r>
-          </a:p>
-        </p:txBody>
-      </p:sp>
-      <p:sp>
-        <p:nvSpPr>
-          <p:cNvPr id="5" name="TextBox 4"/>
-          <p:cNvSpPr txBox="1"/>
-          <p:nvPr/>
-        </p:nvSpPr>
-        <p:spPr>
-          <a:xfrm>
-            <a:off x="731520" y="1463040"/>
-            <a:ext cx="10058400" cy="457200"/>
+              <a:t>What's Next for LOOP</a:t>
+            </a:r>
+          </a:p>
+        </p:txBody>
+      </p:sp>
+      <p:sp>
+        <p:nvSpPr>
+          <p:cNvPr id="5" name="Oval 4"/>
+          <p:cNvSpPr/>
+          <p:nvPr/>
+        </p:nvSpPr>
+        <p:spPr>
+          <a:xfrm>
+            <a:off x="731520" y="1828800"/>
+            <a:ext cx="731520" cy="731520"/>
+          </a:xfrm>
+          <a:prstGeom prst="ellipse">
+            <a:avLst/>
+          </a:prstGeom>
+          <a:solidFill>
+            <a:srgbClr val="22C55E"/>
+          </a:solidFill>
+          <a:ln w="25400">
+            <a:solidFill>
+              <a:srgbClr val="22C55E"/>
+            </a:solidFill>
+          </a:ln>
+        </p:spPr>
+        <p:style>
+          <a:lnRef idx="1">
+            <a:schemeClr val="accent1"/>
+          </a:lnRef>
+          <a:fillRef idx="3">
+            <a:schemeClr val="accent1"/>
+          </a:fillRef>
+          <a:effectRef idx="2">
+            <a:schemeClr val="accent1"/>
+          </a:effectRef>
+          <a:fontRef idx="minor">
+            <a:schemeClr val="lt1"/>
+          </a:fontRef>
+        </p:style>
+        <p:txBody>
+          <a:bodyPr rtlCol="0" anchor="ctr"/>
+          <a:lstStyle/>
+          <a:p>
+            <a:pPr algn="ctr"/>
+            <a:endParaRPr/>
+          </a:p>
+        </p:txBody>
+      </p:sp>
+      <p:sp>
+        <p:nvSpPr>
+          <p:cNvPr id="6" name="TextBox 5"/>
+          <p:cNvSpPr txBox="1"/>
+          <p:nvPr/>
+        </p:nvSpPr>
+        <p:spPr>
+          <a:xfrm>
+            <a:off x="731520" y="1965960"/>
+            <a:ext cx="731520" cy="457200"/>
+          </a:xfrm>
+          <a:prstGeom prst="rect">
+            <a:avLst/>
+          </a:prstGeom>
+          <a:noFill/>
+        </p:spPr>
+        <p:txBody>
+          <a:bodyPr wrap="none">
+            <a:spAutoFit/>
+          </a:bodyPr>
+          <a:lstStyle/>
+          <a:p>
+            <a:pPr algn="ctr">
+              <a:defRPr sz="1100" b="1">
+                <a:solidFill>
+                  <a:srgbClr val="080B0F"/>
+                </a:solidFill>
+                <a:latin typeface="Segoe UI"/>
+              </a:defRPr>
+            </a:pPr>
+            <a:r>
+              <a:t>Now</a:t>
+            </a:r>
+          </a:p>
+        </p:txBody>
+      </p:sp>
+      <p:sp>
+        <p:nvSpPr>
+          <p:cNvPr id="7" name="Rectangle 6"/>
+          <p:cNvSpPr/>
+          <p:nvPr/>
+        </p:nvSpPr>
+        <p:spPr>
+          <a:xfrm>
+            <a:off x="1554480" y="2148840"/>
+            <a:ext cx="2834640" cy="25400"/>
+          </a:xfrm>
+          <a:prstGeom prst="rect">
+            <a:avLst/>
+          </a:prstGeom>
+          <a:solidFill>
+            <a:srgbClr val="22C55E">
+              <a:lumMod val="70000"/>
+              <a:lumOff val="30000"/>
+            </a:srgbClr>
+          </a:solidFill>
+          <a:ln>
+            <a:noFill/>
+          </a:ln>
+        </p:spPr>
+        <p:style>
+          <a:lnRef idx="1">
+            <a:schemeClr val="accent1"/>
+          </a:lnRef>
+          <a:fillRef idx="3">
+            <a:schemeClr val="accent1"/>
+          </a:fillRef>
+          <a:effectRef idx="2">
+            <a:schemeClr val="accent1"/>
+          </a:effectRef>
+          <a:fontRef idx="minor">
+            <a:schemeClr val="lt1"/>
+          </a:fontRef>
+        </p:style>
+        <p:txBody>
+          <a:bodyPr rtlCol="0" anchor="ctr"/>
+          <a:lstStyle/>
+          <a:p>
+            <a:pPr algn="ctr"/>
+            <a:endParaRPr/>
+          </a:p>
+        </p:txBody>
+      </p:sp>
+      <p:sp>
+        <p:nvSpPr>
+          <p:cNvPr id="8" name="TextBox 7"/>
+          <p:cNvSpPr txBox="1"/>
+          <p:nvPr/>
+        </p:nvSpPr>
+        <p:spPr>
+          <a:xfrm>
+            <a:off x="731520" y="2651760"/>
+            <a:ext cx="3474720" cy="457200"/>
           </a:xfrm>
           <a:prstGeom prst="rect">
             <a:avLst/>
@@ -6206,7 +6859,87 @@
           <a:lstStyle/>
           <a:p>
             <a:pPr algn="l">
-              <a:defRPr sz="1600" b="0">
+              <a:defRPr sz="2000" b="1">
+                <a:solidFill>
+                  <a:srgbClr val="F1F5F9"/>
+                </a:solidFill>
+                <a:latin typeface="Segoe UI"/>
+              </a:defRPr>
+            </a:pPr>
+            <a:r>
+              <a:t>Core Platform</a:t>
+            </a:r>
+          </a:p>
+        </p:txBody>
+      </p:sp>
+      <p:sp>
+        <p:nvSpPr>
+          <p:cNvPr id="9" name="Oval 8"/>
+          <p:cNvSpPr/>
+          <p:nvPr/>
+        </p:nvSpPr>
+        <p:spPr>
+          <a:xfrm>
+            <a:off x="731520" y="3200400"/>
+            <a:ext cx="109728" cy="109728"/>
+          </a:xfrm>
+          <a:prstGeom prst="ellipse">
+            <a:avLst/>
+          </a:prstGeom>
+          <a:solidFill>
+            <a:srgbClr val="22C55E"/>
+          </a:solidFill>
+          <a:ln>
+            <a:noFill/>
+          </a:ln>
+        </p:spPr>
+        <p:style>
+          <a:lnRef idx="1">
+            <a:schemeClr val="accent1"/>
+          </a:lnRef>
+          <a:fillRef idx="3">
+            <a:schemeClr val="accent1"/>
+          </a:fillRef>
+          <a:effectRef idx="2">
+            <a:schemeClr val="accent1"/>
+          </a:effectRef>
+          <a:fontRef idx="minor">
+            <a:schemeClr val="lt1"/>
+          </a:fontRef>
+        </p:style>
+        <p:txBody>
+          <a:bodyPr rtlCol="0" anchor="ctr"/>
+          <a:lstStyle/>
+          <a:p>
+            <a:pPr algn="ctr"/>
+            <a:endParaRPr/>
+          </a:p>
+        </p:txBody>
+      </p:sp>
+      <p:sp>
+        <p:nvSpPr>
+          <p:cNvPr id="10" name="TextBox 9"/>
+          <p:cNvSpPr txBox="1"/>
+          <p:nvPr/>
+        </p:nvSpPr>
+        <p:spPr>
+          <a:xfrm>
+            <a:off x="960120" y="3108960"/>
+            <a:ext cx="3200400" cy="457200"/>
+          </a:xfrm>
+          <a:prstGeom prst="rect">
+            <a:avLst/>
+          </a:prstGeom>
+          <a:noFill/>
+        </p:spPr>
+        <p:txBody>
+          <a:bodyPr wrap="none">
+            <a:spAutoFit/>
+          </a:bodyPr>
+          <a:lstStyle/>
+          <a:p>
+            <a:pPr algn="l">
+              <a:defRPr sz="1300" b="0">
                 <a:solidFill>
                   <a:srgbClr val="94A3B8"/>
                 </a:solidFill>
@@ -6214,23 +6947,263 @@
               </a:defRPr>
             </a:pPr>
             <a:r>
-              <a:t>Leaderboards are only meaningful if they cannot be cheated</a:t>
-            </a:r>
-          </a:p>
-        </p:txBody>
-      </p:sp>
-      <p:sp>
-        <p:nvSpPr>
-          <p:cNvPr id="6" name="Rounded Rectangle 5"/>
+              <a:t>CSV parsing &amp; AI classification</a:t>
+            </a:r>
+          </a:p>
+        </p:txBody>
+      </p:sp>
+      <p:sp>
+        <p:nvSpPr>
+          <p:cNvPr id="11" name="Oval 10"/>
           <p:cNvSpPr/>
           <p:nvPr/>
         </p:nvSpPr>
         <p:spPr>
           <a:xfrm>
-            <a:off x="731520" y="2103120"/>
-            <a:ext cx="5212080" cy="2011680"/>
-          </a:xfrm>
-          <a:prstGeom prst="roundRect">
+            <a:off x="731520" y="3703320"/>
+            <a:ext cx="109728" cy="109728"/>
+          </a:xfrm>
+          <a:prstGeom prst="ellipse">
+            <a:avLst/>
+          </a:prstGeom>
+          <a:solidFill>
+            <a:srgbClr val="22C55E"/>
+          </a:solidFill>
+          <a:ln>
+            <a:noFill/>
+          </a:ln>
+        </p:spPr>
+        <p:style>
+          <a:lnRef idx="1">
+            <a:schemeClr val="accent1"/>
+          </a:lnRef>
+          <a:fillRef idx="3">
+            <a:schemeClr val="accent1"/>
+          </a:fillRef>
+          <a:effectRef idx="2">
+            <a:schemeClr val="accent1"/>
+          </a:effectRef>
+          <a:fontRef idx="minor">
+            <a:schemeClr val="lt1"/>
+          </a:fontRef>
+        </p:style>
+        <p:txBody>
+          <a:bodyPr rtlCol="0" anchor="ctr"/>
+          <a:lstStyle/>
+          <a:p>
+            <a:pPr algn="ctr"/>
+            <a:endParaRPr/>
+          </a:p>
+        </p:txBody>
+      </p:sp>
+      <p:sp>
+        <p:nvSpPr>
+          <p:cNvPr id="12" name="TextBox 11"/>
+          <p:cNvSpPr txBox="1"/>
+          <p:nvPr/>
+        </p:nvSpPr>
+        <p:spPr>
+          <a:xfrm>
+            <a:off x="960120" y="3611880"/>
+            <a:ext cx="3200400" cy="457200"/>
+          </a:xfrm>
+          <a:prstGeom prst="rect">
+            <a:avLst/>
+          </a:prstGeom>
+          <a:noFill/>
+        </p:spPr>
+        <p:txBody>
+          <a:bodyPr wrap="none">
+            <a:spAutoFit/>
+          </a:bodyPr>
+          <a:lstStyle/>
+          <a:p>
+            <a:pPr algn="l">
+              <a:defRPr sz="1300" b="0">
+                <a:solidFill>
+                  <a:srgbClr val="94A3B8"/>
+                </a:solidFill>
+                <a:latin typeface="Segoe UI"/>
+              </a:defRPr>
+            </a:pPr>
+            <a:r>
+              <a:t>Loop Score &amp; personalities</a:t>
+            </a:r>
+          </a:p>
+        </p:txBody>
+      </p:sp>
+      <p:sp>
+        <p:nvSpPr>
+          <p:cNvPr id="13" name="Oval 12"/>
+          <p:cNvSpPr/>
+          <p:nvPr/>
+        </p:nvSpPr>
+        <p:spPr>
+          <a:xfrm>
+            <a:off x="731520" y="4206240"/>
+            <a:ext cx="109728" cy="109728"/>
+          </a:xfrm>
+          <a:prstGeom prst="ellipse">
+            <a:avLst/>
+          </a:prstGeom>
+          <a:solidFill>
+            <a:srgbClr val="22C55E"/>
+          </a:solidFill>
+          <a:ln>
+            <a:noFill/>
+          </a:ln>
+        </p:spPr>
+        <p:style>
+          <a:lnRef idx="1">
+            <a:schemeClr val="accent1"/>
+          </a:lnRef>
+          <a:fillRef idx="3">
+            <a:schemeClr val="accent1"/>
+          </a:fillRef>
+          <a:effectRef idx="2">
+            <a:schemeClr val="accent1"/>
+          </a:effectRef>
+          <a:fontRef idx="minor">
+            <a:schemeClr val="lt1"/>
+          </a:fontRef>
+        </p:style>
+        <p:txBody>
+          <a:bodyPr rtlCol="0" anchor="ctr"/>
+          <a:lstStyle/>
+          <a:p>
+            <a:pPr algn="ctr"/>
+            <a:endParaRPr/>
+          </a:p>
+        </p:txBody>
+      </p:sp>
+      <p:sp>
+        <p:nvSpPr>
+          <p:cNvPr id="14" name="TextBox 13"/>
+          <p:cNvSpPr txBox="1"/>
+          <p:nvPr/>
+        </p:nvSpPr>
+        <p:spPr>
+          <a:xfrm>
+            <a:off x="960120" y="4114800"/>
+            <a:ext cx="3200400" cy="457200"/>
+          </a:xfrm>
+          <a:prstGeom prst="rect">
+            <a:avLst/>
+          </a:prstGeom>
+          <a:noFill/>
+        </p:spPr>
+        <p:txBody>
+          <a:bodyPr wrap="none">
+            <a:spAutoFit/>
+          </a:bodyPr>
+          <a:lstStyle/>
+          <a:p>
+            <a:pPr algn="l">
+              <a:defRPr sz="1300" b="0">
+                <a:solidFill>
+                  <a:srgbClr val="94A3B8"/>
+                </a:solidFill>
+                <a:latin typeface="Segoe UI"/>
+              </a:defRPr>
+            </a:pPr>
+            <a:r>
+              <a:t>City rankings &amp; circles</a:t>
+            </a:r>
+          </a:p>
+        </p:txBody>
+      </p:sp>
+      <p:sp>
+        <p:nvSpPr>
+          <p:cNvPr id="15" name="Oval 14"/>
+          <p:cNvSpPr/>
+          <p:nvPr/>
+        </p:nvSpPr>
+        <p:spPr>
+          <a:xfrm>
+            <a:off x="731520" y="4709160"/>
+            <a:ext cx="109728" cy="109728"/>
+          </a:xfrm>
+          <a:prstGeom prst="ellipse">
+            <a:avLst/>
+          </a:prstGeom>
+          <a:solidFill>
+            <a:srgbClr val="22C55E"/>
+          </a:solidFill>
+          <a:ln>
+            <a:noFill/>
+          </a:ln>
+        </p:spPr>
+        <p:style>
+          <a:lnRef idx="1">
+            <a:schemeClr val="accent1"/>
+          </a:lnRef>
+          <a:fillRef idx="3">
+            <a:schemeClr val="accent1"/>
+          </a:fillRef>
+          <a:effectRef idx="2">
+            <a:schemeClr val="accent1"/>
+          </a:effectRef>
+          <a:fontRef idx="minor">
+            <a:schemeClr val="lt1"/>
+          </a:fontRef>
+        </p:style>
+        <p:txBody>
+          <a:bodyPr rtlCol="0" anchor="ctr"/>
+          <a:lstStyle/>
+          <a:p>
+            <a:pPr algn="ctr"/>
+            <a:endParaRPr/>
+          </a:p>
+        </p:txBody>
+      </p:sp>
+      <p:sp>
+        <p:nvSpPr>
+          <p:cNvPr id="16" name="TextBox 15"/>
+          <p:cNvSpPr txBox="1"/>
+          <p:nvPr/>
+        </p:nvSpPr>
+        <p:spPr>
+          <a:xfrm>
+            <a:off x="960120" y="4617720"/>
+            <a:ext cx="3200400" cy="457200"/>
+          </a:xfrm>
+          <a:prstGeom prst="rect">
+            <a:avLst/>
+          </a:prstGeom>
+          <a:noFill/>
+        </p:spPr>
+        <p:txBody>
+          <a:bodyPr wrap="none">
+            <a:spAutoFit/>
+          </a:bodyPr>
+          <a:lstStyle/>
+          <a:p>
+            <a:pPr algn="l">
+              <a:defRPr sz="1300" b="0">
+                <a:solidFill>
+                  <a:srgbClr val="94A3B8"/>
+                </a:solidFill>
+                <a:latin typeface="Segoe UI"/>
+              </a:defRPr>
+            </a:pPr>
+            <a:r>
+              <a:t>Manual expense logging</a:t>
+            </a:r>
+          </a:p>
+        </p:txBody>
+      </p:sp>
+      <p:sp>
+        <p:nvSpPr>
+          <p:cNvPr id="17" name="Oval 16"/>
+          <p:cNvSpPr/>
+          <p:nvPr/>
+        </p:nvSpPr>
+        <p:spPr>
+          <a:xfrm>
+            <a:off x="4480559" y="1828800"/>
+            <a:ext cx="731520" cy="731520"/>
+          </a:xfrm>
+          <a:prstGeom prst="ellipse">
             <a:avLst/>
           </a:prstGeom>
           <a:solidFill>
@@ -6261,27 +7234,64 @@
           <a:lstStyle/>
           <a:p>
             <a:pPr algn="ctr"/>
-          </a:p>
-        </p:txBody>
-      </p:sp>
-      <p:sp>
-        <p:nvSpPr>
-          <p:cNvPr id="7" name="Hexagon 6"/>
+            <a:endParaRPr/>
+          </a:p>
+        </p:txBody>
+      </p:sp>
+      <p:sp>
+        <p:nvSpPr>
+          <p:cNvPr id="18" name="TextBox 17"/>
+          <p:cNvSpPr txBox="1"/>
+          <p:nvPr/>
+        </p:nvSpPr>
+        <p:spPr>
+          <a:xfrm>
+            <a:off x="4480559" y="1965960"/>
+            <a:ext cx="731520" cy="457200"/>
+          </a:xfrm>
+          <a:prstGeom prst="rect">
+            <a:avLst/>
+          </a:prstGeom>
+          <a:noFill/>
+        </p:spPr>
+        <p:txBody>
+          <a:bodyPr wrap="none">
+            <a:spAutoFit/>
+          </a:bodyPr>
+          <a:lstStyle/>
+          <a:p>
+            <a:pPr algn="ctr">
+              <a:defRPr sz="1100" b="1">
+                <a:solidFill>
+                  <a:srgbClr val="22C55E"/>
+                </a:solidFill>
+                <a:latin typeface="Segoe UI"/>
+              </a:defRPr>
+            </a:pPr>
+            <a:r>
+              <a:t>Next</a:t>
+            </a:r>
+          </a:p>
+        </p:txBody>
+      </p:sp>
+      <p:sp>
+        <p:nvSpPr>
+          <p:cNvPr id="19" name="Rectangle 18"/>
           <p:cNvSpPr/>
           <p:nvPr/>
         </p:nvSpPr>
         <p:spPr>
           <a:xfrm>
-            <a:off x="1005840" y="2377440"/>
-            <a:ext cx="548640" cy="548640"/>
-          </a:xfrm>
-          <a:prstGeom prst="hexagon">
+            <a:off x="5303519" y="2148840"/>
+            <a:ext cx="2834640" cy="25400"/>
+          </a:xfrm>
+          <a:prstGeom prst="rect">
             <a:avLst/>
           </a:prstGeom>
           <a:solidFill>
             <a:srgbClr val="22C55E">
-              <a:lumMod val="30000"/>
-              <a:lumOff val="70000"/>
+              <a:lumMod val="70000"/>
+              <a:lumOff val="30000"/>
             </a:srgbClr>
           </a:solidFill>
           <a:ln>
@@ -6307,99 +7317,108 @@
           <a:lstStyle/>
           <a:p>
             <a:pPr algn="ctr"/>
-          </a:p>
-        </p:txBody>
-      </p:sp>
-      <p:sp>
-        <p:nvSpPr>
-          <p:cNvPr id="8" name="TextBox 7"/>
-          <p:cNvSpPr txBox="1"/>
-          <p:nvPr/>
-        </p:nvSpPr>
-        <p:spPr>
-          <a:xfrm>
-            <a:off x="1005840" y="2468880"/>
-            <a:ext cx="548640" cy="457200"/>
-          </a:xfrm>
-          <a:prstGeom prst="rect">
-            <a:avLst/>
-          </a:prstGeom>
-          <a:noFill/>
-        </p:spPr>
-        <p:txBody>
-          <a:bodyPr wrap="none">
-            <a:spAutoFit/>
-          </a:bodyPr>
-          <a:lstStyle/>
-          <a:p>
-            <a:pPr algn="ctr">
+            <a:endParaRPr/>
+          </a:p>
+        </p:txBody>
+      </p:sp>
+      <p:sp>
+        <p:nvSpPr>
+          <p:cNvPr id="20" name="TextBox 19"/>
+          <p:cNvSpPr txBox="1"/>
+          <p:nvPr/>
+        </p:nvSpPr>
+        <p:spPr>
+          <a:xfrm>
+            <a:off x="4480559" y="2651760"/>
+            <a:ext cx="3474720" cy="457200"/>
+          </a:xfrm>
+          <a:prstGeom prst="rect">
+            <a:avLst/>
+          </a:prstGeom>
+          <a:noFill/>
+        </p:spPr>
+        <p:txBody>
+          <a:bodyPr wrap="none">
+            <a:spAutoFit/>
+          </a:bodyPr>
+          <a:lstStyle/>
+          <a:p>
+            <a:pPr algn="l">
               <a:defRPr sz="2000" b="1">
                 <a:solidFill>
-                  <a:srgbClr val="22C55E"/>
-                </a:solidFill>
-                <a:latin typeface="Segoe UI"/>
-              </a:defRPr>
-            </a:pPr>
-            <a:r>
-              <a:t>#</a:t>
-            </a:r>
-          </a:p>
-        </p:txBody>
-      </p:sp>
-      <p:sp>
-        <p:nvSpPr>
-          <p:cNvPr id="9" name="TextBox 8"/>
-          <p:cNvSpPr txBox="1"/>
-          <p:nvPr/>
-        </p:nvSpPr>
-        <p:spPr>
-          <a:xfrm>
-            <a:off x="1737360" y="2331720"/>
-            <a:ext cx="3931920" cy="457200"/>
-          </a:xfrm>
-          <a:prstGeom prst="rect">
-            <a:avLst/>
-          </a:prstGeom>
-          <a:noFill/>
-        </p:spPr>
-        <p:txBody>
-          <a:bodyPr wrap="none">
-            <a:spAutoFit/>
-          </a:bodyPr>
-          <a:lstStyle/>
-          <a:p>
-            <a:pPr algn="l">
-              <a:defRPr sz="1800" b="1">
-                <a:solidFill>
                   <a:srgbClr val="F1F5F9"/>
                 </a:solidFill>
                 <a:latin typeface="Segoe UI"/>
               </a:defRPr>
             </a:pPr>
             <a:r>
-              <a:t>SHA-256 CSV Hash Verification</a:t>
-            </a:r>
-          </a:p>
-        </p:txBody>
-      </p:sp>
-      <p:sp>
-        <p:nvSpPr>
-          <p:cNvPr id="10" name="TextBox 9"/>
-          <p:cNvSpPr txBox="1"/>
-          <p:nvPr/>
-        </p:nvSpPr>
-        <p:spPr>
-          <a:xfrm>
-            <a:off x="1005840" y="3017520"/>
-            <a:ext cx="4663440" cy="1005840"/>
-          </a:xfrm>
-          <a:prstGeom prst="rect">
-            <a:avLst/>
-          </a:prstGeom>
-          <a:noFill/>
-        </p:spPr>
-        <p:txBody>
-          <a:bodyPr wrap="square">
+              <a:t>Enhancements</a:t>
+            </a:r>
+          </a:p>
+        </p:txBody>
+      </p:sp>
+      <p:sp>
+        <p:nvSpPr>
+          <p:cNvPr id="21" name="Oval 20"/>
+          <p:cNvSpPr/>
+          <p:nvPr/>
+        </p:nvSpPr>
+        <p:spPr>
+          <a:xfrm>
+            <a:off x="4480559" y="3200400"/>
+            <a:ext cx="109728" cy="109728"/>
+          </a:xfrm>
+          <a:prstGeom prst="ellipse">
+            <a:avLst/>
+          </a:prstGeom>
+          <a:solidFill>
+            <a:srgbClr val="22C55E"/>
+          </a:solidFill>
+          <a:ln>
+            <a:noFill/>
+          </a:ln>
+        </p:spPr>
+        <p:style>
+          <a:lnRef idx="1">
+            <a:schemeClr val="accent1"/>
+          </a:lnRef>
+          <a:fillRef idx="3">
+            <a:schemeClr val="accent1"/>
+          </a:fillRef>
+          <a:effectRef idx="2">
+            <a:schemeClr val="accent1"/>
+          </a:effectRef>
+          <a:fontRef idx="minor">
+            <a:schemeClr val="lt1"/>
+          </a:fontRef>
+        </p:style>
+        <p:txBody>
+          <a:bodyPr rtlCol="0" anchor="ctr"/>
+          <a:lstStyle/>
+          <a:p>
+            <a:pPr algn="ctr"/>
+            <a:endParaRPr/>
+          </a:p>
+        </p:txBody>
+      </p:sp>
+      <p:sp>
+        <p:nvSpPr>
+          <p:cNvPr id="22" name="TextBox 21"/>
+          <p:cNvSpPr txBox="1"/>
+          <p:nvPr/>
+        </p:nvSpPr>
+        <p:spPr>
+          <a:xfrm>
+            <a:off x="4709159" y="3108960"/>
+            <a:ext cx="3200400" cy="457200"/>
+          </a:xfrm>
+          <a:prstGeom prst="rect">
+            <a:avLst/>
+          </a:prstGeom>
+          <a:noFill/>
+        </p:spPr>
+        <p:txBody>
+          <a:bodyPr wrap="none">
             <a:spAutoFit/>
           </a:bodyPr>
           <a:lstStyle/>
@@ -6413,23 +7432,263 @@
               </a:defRPr>
             </a:pPr>
             <a:r>
-              <a:t>Every uploaded CSV is hashed using SHA-256. If a user tries to re-upload the same file (even with a different filename), the system detects it and blocks the upload. This prevents users from inflating their scores by uploading the same transactions multiple times.</a:t>
-            </a:r>
-          </a:p>
-        </p:txBody>
-      </p:sp>
-      <p:sp>
-        <p:nvSpPr>
-          <p:cNvPr id="11" name="Rounded Rectangle 10"/>
+              <a:t>Bank API integration (no CSV needed)</a:t>
+            </a:r>
+          </a:p>
+        </p:txBody>
+      </p:sp>
+      <p:sp>
+        <p:nvSpPr>
+          <p:cNvPr id="23" name="Oval 22"/>
           <p:cNvSpPr/>
           <p:nvPr/>
         </p:nvSpPr>
         <p:spPr>
           <a:xfrm>
-            <a:off x="6217920" y="2103120"/>
-            <a:ext cx="5212080" cy="2011680"/>
-          </a:xfrm>
-          <a:prstGeom prst="roundRect">
+            <a:off x="4480559" y="3703320"/>
+            <a:ext cx="109728" cy="109728"/>
+          </a:xfrm>
+          <a:prstGeom prst="ellipse">
+            <a:avLst/>
+          </a:prstGeom>
+          <a:solidFill>
+            <a:srgbClr val="22C55E"/>
+          </a:solidFill>
+          <a:ln>
+            <a:noFill/>
+          </a:ln>
+        </p:spPr>
+        <p:style>
+          <a:lnRef idx="1">
+            <a:schemeClr val="accent1"/>
+          </a:lnRef>
+          <a:fillRef idx="3">
+            <a:schemeClr val="accent1"/>
+          </a:fillRef>
+          <a:effectRef idx="2">
+            <a:schemeClr val="accent1"/>
+          </a:effectRef>
+          <a:fontRef idx="minor">
+            <a:schemeClr val="lt1"/>
+          </a:fontRef>
+        </p:style>
+        <p:txBody>
+          <a:bodyPr rtlCol="0" anchor="ctr"/>
+          <a:lstStyle/>
+          <a:p>
+            <a:pPr algn="ctr"/>
+            <a:endParaRPr/>
+          </a:p>
+        </p:txBody>
+      </p:sp>
+      <p:sp>
+        <p:nvSpPr>
+          <p:cNvPr id="24" name="TextBox 23"/>
+          <p:cNvSpPr txBox="1"/>
+          <p:nvPr/>
+        </p:nvSpPr>
+        <p:spPr>
+          <a:xfrm>
+            <a:off x="4709159" y="3611880"/>
+            <a:ext cx="3200400" cy="457200"/>
+          </a:xfrm>
+          <a:prstGeom prst="rect">
+            <a:avLst/>
+          </a:prstGeom>
+          <a:noFill/>
+        </p:spPr>
+        <p:txBody>
+          <a:bodyPr wrap="none">
+            <a:spAutoFit/>
+          </a:bodyPr>
+          <a:lstStyle/>
+          <a:p>
+            <a:pPr algn="l">
+              <a:defRPr sz="1300" b="0">
+                <a:solidFill>
+                  <a:srgbClr val="94A3B8"/>
+                </a:solidFill>
+                <a:latin typeface="Segoe UI"/>
+              </a:defRPr>
+            </a:pPr>
+            <a:r>
+              <a:t>Carbon offset marketplace</a:t>
+            </a:r>
+          </a:p>
+        </p:txBody>
+      </p:sp>
+      <p:sp>
+        <p:nvSpPr>
+          <p:cNvPr id="25" name="Oval 24"/>
+          <p:cNvSpPr/>
+          <p:nvPr/>
+        </p:nvSpPr>
+        <p:spPr>
+          <a:xfrm>
+            <a:off x="4480559" y="4206240"/>
+            <a:ext cx="109728" cy="109728"/>
+          </a:xfrm>
+          <a:prstGeom prst="ellipse">
+            <a:avLst/>
+          </a:prstGeom>
+          <a:solidFill>
+            <a:srgbClr val="22C55E"/>
+          </a:solidFill>
+          <a:ln>
+            <a:noFill/>
+          </a:ln>
+        </p:spPr>
+        <p:style>
+          <a:lnRef idx="1">
+            <a:schemeClr val="accent1"/>
+          </a:lnRef>
+          <a:fillRef idx="3">
+            <a:schemeClr val="accent1"/>
+          </a:fillRef>
+          <a:effectRef idx="2">
+            <a:schemeClr val="accent1"/>
+          </a:effectRef>
+          <a:fontRef idx="minor">
+            <a:schemeClr val="lt1"/>
+          </a:fontRef>
+        </p:style>
+        <p:txBody>
+          <a:bodyPr rtlCol="0" anchor="ctr"/>
+          <a:lstStyle/>
+          <a:p>
+            <a:pPr algn="ctr"/>
+            <a:endParaRPr/>
+          </a:p>
+        </p:txBody>
+      </p:sp>
+      <p:sp>
+        <p:nvSpPr>
+          <p:cNvPr id="26" name="TextBox 25"/>
+          <p:cNvSpPr txBox="1"/>
+          <p:nvPr/>
+        </p:nvSpPr>
+        <p:spPr>
+          <a:xfrm>
+            <a:off x="4709159" y="4114800"/>
+            <a:ext cx="3200400" cy="457200"/>
+          </a:xfrm>
+          <a:prstGeom prst="rect">
+            <a:avLst/>
+          </a:prstGeom>
+          <a:noFill/>
+        </p:spPr>
+        <p:txBody>
+          <a:bodyPr wrap="none">
+            <a:spAutoFit/>
+          </a:bodyPr>
+          <a:lstStyle/>
+          <a:p>
+            <a:pPr algn="l">
+              <a:defRPr sz="1300" b="0">
+                <a:solidFill>
+                  <a:srgbClr val="94A3B8"/>
+                </a:solidFill>
+                <a:latin typeface="Segoe UI"/>
+              </a:defRPr>
+            </a:pPr>
+            <a:r>
+              <a:t>Corporate team features</a:t>
+            </a:r>
+          </a:p>
+        </p:txBody>
+      </p:sp>
+      <p:sp>
+        <p:nvSpPr>
+          <p:cNvPr id="27" name="Oval 26"/>
+          <p:cNvSpPr/>
+          <p:nvPr/>
+        </p:nvSpPr>
+        <p:spPr>
+          <a:xfrm>
+            <a:off x="4480559" y="4709160"/>
+            <a:ext cx="109728" cy="109728"/>
+          </a:xfrm>
+          <a:prstGeom prst="ellipse">
+            <a:avLst/>
+          </a:prstGeom>
+          <a:solidFill>
+            <a:srgbClr val="22C55E"/>
+          </a:solidFill>
+          <a:ln>
+            <a:noFill/>
+          </a:ln>
+        </p:spPr>
+        <p:style>
+          <a:lnRef idx="1">
+            <a:schemeClr val="accent1"/>
+          </a:lnRef>
+          <a:fillRef idx="3">
+            <a:schemeClr val="accent1"/>
+          </a:fillRef>
+          <a:effectRef idx="2">
+            <a:schemeClr val="accent1"/>
+          </a:effectRef>
+          <a:fontRef idx="minor">
+            <a:schemeClr val="lt1"/>
+          </a:fontRef>
+        </p:style>
+        <p:txBody>
+          <a:bodyPr rtlCol="0" anchor="ctr"/>
+          <a:lstStyle/>
+          <a:p>
+            <a:pPr algn="ctr"/>
+            <a:endParaRPr/>
+          </a:p>
+        </p:txBody>
+      </p:sp>
+      <p:sp>
+        <p:nvSpPr>
+          <p:cNvPr id="28" name="TextBox 27"/>
+          <p:cNvSpPr txBox="1"/>
+          <p:nvPr/>
+        </p:nvSpPr>
+        <p:spPr>
+          <a:xfrm>
+            <a:off x="4709159" y="4617720"/>
+            <a:ext cx="3200400" cy="457200"/>
+          </a:xfrm>
+          <a:prstGeom prst="rect">
+            <a:avLst/>
+          </a:prstGeom>
+          <a:noFill/>
+        </p:spPr>
+        <p:txBody>
+          <a:bodyPr wrap="none">
+            <a:spAutoFit/>
+          </a:bodyPr>
+          <a:lstStyle/>
+          <a:p>
+            <a:pPr algn="l">
+              <a:defRPr sz="1300" b="0">
+                <a:solidFill>
+                  <a:srgbClr val="94A3B8"/>
+                </a:solidFill>
+                <a:latin typeface="Segoe UI"/>
+              </a:defRPr>
+            </a:pPr>
+            <a:r>
+              <a:t>Mobile app (iOS/Android)</a:t>
+            </a:r>
+          </a:p>
+        </p:txBody>
+      </p:sp>
+      <p:sp>
+        <p:nvSpPr>
+          <p:cNvPr id="29" name="Oval 28"/>
+          <p:cNvSpPr/>
+          <p:nvPr/>
+        </p:nvSpPr>
+        <p:spPr>
+          <a:xfrm>
+            <a:off x="8229600" y="1828800"/>
+            <a:ext cx="731520" cy="731520"/>
+          </a:xfrm>
+          <a:prstGeom prst="ellipse">
             <a:avLst/>
           </a:prstGeom>
           <a:solidFill>
@@ -6437,7 +7696,7 @@
           </a:solidFill>
           <a:ln w="25400">
             <a:solidFill>
-              <a:srgbClr val="8B5CF6"/>
+              <a:srgbClr val="22C55E"/>
             </a:solidFill>
           </a:ln>
         </p:spPr>
@@ -6460,28 +7719,98 @@
           <a:lstStyle/>
           <a:p>
             <a:pPr algn="ctr"/>
-          </a:p>
-        </p:txBody>
-      </p:sp>
-      <p:sp>
-        <p:nvSpPr>
-          <p:cNvPr id="12" name="Oval 11"/>
+            <a:endParaRPr/>
+          </a:p>
+        </p:txBody>
+      </p:sp>
+      <p:sp>
+        <p:nvSpPr>
+          <p:cNvPr id="30" name="TextBox 29"/>
+          <p:cNvSpPr txBox="1"/>
+          <p:nvPr/>
+        </p:nvSpPr>
+        <p:spPr>
+          <a:xfrm>
+            <a:off x="8229600" y="1965960"/>
+            <a:ext cx="731520" cy="457200"/>
+          </a:xfrm>
+          <a:prstGeom prst="rect">
+            <a:avLst/>
+          </a:prstGeom>
+          <a:noFill/>
+        </p:spPr>
+        <p:txBody>
+          <a:bodyPr wrap="none">
+            <a:spAutoFit/>
+          </a:bodyPr>
+          <a:lstStyle/>
+          <a:p>
+            <a:pPr algn="ctr">
+              <a:defRPr sz="1100" b="1">
+                <a:solidFill>
+                  <a:srgbClr val="22C55E"/>
+                </a:solidFill>
+                <a:latin typeface="Segoe UI"/>
+              </a:defRPr>
+            </a:pPr>
+            <a:r>
+              <a:t>Future</a:t>
+            </a:r>
+          </a:p>
+        </p:txBody>
+      </p:sp>
+      <p:sp>
+        <p:nvSpPr>
+          <p:cNvPr id="31" name="TextBox 30"/>
+          <p:cNvSpPr txBox="1"/>
+          <p:nvPr/>
+        </p:nvSpPr>
+        <p:spPr>
+          <a:xfrm>
+            <a:off x="8229600" y="2651760"/>
+            <a:ext cx="3474720" cy="457200"/>
+          </a:xfrm>
+          <a:prstGeom prst="rect">
+            <a:avLst/>
+          </a:prstGeom>
+          <a:noFill/>
+        </p:spPr>
+        <p:txBody>
+          <a:bodyPr wrap="none">
+            <a:spAutoFit/>
+          </a:bodyPr>
+          <a:lstStyle/>
+          <a:p>
+            <a:pPr algn="l">
+              <a:defRPr sz="2000" b="1">
+                <a:solidFill>
+                  <a:srgbClr val="F1F5F9"/>
+                </a:solidFill>
+                <a:latin typeface="Segoe UI"/>
+              </a:defRPr>
+            </a:pPr>
+            <a:r>
+              <a:t>Scale</a:t>
+            </a:r>
+          </a:p>
+        </p:txBody>
+      </p:sp>
+      <p:sp>
+        <p:nvSpPr>
+          <p:cNvPr id="32" name="Oval 31"/>
           <p:cNvSpPr/>
           <p:nvPr/>
         </p:nvSpPr>
         <p:spPr>
           <a:xfrm>
-            <a:off x="6492240" y="2377440"/>
-            <a:ext cx="548640" cy="548640"/>
+            <a:off x="8229600" y="3200400"/>
+            <a:ext cx="109728" cy="109728"/>
           </a:xfrm>
           <a:prstGeom prst="ellipse">
             <a:avLst/>
           </a:prstGeom>
           <a:solidFill>
-            <a:srgbClr val="8B5CF6">
-              <a:lumMod val="30000"/>
-              <a:lumOff val="70000"/>
-            </a:srgbClr>
+            <a:srgbClr val="22C55E"/>
           </a:solidFill>
           <a:ln>
             <a:noFill/>
@@ -6506,99 +7835,28 @@
           <a:lstStyle/>
           <a:p>
             <a:pPr algn="ctr"/>
-          </a:p>
-        </p:txBody>
-      </p:sp>
-      <p:sp>
-        <p:nvSpPr>
-          <p:cNvPr id="13" name="TextBox 12"/>
-          <p:cNvSpPr txBox="1"/>
-          <p:nvPr/>
-        </p:nvSpPr>
-        <p:spPr>
-          <a:xfrm>
-            <a:off x="6492240" y="2468880"/>
-            <a:ext cx="548640" cy="457200"/>
-          </a:xfrm>
-          <a:prstGeom prst="rect">
-            <a:avLst/>
-          </a:prstGeom>
-          <a:noFill/>
-        </p:spPr>
-        <p:txBody>
-          <a:bodyPr wrap="none">
-            <a:spAutoFit/>
-          </a:bodyPr>
-          <a:lstStyle/>
-          <a:p>
-            <a:pPr algn="ctr">
-              <a:defRPr sz="2000" b="1">
-                <a:solidFill>
-                  <a:srgbClr val="8B5CF6"/>
-                </a:solidFill>
-                <a:latin typeface="Segoe UI"/>
-              </a:defRPr>
-            </a:pPr>
-            <a:r>
-              <a:t>✓</a:t>
-            </a:r>
-          </a:p>
-        </p:txBody>
-      </p:sp>
-      <p:sp>
-        <p:nvSpPr>
-          <p:cNvPr id="14" name="TextBox 13"/>
-          <p:cNvSpPr txBox="1"/>
-          <p:nvPr/>
-        </p:nvSpPr>
-        <p:spPr>
-          <a:xfrm>
-            <a:off x="7223760" y="2331720"/>
-            <a:ext cx="3931920" cy="457200"/>
-          </a:xfrm>
-          <a:prstGeom prst="rect">
-            <a:avLst/>
-          </a:prstGeom>
-          <a:noFill/>
-        </p:spPr>
-        <p:txBody>
-          <a:bodyPr wrap="none">
-            <a:spAutoFit/>
-          </a:bodyPr>
-          <a:lstStyle/>
-          <a:p>
-            <a:pPr algn="l">
-              <a:defRPr sz="1800" b="1">
-                <a:solidFill>
-                  <a:srgbClr val="F1F5F9"/>
-                </a:solidFill>
-                <a:latin typeface="Segoe UI"/>
-              </a:defRPr>
-            </a:pPr>
-            <a:r>
-              <a:t>OTP Email Verification</a:t>
-            </a:r>
-          </a:p>
-        </p:txBody>
-      </p:sp>
-      <p:sp>
-        <p:nvSpPr>
-          <p:cNvPr id="15" name="TextBox 14"/>
-          <p:cNvSpPr txBox="1"/>
-          <p:nvPr/>
-        </p:nvSpPr>
-        <p:spPr>
-          <a:xfrm>
-            <a:off x="6492240" y="3017520"/>
-            <a:ext cx="4663440" cy="1005840"/>
-          </a:xfrm>
-          <a:prstGeom prst="rect">
-            <a:avLst/>
-          </a:prstGeom>
-          <a:noFill/>
-        </p:spPr>
-        <p:txBody>
-          <a:bodyPr wrap="square">
+            <a:endParaRPr/>
+          </a:p>
+        </p:txBody>
+      </p:sp>
+      <p:sp>
+        <p:nvSpPr>
+          <p:cNvPr id="33" name="TextBox 32"/>
+          <p:cNvSpPr txBox="1"/>
+          <p:nvPr/>
+        </p:nvSpPr>
+        <p:spPr>
+          <a:xfrm>
+            <a:off x="8458200" y="3108960"/>
+            <a:ext cx="3200400" cy="457200"/>
+          </a:xfrm>
+          <a:prstGeom prst="rect">
+            <a:avLst/>
+          </a:prstGeom>
+          <a:noFill/>
+        </p:spPr>
+        <p:txBody>
+          <a:bodyPr wrap="none">
             <a:spAutoFit/>
           </a:bodyPr>
           <a:lstStyle/>
@@ -6612,68 +7870,30 @@
               </a:defRPr>
             </a:pPr>
             <a:r>
-              <a:t>All user accounts require email verification via one-time password (OTP). This prevents bot account creation and ensures each user on the leaderboard is a real person with a verified email address.</a:t>
-            </a:r>
-          </a:p>
-        </p:txBody>
-      </p:sp>
-      <p:sp>
-        <p:nvSpPr>
-          <p:cNvPr id="16" name="TextBox 15"/>
-          <p:cNvSpPr txBox="1"/>
-          <p:nvPr/>
-        </p:nvSpPr>
-        <p:spPr>
-          <a:xfrm>
-            <a:off x="731520" y="4389120"/>
-            <a:ext cx="10058400" cy="365760"/>
-          </a:xfrm>
-          <a:prstGeom prst="rect">
-            <a:avLst/>
-          </a:prstGeom>
-          <a:noFill/>
-        </p:spPr>
-        <p:txBody>
-          <a:bodyPr wrap="none">
-            <a:spAutoFit/>
-          </a:bodyPr>
-          <a:lstStyle/>
-          <a:p>
-            <a:pPr algn="l">
-              <a:defRPr sz="1800" b="1">
-                <a:solidFill>
-                  <a:srgbClr val="F1F5F9"/>
-                </a:solidFill>
-                <a:latin typeface="Segoe UI"/>
-              </a:defRPr>
-            </a:pPr>
-            <a:r>
-              <a:t>How It Protects Leaderboard Integrity</a:t>
-            </a:r>
-          </a:p>
-        </p:txBody>
-      </p:sp>
-      <p:sp>
-        <p:nvSpPr>
-          <p:cNvPr id="17" name="Rounded Rectangle 16"/>
+              <a:t>Pan-India expansion</a:t>
+            </a:r>
+          </a:p>
+        </p:txBody>
+      </p:sp>
+      <p:sp>
+        <p:nvSpPr>
+          <p:cNvPr id="34" name="Oval 33"/>
           <p:cNvSpPr/>
           <p:nvPr/>
         </p:nvSpPr>
         <p:spPr>
           <a:xfrm>
-            <a:off x="731520" y="4846320"/>
-            <a:ext cx="3474720" cy="1188720"/>
-          </a:xfrm>
-          <a:prstGeom prst="roundRect">
+            <a:off x="8229600" y="3703320"/>
+            <a:ext cx="109728" cy="109728"/>
+          </a:xfrm>
+          <a:prstGeom prst="ellipse">
             <a:avLst/>
           </a:prstGeom>
           <a:solidFill>
-            <a:srgbClr val="141E2D"/>
+            <a:srgbClr val="22C55E"/>
           </a:solidFill>
-          <a:ln w="12700">
-            <a:solidFill>
-              <a:srgbClr val="1E293B"/>
-            </a:solidFill>
+          <a:ln>
+            <a:noFill/>
           </a:ln>
         </p:spPr>
         <p:style>
@@ -6695,19 +7915,20 @@
           <a:lstStyle/>
           <a:p>
             <a:pPr algn="ctr"/>
-          </a:p>
-        </p:txBody>
-      </p:sp>
-      <p:sp>
-        <p:nvSpPr>
-          <p:cNvPr id="18" name="TextBox 17"/>
-          <p:cNvSpPr txBox="1"/>
-          <p:nvPr/>
-        </p:nvSpPr>
-        <p:spPr>
-          <a:xfrm>
-            <a:off x="914400" y="4983480"/>
-            <a:ext cx="365760" cy="365760"/>
+            <a:endParaRPr/>
+          </a:p>
+        </p:txBody>
+      </p:sp>
+      <p:sp>
+        <p:nvSpPr>
+          <p:cNvPr id="35" name="TextBox 34"/>
+          <p:cNvSpPr txBox="1"/>
+          <p:nvPr/>
+        </p:nvSpPr>
+        <p:spPr>
+          <a:xfrm>
+            <a:off x="8458200" y="3611880"/>
+            <a:ext cx="3200400" cy="457200"/>
           </a:xfrm>
           <a:prstGeom prst="rect">
             <a:avLst/>
@@ -6721,79 +7942,7 @@
           <a:lstStyle/>
           <a:p>
             <a:pPr algn="l">
-              <a:defRPr sz="1600" b="1">
-                <a:solidFill>
-                  <a:srgbClr val="22C55E"/>
-                </a:solidFill>
-                <a:latin typeface="Segoe UI"/>
-              </a:defRPr>
-            </a:pPr>
-            <a:r>
-              <a:t>◉</a:t>
-            </a:r>
-          </a:p>
-        </p:txBody>
-      </p:sp>
-      <p:sp>
-        <p:nvSpPr>
-          <p:cNvPr id="19" name="TextBox 18"/>
-          <p:cNvSpPr txBox="1"/>
-          <p:nvPr/>
-        </p:nvSpPr>
-        <p:spPr>
-          <a:xfrm>
-            <a:off x="1188720" y="4983480"/>
-            <a:ext cx="2834640" cy="365760"/>
-          </a:xfrm>
-          <a:prstGeom prst="rect">
-            <a:avLst/>
-          </a:prstGeom>
-          <a:noFill/>
-        </p:spPr>
-        <p:txBody>
-          <a:bodyPr wrap="none">
-            <a:spAutoFit/>
-          </a:bodyPr>
-          <a:lstStyle/>
-          <a:p>
-            <a:pPr algn="l">
-              <a:defRPr sz="1400" b="1">
-                <a:solidFill>
-                  <a:srgbClr val="F1F5F9"/>
-                </a:solidFill>
-                <a:latin typeface="Segoe UI"/>
-              </a:defRPr>
-            </a:pPr>
-            <a:r>
-              <a:t>Duplicate Detection</a:t>
-            </a:r>
-          </a:p>
-        </p:txBody>
-      </p:sp>
-      <p:sp>
-        <p:nvSpPr>
-          <p:cNvPr id="20" name="TextBox 19"/>
-          <p:cNvSpPr txBox="1"/>
-          <p:nvPr/>
-        </p:nvSpPr>
-        <p:spPr>
-          <a:xfrm>
-            <a:off x="914400" y="5394960"/>
-            <a:ext cx="3108960" cy="548640"/>
-          </a:xfrm>
-          <a:prstGeom prst="rect">
-            <a:avLst/>
-          </a:prstGeom>
-          <a:noFill/>
-        </p:spPr>
-        <p:txBody>
-          <a:bodyPr wrap="square">
-            <a:spAutoFit/>
-          </a:bodyPr>
-          <a:lstStyle/>
-          <a:p>
-            <a:pPr algn="l">
-              <a:defRPr sz="1100" b="0">
+              <a:defRPr sz="1300" b="0">
                 <a:solidFill>
                   <a:srgbClr val="94A3B8"/>
                 </a:solidFill>
@@ -6801,32 +7950,30 @@
               </a:defRPr>
             </a:pPr>
             <a:r>
-              <a:t>Same CSV content = blocked, regardless of filename</a:t>
-            </a:r>
-          </a:p>
-        </p:txBody>
-      </p:sp>
-      <p:sp>
-        <p:nvSpPr>
-          <p:cNvPr id="21" name="Rounded Rectangle 20"/>
+              <a:t>Regional language support</a:t>
+            </a:r>
+          </a:p>
+        </p:txBody>
+      </p:sp>
+      <p:sp>
+        <p:nvSpPr>
+          <p:cNvPr id="36" name="Oval 35"/>
           <p:cNvSpPr/>
           <p:nvPr/>
         </p:nvSpPr>
         <p:spPr>
           <a:xfrm>
-            <a:off x="4480559" y="4846320"/>
-            <a:ext cx="3474720" cy="1188720"/>
-          </a:xfrm>
-          <a:prstGeom prst="roundRect">
+            <a:off x="8229600" y="4206240"/>
+            <a:ext cx="109728" cy="109728"/>
+          </a:xfrm>
+          <a:prstGeom prst="ellipse">
             <a:avLst/>
           </a:prstGeom>
           <a:solidFill>
-            <a:srgbClr val="141E2D"/>
+            <a:srgbClr val="22C55E"/>
           </a:solidFill>
-          <a:ln w="12700">
-            <a:solidFill>
-              <a:srgbClr val="1E293B"/>
-            </a:solidFill>
+          <a:ln>
+            <a:noFill/>
           </a:ln>
         </p:spPr>
         <p:style>
@@ -6848,19 +7995,20 @@
           <a:lstStyle/>
           <a:p>
             <a:pPr algn="ctr"/>
-          </a:p>
-        </p:txBody>
-      </p:sp>
-      <p:sp>
-        <p:nvSpPr>
-          <p:cNvPr id="22" name="TextBox 21"/>
-          <p:cNvSpPr txBox="1"/>
-          <p:nvPr/>
-        </p:nvSpPr>
-        <p:spPr>
-          <a:xfrm>
-            <a:off x="4663439" y="4983480"/>
-            <a:ext cx="365760" cy="365760"/>
+            <a:endParaRPr/>
+          </a:p>
+        </p:txBody>
+      </p:sp>
+      <p:sp>
+        <p:nvSpPr>
+          <p:cNvPr id="37" name="TextBox 36"/>
+          <p:cNvSpPr txBox="1"/>
+          <p:nvPr/>
+        </p:nvSpPr>
+        <p:spPr>
+          <a:xfrm>
+            <a:off x="8458200" y="4114800"/>
+            <a:ext cx="3200400" cy="457200"/>
           </a:xfrm>
           <a:prstGeom prst="rect">
             <a:avLst/>
@@ -6874,79 +8022,7 @@
           <a:lstStyle/>
           <a:p>
             <a:pPr algn="l">
-              <a:defRPr sz="1600" b="1">
-                <a:solidFill>
-                  <a:srgbClr val="22C55E"/>
-                </a:solidFill>
-                <a:latin typeface="Segoe UI"/>
-              </a:defRPr>
-            </a:pPr>
-            <a:r>
-              <a:t>◉</a:t>
-            </a:r>
-          </a:p>
-        </p:txBody>
-      </p:sp>
-      <p:sp>
-        <p:nvSpPr>
-          <p:cNvPr id="23" name="TextBox 22"/>
-          <p:cNvSpPr txBox="1"/>
-          <p:nvPr/>
-        </p:nvSpPr>
-        <p:spPr>
-          <a:xfrm>
-            <a:off x="4937759" y="4983480"/>
-            <a:ext cx="2834640" cy="365760"/>
-          </a:xfrm>
-          <a:prstGeom prst="rect">
-            <a:avLst/>
-          </a:prstGeom>
-          <a:noFill/>
-        </p:spPr>
-        <p:txBody>
-          <a:bodyPr wrap="none">
-            <a:spAutoFit/>
-          </a:bodyPr>
-          <a:lstStyle/>
-          <a:p>
-            <a:pPr algn="l">
-              <a:defRPr sz="1400" b="1">
-                <a:solidFill>
-                  <a:srgbClr val="F1F5F9"/>
-                </a:solidFill>
-                <a:latin typeface="Segoe UI"/>
-              </a:defRPr>
-            </a:pPr>
-            <a:r>
-              <a:t>Real Users Only</a:t>
-            </a:r>
-          </a:p>
-        </p:txBody>
-      </p:sp>
-      <p:sp>
-        <p:nvSpPr>
-          <p:cNvPr id="24" name="TextBox 23"/>
-          <p:cNvSpPr txBox="1"/>
-          <p:nvPr/>
-        </p:nvSpPr>
-        <p:spPr>
-          <a:xfrm>
-            <a:off x="4663439" y="5394960"/>
-            <a:ext cx="3108960" cy="548640"/>
-          </a:xfrm>
-          <a:prstGeom prst="rect">
-            <a:avLst/>
-          </a:prstGeom>
-          <a:noFill/>
-        </p:spPr>
-        <p:txBody>
-          <a:bodyPr wrap="square">
-            <a:spAutoFit/>
-          </a:bodyPr>
-          <a:lstStyle/>
-          <a:p>
-            <a:pPr algn="l">
-              <a:defRPr sz="1100" b="0">
+              <a:defRPr sz="1300" b="0">
                 <a:solidFill>
                   <a:srgbClr val="94A3B8"/>
                 </a:solidFill>
@@ -6954,32 +8030,30 @@
               </a:defRPr>
             </a:pPr>
             <a:r>
-              <a:t>Email OTP verification prevents fake accounts</a:t>
-            </a:r>
-          </a:p>
-        </p:txBody>
-      </p:sp>
-      <p:sp>
-        <p:nvSpPr>
-          <p:cNvPr id="25" name="Rounded Rectangle 24"/>
+              <a:t>Government partnerships</a:t>
+            </a:r>
+          </a:p>
+        </p:txBody>
+      </p:sp>
+      <p:sp>
+        <p:nvSpPr>
+          <p:cNvPr id="38" name="Oval 37"/>
           <p:cNvSpPr/>
           <p:nvPr/>
         </p:nvSpPr>
         <p:spPr>
           <a:xfrm>
-            <a:off x="8229600" y="4846320"/>
-            <a:ext cx="3474720" cy="1188720"/>
-          </a:xfrm>
-          <a:prstGeom prst="roundRect">
+            <a:off x="8229600" y="4709160"/>
+            <a:ext cx="109728" cy="109728"/>
+          </a:xfrm>
+          <a:prstGeom prst="ellipse">
             <a:avLst/>
           </a:prstGeom>
           <a:solidFill>
-            <a:srgbClr val="141E2D"/>
+            <a:srgbClr val="22C55E"/>
           </a:solidFill>
-          <a:ln w="12700">
-            <a:solidFill>
-              <a:srgbClr val="1E293B"/>
-            </a:solidFill>
+          <a:ln>
+            <a:noFill/>
           </a:ln>
         </p:spPr>
         <p:style>
@@ -7001,19 +8075,20 @@
           <a:lstStyle/>
           <a:p>
             <a:pPr algn="ctr"/>
-          </a:p>
-        </p:txBody>
-      </p:sp>
-      <p:sp>
-        <p:nvSpPr>
-          <p:cNvPr id="26" name="TextBox 25"/>
-          <p:cNvSpPr txBox="1"/>
-          <p:nvPr/>
-        </p:nvSpPr>
-        <p:spPr>
-          <a:xfrm>
-            <a:off x="8412480" y="4983480"/>
-            <a:ext cx="365760" cy="365760"/>
+            <a:endParaRPr/>
+          </a:p>
+        </p:txBody>
+      </p:sp>
+      <p:sp>
+        <p:nvSpPr>
+          <p:cNvPr id="39" name="TextBox 38"/>
+          <p:cNvSpPr txBox="1"/>
+          <p:nvPr/>
+        </p:nvSpPr>
+        <p:spPr>
+          <a:xfrm>
+            <a:off x="8458200" y="4617720"/>
+            <a:ext cx="3200400" cy="457200"/>
           </a:xfrm>
           <a:prstGeom prst="rect">
             <a:avLst/>
@@ -7027,79 +8102,7 @@
           <a:lstStyle/>
           <a:p>
             <a:pPr algn="l">
-              <a:defRPr sz="1600" b="1">
-                <a:solidFill>
-                  <a:srgbClr val="22C55E"/>
-                </a:solidFill>
-                <a:latin typeface="Segoe UI"/>
-              </a:defRPr>
-            </a:pPr>
-            <a:r>
-              <a:t>◉</a:t>
-            </a:r>
-          </a:p>
-        </p:txBody>
-      </p:sp>
-      <p:sp>
-        <p:nvSpPr>
-          <p:cNvPr id="27" name="TextBox 26"/>
-          <p:cNvSpPr txBox="1"/>
-          <p:nvPr/>
-        </p:nvSpPr>
-        <p:spPr>
-          <a:xfrm>
-            <a:off x="8686800" y="4983480"/>
-            <a:ext cx="2834640" cy="365760"/>
-          </a:xfrm>
-          <a:prstGeom prst="rect">
-            <a:avLst/>
-          </a:prstGeom>
-          <a:noFill/>
-        </p:spPr>
-        <p:txBody>
-          <a:bodyPr wrap="none">
-            <a:spAutoFit/>
-          </a:bodyPr>
-          <a:lstStyle/>
-          <a:p>
-            <a:pPr algn="l">
-              <a:defRPr sz="1400" b="1">
-                <a:solidFill>
-                  <a:srgbClr val="F1F5F9"/>
-                </a:solidFill>
-                <a:latin typeface="Segoe UI"/>
-              </a:defRPr>
-            </a:pPr>
-            <a:r>
-              <a:t>Fair Competition</a:t>
-            </a:r>
-          </a:p>
-        </p:txBody>
-      </p:sp>
-      <p:sp>
-        <p:nvSpPr>
-          <p:cNvPr id="28" name="TextBox 27"/>
-          <p:cNvSpPr txBox="1"/>
-          <p:nvPr/>
-        </p:nvSpPr>
-        <p:spPr>
-          <a:xfrm>
-            <a:off x="8412480" y="5394960"/>
-            <a:ext cx="3108960" cy="548640"/>
-          </a:xfrm>
-          <a:prstGeom prst="rect">
-            <a:avLst/>
-          </a:prstGeom>
-          <a:noFill/>
-        </p:spPr>
-        <p:txBody>
-          <a:bodyPr wrap="square">
-            <a:spAutoFit/>
-          </a:bodyPr>
-          <a:lstStyle/>
-          <a:p>
-            <a:pPr algn="l">
-              <a:defRPr sz="1100" b="0">
+              <a:defRPr sz="1300" b="0">
                 <a:solidFill>
                   <a:srgbClr val="94A3B8"/>
                 </a:solidFill>
@@ -7107,7 +8110,7 @@
               </a:defRPr>
             </a:pPr>
             <a:r>
-              <a:t>Rankings reflect actual behavior, not gaming</a:t>
+              <a:t>Carbon credit integration</a:t>
             </a:r>
           </a:p>
         </p:txBody>
@@ -7121,7 +8124,7 @@
 </file>
 
 <file path=ppt/slides/slide14.xml><?xml version="1.0" encoding="utf-8"?>
-<p:sld xmlns:a="http://schemas.openxmlformats.org/drawingml/2006/main" xmlns:p="http://schemas.openxmlformats.org/presentationml/2006/main" xmlns:r="http://schemas.openxmlformats.org/officeDocument/2006/relationships">
+<p:sld xmlns:a="http://schemas.openxmlformats.org/drawingml/2006/main" xmlns:r="http://schemas.openxmlformats.org/officeDocument/2006/relationships" xmlns:p="http://schemas.openxmlformats.org/presentationml/2006/main">
   <p:cSld>
     <p:spTree>
       <p:nvGrpSpPr>
@@ -7129,7 +8132,14 @@
         <p:cNvGrpSpPr/>
         <p:nvPr/>
       </p:nvGrpSpPr>
-      <p:grpSpPr/>
+      <p:grpSpPr>
+        <a:xfrm>
+          <a:off x="0" y="0"/>
+          <a:ext cx="0" cy="0"/>
+          <a:chOff x="0" y="0"/>
+          <a:chExt cx="0" cy="0"/>
+        </a:xfrm>
+      </p:grpSpPr>
       <p:sp>
         <p:nvSpPr>
           <p:cNvPr id="2" name="Rectangle 1"/>
@@ -7170,1530 +8180,7 @@
           <a:lstStyle/>
           <a:p>
             <a:pPr algn="ctr"/>
-          </a:p>
-        </p:txBody>
-      </p:sp>
-      <p:sp>
-        <p:nvSpPr>
-          <p:cNvPr id="3" name="TextBox 2"/>
-          <p:cNvSpPr txBox="1"/>
-          <p:nvPr/>
-        </p:nvSpPr>
-        <p:spPr>
-          <a:xfrm>
-            <a:off x="731520" y="457200"/>
-            <a:ext cx="2743200" cy="365760"/>
-          </a:xfrm>
-          <a:prstGeom prst="rect">
-            <a:avLst/>
-          </a:prstGeom>
-          <a:noFill/>
-        </p:spPr>
-        <p:txBody>
-          <a:bodyPr wrap="none">
-            <a:spAutoFit/>
-          </a:bodyPr>
-          <a:lstStyle/>
-          <a:p>
-            <a:pPr algn="l">
-              <a:defRPr sz="1200" b="1">
-                <a:solidFill>
-                  <a:srgbClr val="22C55E"/>
-                </a:solidFill>
-                <a:latin typeface="Segoe UI"/>
-              </a:defRPr>
-            </a:pPr>
-            <a:r>
-              <a:t>ROADMAP</a:t>
-            </a:r>
-          </a:p>
-        </p:txBody>
-      </p:sp>
-      <p:sp>
-        <p:nvSpPr>
-          <p:cNvPr id="4" name="TextBox 3"/>
-          <p:cNvSpPr txBox="1"/>
-          <p:nvPr/>
-        </p:nvSpPr>
-        <p:spPr>
-          <a:xfrm>
-            <a:off x="731520" y="822960"/>
-            <a:ext cx="10058400" cy="731520"/>
-          </a:xfrm>
-          <a:prstGeom prst="rect">
-            <a:avLst/>
-          </a:prstGeom>
-          <a:noFill/>
-        </p:spPr>
-        <p:txBody>
-          <a:bodyPr wrap="none">
-            <a:spAutoFit/>
-          </a:bodyPr>
-          <a:lstStyle/>
-          <a:p>
-            <a:pPr algn="l">
-              <a:defRPr sz="4000" b="1">
-                <a:solidFill>
-                  <a:srgbClr val="F1F5F9"/>
-                </a:solidFill>
-                <a:latin typeface="Segoe UI"/>
-              </a:defRPr>
-            </a:pPr>
-            <a:r>
-              <a:t>What's Next for LOOP</a:t>
-            </a:r>
-          </a:p>
-        </p:txBody>
-      </p:sp>
-      <p:sp>
-        <p:nvSpPr>
-          <p:cNvPr id="5" name="Oval 4"/>
-          <p:cNvSpPr/>
-          <p:nvPr/>
-        </p:nvSpPr>
-        <p:spPr>
-          <a:xfrm>
-            <a:off x="731520" y="1828800"/>
-            <a:ext cx="731520" cy="731520"/>
-          </a:xfrm>
-          <a:prstGeom prst="ellipse">
-            <a:avLst/>
-          </a:prstGeom>
-          <a:solidFill>
-            <a:srgbClr val="22C55E"/>
-          </a:solidFill>
-          <a:ln w="25400">
-            <a:solidFill>
-              <a:srgbClr val="22C55E"/>
-            </a:solidFill>
-          </a:ln>
-        </p:spPr>
-        <p:style>
-          <a:lnRef idx="1">
-            <a:schemeClr val="accent1"/>
-          </a:lnRef>
-          <a:fillRef idx="3">
-            <a:schemeClr val="accent1"/>
-          </a:fillRef>
-          <a:effectRef idx="2">
-            <a:schemeClr val="accent1"/>
-          </a:effectRef>
-          <a:fontRef idx="minor">
-            <a:schemeClr val="lt1"/>
-          </a:fontRef>
-        </p:style>
-        <p:txBody>
-          <a:bodyPr rtlCol="0" anchor="ctr"/>
-          <a:lstStyle/>
-          <a:p>
-            <a:pPr algn="ctr"/>
-          </a:p>
-        </p:txBody>
-      </p:sp>
-      <p:sp>
-        <p:nvSpPr>
-          <p:cNvPr id="6" name="TextBox 5"/>
-          <p:cNvSpPr txBox="1"/>
-          <p:nvPr/>
-        </p:nvSpPr>
-        <p:spPr>
-          <a:xfrm>
-            <a:off x="731520" y="1965960"/>
-            <a:ext cx="731520" cy="457200"/>
-          </a:xfrm>
-          <a:prstGeom prst="rect">
-            <a:avLst/>
-          </a:prstGeom>
-          <a:noFill/>
-        </p:spPr>
-        <p:txBody>
-          <a:bodyPr wrap="none">
-            <a:spAutoFit/>
-          </a:bodyPr>
-          <a:lstStyle/>
-          <a:p>
-            <a:pPr algn="ctr">
-              <a:defRPr sz="1100" b="1">
-                <a:solidFill>
-                  <a:srgbClr val="080B0F"/>
-                </a:solidFill>
-                <a:latin typeface="Segoe UI"/>
-              </a:defRPr>
-            </a:pPr>
-            <a:r>
-              <a:t>Now</a:t>
-            </a:r>
-          </a:p>
-        </p:txBody>
-      </p:sp>
-      <p:sp>
-        <p:nvSpPr>
-          <p:cNvPr id="7" name="Rectangle 6"/>
-          <p:cNvSpPr/>
-          <p:nvPr/>
-        </p:nvSpPr>
-        <p:spPr>
-          <a:xfrm>
-            <a:off x="1554480" y="2148840"/>
-            <a:ext cx="2834640" cy="25400"/>
-          </a:xfrm>
-          <a:prstGeom prst="rect">
-            <a:avLst/>
-          </a:prstGeom>
-          <a:solidFill>
-            <a:srgbClr val="22C55E">
-              <a:lumMod val="70000"/>
-              <a:lumOff val="30000"/>
-            </a:srgbClr>
-          </a:solidFill>
-          <a:ln>
-            <a:noFill/>
-          </a:ln>
-        </p:spPr>
-        <p:style>
-          <a:lnRef idx="1">
-            <a:schemeClr val="accent1"/>
-          </a:lnRef>
-          <a:fillRef idx="3">
-            <a:schemeClr val="accent1"/>
-          </a:fillRef>
-          <a:effectRef idx="2">
-            <a:schemeClr val="accent1"/>
-          </a:effectRef>
-          <a:fontRef idx="minor">
-            <a:schemeClr val="lt1"/>
-          </a:fontRef>
-        </p:style>
-        <p:txBody>
-          <a:bodyPr rtlCol="0" anchor="ctr"/>
-          <a:lstStyle/>
-          <a:p>
-            <a:pPr algn="ctr"/>
-          </a:p>
-        </p:txBody>
-      </p:sp>
-      <p:sp>
-        <p:nvSpPr>
-          <p:cNvPr id="8" name="TextBox 7"/>
-          <p:cNvSpPr txBox="1"/>
-          <p:nvPr/>
-        </p:nvSpPr>
-        <p:spPr>
-          <a:xfrm>
-            <a:off x="731520" y="2651760"/>
-            <a:ext cx="3474720" cy="457200"/>
-          </a:xfrm>
-          <a:prstGeom prst="rect">
-            <a:avLst/>
-          </a:prstGeom>
-          <a:noFill/>
-        </p:spPr>
-        <p:txBody>
-          <a:bodyPr wrap="none">
-            <a:spAutoFit/>
-          </a:bodyPr>
-          <a:lstStyle/>
-          <a:p>
-            <a:pPr algn="l">
-              <a:defRPr sz="2000" b="1">
-                <a:solidFill>
-                  <a:srgbClr val="F1F5F9"/>
-                </a:solidFill>
-                <a:latin typeface="Segoe UI"/>
-              </a:defRPr>
-            </a:pPr>
-            <a:r>
-              <a:t>Core Platform</a:t>
-            </a:r>
-          </a:p>
-        </p:txBody>
-      </p:sp>
-      <p:sp>
-        <p:nvSpPr>
-          <p:cNvPr id="9" name="Oval 8"/>
-          <p:cNvSpPr/>
-          <p:nvPr/>
-        </p:nvSpPr>
-        <p:spPr>
-          <a:xfrm>
-            <a:off x="731520" y="3200400"/>
-            <a:ext cx="109728" cy="109728"/>
-          </a:xfrm>
-          <a:prstGeom prst="ellipse">
-            <a:avLst/>
-          </a:prstGeom>
-          <a:solidFill>
-            <a:srgbClr val="22C55E"/>
-          </a:solidFill>
-          <a:ln>
-            <a:noFill/>
-          </a:ln>
-        </p:spPr>
-        <p:style>
-          <a:lnRef idx="1">
-            <a:schemeClr val="accent1"/>
-          </a:lnRef>
-          <a:fillRef idx="3">
-            <a:schemeClr val="accent1"/>
-          </a:fillRef>
-          <a:effectRef idx="2">
-            <a:schemeClr val="accent1"/>
-          </a:effectRef>
-          <a:fontRef idx="minor">
-            <a:schemeClr val="lt1"/>
-          </a:fontRef>
-        </p:style>
-        <p:txBody>
-          <a:bodyPr rtlCol="0" anchor="ctr"/>
-          <a:lstStyle/>
-          <a:p>
-            <a:pPr algn="ctr"/>
-          </a:p>
-        </p:txBody>
-      </p:sp>
-      <p:sp>
-        <p:nvSpPr>
-          <p:cNvPr id="10" name="TextBox 9"/>
-          <p:cNvSpPr txBox="1"/>
-          <p:nvPr/>
-        </p:nvSpPr>
-        <p:spPr>
-          <a:xfrm>
-            <a:off x="960120" y="3108960"/>
-            <a:ext cx="3200400" cy="457200"/>
-          </a:xfrm>
-          <a:prstGeom prst="rect">
-            <a:avLst/>
-          </a:prstGeom>
-          <a:noFill/>
-        </p:spPr>
-        <p:txBody>
-          <a:bodyPr wrap="none">
-            <a:spAutoFit/>
-          </a:bodyPr>
-          <a:lstStyle/>
-          <a:p>
-            <a:pPr algn="l">
-              <a:defRPr sz="1300" b="0">
-                <a:solidFill>
-                  <a:srgbClr val="94A3B8"/>
-                </a:solidFill>
-                <a:latin typeface="Segoe UI"/>
-              </a:defRPr>
-            </a:pPr>
-            <a:r>
-              <a:t>CSV parsing &amp; AI classification</a:t>
-            </a:r>
-          </a:p>
-        </p:txBody>
-      </p:sp>
-      <p:sp>
-        <p:nvSpPr>
-          <p:cNvPr id="11" name="Oval 10"/>
-          <p:cNvSpPr/>
-          <p:nvPr/>
-        </p:nvSpPr>
-        <p:spPr>
-          <a:xfrm>
-            <a:off x="731520" y="3703320"/>
-            <a:ext cx="109728" cy="109728"/>
-          </a:xfrm>
-          <a:prstGeom prst="ellipse">
-            <a:avLst/>
-          </a:prstGeom>
-          <a:solidFill>
-            <a:srgbClr val="22C55E"/>
-          </a:solidFill>
-          <a:ln>
-            <a:noFill/>
-          </a:ln>
-        </p:spPr>
-        <p:style>
-          <a:lnRef idx="1">
-            <a:schemeClr val="accent1"/>
-          </a:lnRef>
-          <a:fillRef idx="3">
-            <a:schemeClr val="accent1"/>
-          </a:fillRef>
-          <a:effectRef idx="2">
-            <a:schemeClr val="accent1"/>
-          </a:effectRef>
-          <a:fontRef idx="minor">
-            <a:schemeClr val="lt1"/>
-          </a:fontRef>
-        </p:style>
-        <p:txBody>
-          <a:bodyPr rtlCol="0" anchor="ctr"/>
-          <a:lstStyle/>
-          <a:p>
-            <a:pPr algn="ctr"/>
-          </a:p>
-        </p:txBody>
-      </p:sp>
-      <p:sp>
-        <p:nvSpPr>
-          <p:cNvPr id="12" name="TextBox 11"/>
-          <p:cNvSpPr txBox="1"/>
-          <p:nvPr/>
-        </p:nvSpPr>
-        <p:spPr>
-          <a:xfrm>
-            <a:off x="960120" y="3611880"/>
-            <a:ext cx="3200400" cy="457200"/>
-          </a:xfrm>
-          <a:prstGeom prst="rect">
-            <a:avLst/>
-          </a:prstGeom>
-          <a:noFill/>
-        </p:spPr>
-        <p:txBody>
-          <a:bodyPr wrap="none">
-            <a:spAutoFit/>
-          </a:bodyPr>
-          <a:lstStyle/>
-          <a:p>
-            <a:pPr algn="l">
-              <a:defRPr sz="1300" b="0">
-                <a:solidFill>
-                  <a:srgbClr val="94A3B8"/>
-                </a:solidFill>
-                <a:latin typeface="Segoe UI"/>
-              </a:defRPr>
-            </a:pPr>
-            <a:r>
-              <a:t>Loop Score &amp; personalities</a:t>
-            </a:r>
-          </a:p>
-        </p:txBody>
-      </p:sp>
-      <p:sp>
-        <p:nvSpPr>
-          <p:cNvPr id="13" name="Oval 12"/>
-          <p:cNvSpPr/>
-          <p:nvPr/>
-        </p:nvSpPr>
-        <p:spPr>
-          <a:xfrm>
-            <a:off x="731520" y="4206240"/>
-            <a:ext cx="109728" cy="109728"/>
-          </a:xfrm>
-          <a:prstGeom prst="ellipse">
-            <a:avLst/>
-          </a:prstGeom>
-          <a:solidFill>
-            <a:srgbClr val="22C55E"/>
-          </a:solidFill>
-          <a:ln>
-            <a:noFill/>
-          </a:ln>
-        </p:spPr>
-        <p:style>
-          <a:lnRef idx="1">
-            <a:schemeClr val="accent1"/>
-          </a:lnRef>
-          <a:fillRef idx="3">
-            <a:schemeClr val="accent1"/>
-          </a:fillRef>
-          <a:effectRef idx="2">
-            <a:schemeClr val="accent1"/>
-          </a:effectRef>
-          <a:fontRef idx="minor">
-            <a:schemeClr val="lt1"/>
-          </a:fontRef>
-        </p:style>
-        <p:txBody>
-          <a:bodyPr rtlCol="0" anchor="ctr"/>
-          <a:lstStyle/>
-          <a:p>
-            <a:pPr algn="ctr"/>
-          </a:p>
-        </p:txBody>
-      </p:sp>
-      <p:sp>
-        <p:nvSpPr>
-          <p:cNvPr id="14" name="TextBox 13"/>
-          <p:cNvSpPr txBox="1"/>
-          <p:nvPr/>
-        </p:nvSpPr>
-        <p:spPr>
-          <a:xfrm>
-            <a:off x="960120" y="4114800"/>
-            <a:ext cx="3200400" cy="457200"/>
-          </a:xfrm>
-          <a:prstGeom prst="rect">
-            <a:avLst/>
-          </a:prstGeom>
-          <a:noFill/>
-        </p:spPr>
-        <p:txBody>
-          <a:bodyPr wrap="none">
-            <a:spAutoFit/>
-          </a:bodyPr>
-          <a:lstStyle/>
-          <a:p>
-            <a:pPr algn="l">
-              <a:defRPr sz="1300" b="0">
-                <a:solidFill>
-                  <a:srgbClr val="94A3B8"/>
-                </a:solidFill>
-                <a:latin typeface="Segoe UI"/>
-              </a:defRPr>
-            </a:pPr>
-            <a:r>
-              <a:t>City rankings &amp; circles</a:t>
-            </a:r>
-          </a:p>
-        </p:txBody>
-      </p:sp>
-      <p:sp>
-        <p:nvSpPr>
-          <p:cNvPr id="15" name="Oval 14"/>
-          <p:cNvSpPr/>
-          <p:nvPr/>
-        </p:nvSpPr>
-        <p:spPr>
-          <a:xfrm>
-            <a:off x="731520" y="4709160"/>
-            <a:ext cx="109728" cy="109728"/>
-          </a:xfrm>
-          <a:prstGeom prst="ellipse">
-            <a:avLst/>
-          </a:prstGeom>
-          <a:solidFill>
-            <a:srgbClr val="22C55E"/>
-          </a:solidFill>
-          <a:ln>
-            <a:noFill/>
-          </a:ln>
-        </p:spPr>
-        <p:style>
-          <a:lnRef idx="1">
-            <a:schemeClr val="accent1"/>
-          </a:lnRef>
-          <a:fillRef idx="3">
-            <a:schemeClr val="accent1"/>
-          </a:fillRef>
-          <a:effectRef idx="2">
-            <a:schemeClr val="accent1"/>
-          </a:effectRef>
-          <a:fontRef idx="minor">
-            <a:schemeClr val="lt1"/>
-          </a:fontRef>
-        </p:style>
-        <p:txBody>
-          <a:bodyPr rtlCol="0" anchor="ctr"/>
-          <a:lstStyle/>
-          <a:p>
-            <a:pPr algn="ctr"/>
-          </a:p>
-        </p:txBody>
-      </p:sp>
-      <p:sp>
-        <p:nvSpPr>
-          <p:cNvPr id="16" name="TextBox 15"/>
-          <p:cNvSpPr txBox="1"/>
-          <p:nvPr/>
-        </p:nvSpPr>
-        <p:spPr>
-          <a:xfrm>
-            <a:off x="960120" y="4617720"/>
-            <a:ext cx="3200400" cy="457200"/>
-          </a:xfrm>
-          <a:prstGeom prst="rect">
-            <a:avLst/>
-          </a:prstGeom>
-          <a:noFill/>
-        </p:spPr>
-        <p:txBody>
-          <a:bodyPr wrap="none">
-            <a:spAutoFit/>
-          </a:bodyPr>
-          <a:lstStyle/>
-          <a:p>
-            <a:pPr algn="l">
-              <a:defRPr sz="1300" b="0">
-                <a:solidFill>
-                  <a:srgbClr val="94A3B8"/>
-                </a:solidFill>
-                <a:latin typeface="Segoe UI"/>
-              </a:defRPr>
-            </a:pPr>
-            <a:r>
-              <a:t>Manual expense logging</a:t>
-            </a:r>
-          </a:p>
-        </p:txBody>
-      </p:sp>
-      <p:sp>
-        <p:nvSpPr>
-          <p:cNvPr id="17" name="Oval 16"/>
-          <p:cNvSpPr/>
-          <p:nvPr/>
-        </p:nvSpPr>
-        <p:spPr>
-          <a:xfrm>
-            <a:off x="4480559" y="1828800"/>
-            <a:ext cx="731520" cy="731520"/>
-          </a:xfrm>
-          <a:prstGeom prst="ellipse">
-            <a:avLst/>
-          </a:prstGeom>
-          <a:solidFill>
-            <a:srgbClr val="111827"/>
-          </a:solidFill>
-          <a:ln w="25400">
-            <a:solidFill>
-              <a:srgbClr val="22C55E"/>
-            </a:solidFill>
-          </a:ln>
-        </p:spPr>
-        <p:style>
-          <a:lnRef idx="1">
-            <a:schemeClr val="accent1"/>
-          </a:lnRef>
-          <a:fillRef idx="3">
-            <a:schemeClr val="accent1"/>
-          </a:fillRef>
-          <a:effectRef idx="2">
-            <a:schemeClr val="accent1"/>
-          </a:effectRef>
-          <a:fontRef idx="minor">
-            <a:schemeClr val="lt1"/>
-          </a:fontRef>
-        </p:style>
-        <p:txBody>
-          <a:bodyPr rtlCol="0" anchor="ctr"/>
-          <a:lstStyle/>
-          <a:p>
-            <a:pPr algn="ctr"/>
-          </a:p>
-        </p:txBody>
-      </p:sp>
-      <p:sp>
-        <p:nvSpPr>
-          <p:cNvPr id="18" name="TextBox 17"/>
-          <p:cNvSpPr txBox="1"/>
-          <p:nvPr/>
-        </p:nvSpPr>
-        <p:spPr>
-          <a:xfrm>
-            <a:off x="4480559" y="1965960"/>
-            <a:ext cx="731520" cy="457200"/>
-          </a:xfrm>
-          <a:prstGeom prst="rect">
-            <a:avLst/>
-          </a:prstGeom>
-          <a:noFill/>
-        </p:spPr>
-        <p:txBody>
-          <a:bodyPr wrap="none">
-            <a:spAutoFit/>
-          </a:bodyPr>
-          <a:lstStyle/>
-          <a:p>
-            <a:pPr algn="ctr">
-              <a:defRPr sz="1100" b="1">
-                <a:solidFill>
-                  <a:srgbClr val="22C55E"/>
-                </a:solidFill>
-                <a:latin typeface="Segoe UI"/>
-              </a:defRPr>
-            </a:pPr>
-            <a:r>
-              <a:t>Next</a:t>
-            </a:r>
-          </a:p>
-        </p:txBody>
-      </p:sp>
-      <p:sp>
-        <p:nvSpPr>
-          <p:cNvPr id="19" name="Rectangle 18"/>
-          <p:cNvSpPr/>
-          <p:nvPr/>
-        </p:nvSpPr>
-        <p:spPr>
-          <a:xfrm>
-            <a:off x="5303519" y="2148840"/>
-            <a:ext cx="2834640" cy="25400"/>
-          </a:xfrm>
-          <a:prstGeom prst="rect">
-            <a:avLst/>
-          </a:prstGeom>
-          <a:solidFill>
-            <a:srgbClr val="22C55E">
-              <a:lumMod val="70000"/>
-              <a:lumOff val="30000"/>
-            </a:srgbClr>
-          </a:solidFill>
-          <a:ln>
-            <a:noFill/>
-          </a:ln>
-        </p:spPr>
-        <p:style>
-          <a:lnRef idx="1">
-            <a:schemeClr val="accent1"/>
-          </a:lnRef>
-          <a:fillRef idx="3">
-            <a:schemeClr val="accent1"/>
-          </a:fillRef>
-          <a:effectRef idx="2">
-            <a:schemeClr val="accent1"/>
-          </a:effectRef>
-          <a:fontRef idx="minor">
-            <a:schemeClr val="lt1"/>
-          </a:fontRef>
-        </p:style>
-        <p:txBody>
-          <a:bodyPr rtlCol="0" anchor="ctr"/>
-          <a:lstStyle/>
-          <a:p>
-            <a:pPr algn="ctr"/>
-          </a:p>
-        </p:txBody>
-      </p:sp>
-      <p:sp>
-        <p:nvSpPr>
-          <p:cNvPr id="20" name="TextBox 19"/>
-          <p:cNvSpPr txBox="1"/>
-          <p:nvPr/>
-        </p:nvSpPr>
-        <p:spPr>
-          <a:xfrm>
-            <a:off x="4480559" y="2651760"/>
-            <a:ext cx="3474720" cy="457200"/>
-          </a:xfrm>
-          <a:prstGeom prst="rect">
-            <a:avLst/>
-          </a:prstGeom>
-          <a:noFill/>
-        </p:spPr>
-        <p:txBody>
-          <a:bodyPr wrap="none">
-            <a:spAutoFit/>
-          </a:bodyPr>
-          <a:lstStyle/>
-          <a:p>
-            <a:pPr algn="l">
-              <a:defRPr sz="2000" b="1">
-                <a:solidFill>
-                  <a:srgbClr val="F1F5F9"/>
-                </a:solidFill>
-                <a:latin typeface="Segoe UI"/>
-              </a:defRPr>
-            </a:pPr>
-            <a:r>
-              <a:t>Enhancements</a:t>
-            </a:r>
-          </a:p>
-        </p:txBody>
-      </p:sp>
-      <p:sp>
-        <p:nvSpPr>
-          <p:cNvPr id="21" name="Oval 20"/>
-          <p:cNvSpPr/>
-          <p:nvPr/>
-        </p:nvSpPr>
-        <p:spPr>
-          <a:xfrm>
-            <a:off x="4480559" y="3200400"/>
-            <a:ext cx="109728" cy="109728"/>
-          </a:xfrm>
-          <a:prstGeom prst="ellipse">
-            <a:avLst/>
-          </a:prstGeom>
-          <a:solidFill>
-            <a:srgbClr val="22C55E"/>
-          </a:solidFill>
-          <a:ln>
-            <a:noFill/>
-          </a:ln>
-        </p:spPr>
-        <p:style>
-          <a:lnRef idx="1">
-            <a:schemeClr val="accent1"/>
-          </a:lnRef>
-          <a:fillRef idx="3">
-            <a:schemeClr val="accent1"/>
-          </a:fillRef>
-          <a:effectRef idx="2">
-            <a:schemeClr val="accent1"/>
-          </a:effectRef>
-          <a:fontRef idx="minor">
-            <a:schemeClr val="lt1"/>
-          </a:fontRef>
-        </p:style>
-        <p:txBody>
-          <a:bodyPr rtlCol="0" anchor="ctr"/>
-          <a:lstStyle/>
-          <a:p>
-            <a:pPr algn="ctr"/>
-          </a:p>
-        </p:txBody>
-      </p:sp>
-      <p:sp>
-        <p:nvSpPr>
-          <p:cNvPr id="22" name="TextBox 21"/>
-          <p:cNvSpPr txBox="1"/>
-          <p:nvPr/>
-        </p:nvSpPr>
-        <p:spPr>
-          <a:xfrm>
-            <a:off x="4709159" y="3108960"/>
-            <a:ext cx="3200400" cy="457200"/>
-          </a:xfrm>
-          <a:prstGeom prst="rect">
-            <a:avLst/>
-          </a:prstGeom>
-          <a:noFill/>
-        </p:spPr>
-        <p:txBody>
-          <a:bodyPr wrap="none">
-            <a:spAutoFit/>
-          </a:bodyPr>
-          <a:lstStyle/>
-          <a:p>
-            <a:pPr algn="l">
-              <a:defRPr sz="1300" b="0">
-                <a:solidFill>
-                  <a:srgbClr val="94A3B8"/>
-                </a:solidFill>
-                <a:latin typeface="Segoe UI"/>
-              </a:defRPr>
-            </a:pPr>
-            <a:r>
-              <a:t>Bank API integration (no CSV needed)</a:t>
-            </a:r>
-          </a:p>
-        </p:txBody>
-      </p:sp>
-      <p:sp>
-        <p:nvSpPr>
-          <p:cNvPr id="23" name="Oval 22"/>
-          <p:cNvSpPr/>
-          <p:nvPr/>
-        </p:nvSpPr>
-        <p:spPr>
-          <a:xfrm>
-            <a:off x="4480559" y="3703320"/>
-            <a:ext cx="109728" cy="109728"/>
-          </a:xfrm>
-          <a:prstGeom prst="ellipse">
-            <a:avLst/>
-          </a:prstGeom>
-          <a:solidFill>
-            <a:srgbClr val="22C55E"/>
-          </a:solidFill>
-          <a:ln>
-            <a:noFill/>
-          </a:ln>
-        </p:spPr>
-        <p:style>
-          <a:lnRef idx="1">
-            <a:schemeClr val="accent1"/>
-          </a:lnRef>
-          <a:fillRef idx="3">
-            <a:schemeClr val="accent1"/>
-          </a:fillRef>
-          <a:effectRef idx="2">
-            <a:schemeClr val="accent1"/>
-          </a:effectRef>
-          <a:fontRef idx="minor">
-            <a:schemeClr val="lt1"/>
-          </a:fontRef>
-        </p:style>
-        <p:txBody>
-          <a:bodyPr rtlCol="0" anchor="ctr"/>
-          <a:lstStyle/>
-          <a:p>
-            <a:pPr algn="ctr"/>
-          </a:p>
-        </p:txBody>
-      </p:sp>
-      <p:sp>
-        <p:nvSpPr>
-          <p:cNvPr id="24" name="TextBox 23"/>
-          <p:cNvSpPr txBox="1"/>
-          <p:nvPr/>
-        </p:nvSpPr>
-        <p:spPr>
-          <a:xfrm>
-            <a:off x="4709159" y="3611880"/>
-            <a:ext cx="3200400" cy="457200"/>
-          </a:xfrm>
-          <a:prstGeom prst="rect">
-            <a:avLst/>
-          </a:prstGeom>
-          <a:noFill/>
-        </p:spPr>
-        <p:txBody>
-          <a:bodyPr wrap="none">
-            <a:spAutoFit/>
-          </a:bodyPr>
-          <a:lstStyle/>
-          <a:p>
-            <a:pPr algn="l">
-              <a:defRPr sz="1300" b="0">
-                <a:solidFill>
-                  <a:srgbClr val="94A3B8"/>
-                </a:solidFill>
-                <a:latin typeface="Segoe UI"/>
-              </a:defRPr>
-            </a:pPr>
-            <a:r>
-              <a:t>Carbon offset marketplace</a:t>
-            </a:r>
-          </a:p>
-        </p:txBody>
-      </p:sp>
-      <p:sp>
-        <p:nvSpPr>
-          <p:cNvPr id="25" name="Oval 24"/>
-          <p:cNvSpPr/>
-          <p:nvPr/>
-        </p:nvSpPr>
-        <p:spPr>
-          <a:xfrm>
-            <a:off x="4480559" y="4206240"/>
-            <a:ext cx="109728" cy="109728"/>
-          </a:xfrm>
-          <a:prstGeom prst="ellipse">
-            <a:avLst/>
-          </a:prstGeom>
-          <a:solidFill>
-            <a:srgbClr val="22C55E"/>
-          </a:solidFill>
-          <a:ln>
-            <a:noFill/>
-          </a:ln>
-        </p:spPr>
-        <p:style>
-          <a:lnRef idx="1">
-            <a:schemeClr val="accent1"/>
-          </a:lnRef>
-          <a:fillRef idx="3">
-            <a:schemeClr val="accent1"/>
-          </a:fillRef>
-          <a:effectRef idx="2">
-            <a:schemeClr val="accent1"/>
-          </a:effectRef>
-          <a:fontRef idx="minor">
-            <a:schemeClr val="lt1"/>
-          </a:fontRef>
-        </p:style>
-        <p:txBody>
-          <a:bodyPr rtlCol="0" anchor="ctr"/>
-          <a:lstStyle/>
-          <a:p>
-            <a:pPr algn="ctr"/>
-          </a:p>
-        </p:txBody>
-      </p:sp>
-      <p:sp>
-        <p:nvSpPr>
-          <p:cNvPr id="26" name="TextBox 25"/>
-          <p:cNvSpPr txBox="1"/>
-          <p:nvPr/>
-        </p:nvSpPr>
-        <p:spPr>
-          <a:xfrm>
-            <a:off x="4709159" y="4114800"/>
-            <a:ext cx="3200400" cy="457200"/>
-          </a:xfrm>
-          <a:prstGeom prst="rect">
-            <a:avLst/>
-          </a:prstGeom>
-          <a:noFill/>
-        </p:spPr>
-        <p:txBody>
-          <a:bodyPr wrap="none">
-            <a:spAutoFit/>
-          </a:bodyPr>
-          <a:lstStyle/>
-          <a:p>
-            <a:pPr algn="l">
-              <a:defRPr sz="1300" b="0">
-                <a:solidFill>
-                  <a:srgbClr val="94A3B8"/>
-                </a:solidFill>
-                <a:latin typeface="Segoe UI"/>
-              </a:defRPr>
-            </a:pPr>
-            <a:r>
-              <a:t>Corporate team features</a:t>
-            </a:r>
-          </a:p>
-        </p:txBody>
-      </p:sp>
-      <p:sp>
-        <p:nvSpPr>
-          <p:cNvPr id="27" name="Oval 26"/>
-          <p:cNvSpPr/>
-          <p:nvPr/>
-        </p:nvSpPr>
-        <p:spPr>
-          <a:xfrm>
-            <a:off x="4480559" y="4709160"/>
-            <a:ext cx="109728" cy="109728"/>
-          </a:xfrm>
-          <a:prstGeom prst="ellipse">
-            <a:avLst/>
-          </a:prstGeom>
-          <a:solidFill>
-            <a:srgbClr val="22C55E"/>
-          </a:solidFill>
-          <a:ln>
-            <a:noFill/>
-          </a:ln>
-        </p:spPr>
-        <p:style>
-          <a:lnRef idx="1">
-            <a:schemeClr val="accent1"/>
-          </a:lnRef>
-          <a:fillRef idx="3">
-            <a:schemeClr val="accent1"/>
-          </a:fillRef>
-          <a:effectRef idx="2">
-            <a:schemeClr val="accent1"/>
-          </a:effectRef>
-          <a:fontRef idx="minor">
-            <a:schemeClr val="lt1"/>
-          </a:fontRef>
-        </p:style>
-        <p:txBody>
-          <a:bodyPr rtlCol="0" anchor="ctr"/>
-          <a:lstStyle/>
-          <a:p>
-            <a:pPr algn="ctr"/>
-          </a:p>
-        </p:txBody>
-      </p:sp>
-      <p:sp>
-        <p:nvSpPr>
-          <p:cNvPr id="28" name="TextBox 27"/>
-          <p:cNvSpPr txBox="1"/>
-          <p:nvPr/>
-        </p:nvSpPr>
-        <p:spPr>
-          <a:xfrm>
-            <a:off x="4709159" y="4617720"/>
-            <a:ext cx="3200400" cy="457200"/>
-          </a:xfrm>
-          <a:prstGeom prst="rect">
-            <a:avLst/>
-          </a:prstGeom>
-          <a:noFill/>
-        </p:spPr>
-        <p:txBody>
-          <a:bodyPr wrap="none">
-            <a:spAutoFit/>
-          </a:bodyPr>
-          <a:lstStyle/>
-          <a:p>
-            <a:pPr algn="l">
-              <a:defRPr sz="1300" b="0">
-                <a:solidFill>
-                  <a:srgbClr val="94A3B8"/>
-                </a:solidFill>
-                <a:latin typeface="Segoe UI"/>
-              </a:defRPr>
-            </a:pPr>
-            <a:r>
-              <a:t>Mobile app (iOS/Android)</a:t>
-            </a:r>
-          </a:p>
-        </p:txBody>
-      </p:sp>
-      <p:sp>
-        <p:nvSpPr>
-          <p:cNvPr id="29" name="Oval 28"/>
-          <p:cNvSpPr/>
-          <p:nvPr/>
-        </p:nvSpPr>
-        <p:spPr>
-          <a:xfrm>
-            <a:off x="8229600" y="1828800"/>
-            <a:ext cx="731520" cy="731520"/>
-          </a:xfrm>
-          <a:prstGeom prst="ellipse">
-            <a:avLst/>
-          </a:prstGeom>
-          <a:solidFill>
-            <a:srgbClr val="111827"/>
-          </a:solidFill>
-          <a:ln w="25400">
-            <a:solidFill>
-              <a:srgbClr val="22C55E"/>
-            </a:solidFill>
-          </a:ln>
-        </p:spPr>
-        <p:style>
-          <a:lnRef idx="1">
-            <a:schemeClr val="accent1"/>
-          </a:lnRef>
-          <a:fillRef idx="3">
-            <a:schemeClr val="accent1"/>
-          </a:fillRef>
-          <a:effectRef idx="2">
-            <a:schemeClr val="accent1"/>
-          </a:effectRef>
-          <a:fontRef idx="minor">
-            <a:schemeClr val="lt1"/>
-          </a:fontRef>
-        </p:style>
-        <p:txBody>
-          <a:bodyPr rtlCol="0" anchor="ctr"/>
-          <a:lstStyle/>
-          <a:p>
-            <a:pPr algn="ctr"/>
-          </a:p>
-        </p:txBody>
-      </p:sp>
-      <p:sp>
-        <p:nvSpPr>
-          <p:cNvPr id="30" name="TextBox 29"/>
-          <p:cNvSpPr txBox="1"/>
-          <p:nvPr/>
-        </p:nvSpPr>
-        <p:spPr>
-          <a:xfrm>
-            <a:off x="8229600" y="1965960"/>
-            <a:ext cx="731520" cy="457200"/>
-          </a:xfrm>
-          <a:prstGeom prst="rect">
-            <a:avLst/>
-          </a:prstGeom>
-          <a:noFill/>
-        </p:spPr>
-        <p:txBody>
-          <a:bodyPr wrap="none">
-            <a:spAutoFit/>
-          </a:bodyPr>
-          <a:lstStyle/>
-          <a:p>
-            <a:pPr algn="ctr">
-              <a:defRPr sz="1100" b="1">
-                <a:solidFill>
-                  <a:srgbClr val="22C55E"/>
-                </a:solidFill>
-                <a:latin typeface="Segoe UI"/>
-              </a:defRPr>
-            </a:pPr>
-            <a:r>
-              <a:t>Future</a:t>
-            </a:r>
-          </a:p>
-        </p:txBody>
-      </p:sp>
-      <p:sp>
-        <p:nvSpPr>
-          <p:cNvPr id="31" name="TextBox 30"/>
-          <p:cNvSpPr txBox="1"/>
-          <p:nvPr/>
-        </p:nvSpPr>
-        <p:spPr>
-          <a:xfrm>
-            <a:off x="8229600" y="2651760"/>
-            <a:ext cx="3474720" cy="457200"/>
-          </a:xfrm>
-          <a:prstGeom prst="rect">
-            <a:avLst/>
-          </a:prstGeom>
-          <a:noFill/>
-        </p:spPr>
-        <p:txBody>
-          <a:bodyPr wrap="none">
-            <a:spAutoFit/>
-          </a:bodyPr>
-          <a:lstStyle/>
-          <a:p>
-            <a:pPr algn="l">
-              <a:defRPr sz="2000" b="1">
-                <a:solidFill>
-                  <a:srgbClr val="F1F5F9"/>
-                </a:solidFill>
-                <a:latin typeface="Segoe UI"/>
-              </a:defRPr>
-            </a:pPr>
-            <a:r>
-              <a:t>Scale</a:t>
-            </a:r>
-          </a:p>
-        </p:txBody>
-      </p:sp>
-      <p:sp>
-        <p:nvSpPr>
-          <p:cNvPr id="32" name="Oval 31"/>
-          <p:cNvSpPr/>
-          <p:nvPr/>
-        </p:nvSpPr>
-        <p:spPr>
-          <a:xfrm>
-            <a:off x="8229600" y="3200400"/>
-            <a:ext cx="109728" cy="109728"/>
-          </a:xfrm>
-          <a:prstGeom prst="ellipse">
-            <a:avLst/>
-          </a:prstGeom>
-          <a:solidFill>
-            <a:srgbClr val="22C55E"/>
-          </a:solidFill>
-          <a:ln>
-            <a:noFill/>
-          </a:ln>
-        </p:spPr>
-        <p:style>
-          <a:lnRef idx="1">
-            <a:schemeClr val="accent1"/>
-          </a:lnRef>
-          <a:fillRef idx="3">
-            <a:schemeClr val="accent1"/>
-          </a:fillRef>
-          <a:effectRef idx="2">
-            <a:schemeClr val="accent1"/>
-          </a:effectRef>
-          <a:fontRef idx="minor">
-            <a:schemeClr val="lt1"/>
-          </a:fontRef>
-        </p:style>
-        <p:txBody>
-          <a:bodyPr rtlCol="0" anchor="ctr"/>
-          <a:lstStyle/>
-          <a:p>
-            <a:pPr algn="ctr"/>
-          </a:p>
-        </p:txBody>
-      </p:sp>
-      <p:sp>
-        <p:nvSpPr>
-          <p:cNvPr id="33" name="TextBox 32"/>
-          <p:cNvSpPr txBox="1"/>
-          <p:nvPr/>
-        </p:nvSpPr>
-        <p:spPr>
-          <a:xfrm>
-            <a:off x="8458200" y="3108960"/>
-            <a:ext cx="3200400" cy="457200"/>
-          </a:xfrm>
-          <a:prstGeom prst="rect">
-            <a:avLst/>
-          </a:prstGeom>
-          <a:noFill/>
-        </p:spPr>
-        <p:txBody>
-          <a:bodyPr wrap="none">
-            <a:spAutoFit/>
-          </a:bodyPr>
-          <a:lstStyle/>
-          <a:p>
-            <a:pPr algn="l">
-              <a:defRPr sz="1300" b="0">
-                <a:solidFill>
-                  <a:srgbClr val="94A3B8"/>
-                </a:solidFill>
-                <a:latin typeface="Segoe UI"/>
-              </a:defRPr>
-            </a:pPr>
-            <a:r>
-              <a:t>Pan-India expansion</a:t>
-            </a:r>
-          </a:p>
-        </p:txBody>
-      </p:sp>
-      <p:sp>
-        <p:nvSpPr>
-          <p:cNvPr id="34" name="Oval 33"/>
-          <p:cNvSpPr/>
-          <p:nvPr/>
-        </p:nvSpPr>
-        <p:spPr>
-          <a:xfrm>
-            <a:off x="8229600" y="3703320"/>
-            <a:ext cx="109728" cy="109728"/>
-          </a:xfrm>
-          <a:prstGeom prst="ellipse">
-            <a:avLst/>
-          </a:prstGeom>
-          <a:solidFill>
-            <a:srgbClr val="22C55E"/>
-          </a:solidFill>
-          <a:ln>
-            <a:noFill/>
-          </a:ln>
-        </p:spPr>
-        <p:style>
-          <a:lnRef idx="1">
-            <a:schemeClr val="accent1"/>
-          </a:lnRef>
-          <a:fillRef idx="3">
-            <a:schemeClr val="accent1"/>
-          </a:fillRef>
-          <a:effectRef idx="2">
-            <a:schemeClr val="accent1"/>
-          </a:effectRef>
-          <a:fontRef idx="minor">
-            <a:schemeClr val="lt1"/>
-          </a:fontRef>
-        </p:style>
-        <p:txBody>
-          <a:bodyPr rtlCol="0" anchor="ctr"/>
-          <a:lstStyle/>
-          <a:p>
-            <a:pPr algn="ctr"/>
-          </a:p>
-        </p:txBody>
-      </p:sp>
-      <p:sp>
-        <p:nvSpPr>
-          <p:cNvPr id="35" name="TextBox 34"/>
-          <p:cNvSpPr txBox="1"/>
-          <p:nvPr/>
-        </p:nvSpPr>
-        <p:spPr>
-          <a:xfrm>
-            <a:off x="8458200" y="3611880"/>
-            <a:ext cx="3200400" cy="457200"/>
-          </a:xfrm>
-          <a:prstGeom prst="rect">
-            <a:avLst/>
-          </a:prstGeom>
-          <a:noFill/>
-        </p:spPr>
-        <p:txBody>
-          <a:bodyPr wrap="none">
-            <a:spAutoFit/>
-          </a:bodyPr>
-          <a:lstStyle/>
-          <a:p>
-            <a:pPr algn="l">
-              <a:defRPr sz="1300" b="0">
-                <a:solidFill>
-                  <a:srgbClr val="94A3B8"/>
-                </a:solidFill>
-                <a:latin typeface="Segoe UI"/>
-              </a:defRPr>
-            </a:pPr>
-            <a:r>
-              <a:t>Regional language support</a:t>
-            </a:r>
-          </a:p>
-        </p:txBody>
-      </p:sp>
-      <p:sp>
-        <p:nvSpPr>
-          <p:cNvPr id="36" name="Oval 35"/>
-          <p:cNvSpPr/>
-          <p:nvPr/>
-        </p:nvSpPr>
-        <p:spPr>
-          <a:xfrm>
-            <a:off x="8229600" y="4206240"/>
-            <a:ext cx="109728" cy="109728"/>
-          </a:xfrm>
-          <a:prstGeom prst="ellipse">
-            <a:avLst/>
-          </a:prstGeom>
-          <a:solidFill>
-            <a:srgbClr val="22C55E"/>
-          </a:solidFill>
-          <a:ln>
-            <a:noFill/>
-          </a:ln>
-        </p:spPr>
-        <p:style>
-          <a:lnRef idx="1">
-            <a:schemeClr val="accent1"/>
-          </a:lnRef>
-          <a:fillRef idx="3">
-            <a:schemeClr val="accent1"/>
-          </a:fillRef>
-          <a:effectRef idx="2">
-            <a:schemeClr val="accent1"/>
-          </a:effectRef>
-          <a:fontRef idx="minor">
-            <a:schemeClr val="lt1"/>
-          </a:fontRef>
-        </p:style>
-        <p:txBody>
-          <a:bodyPr rtlCol="0" anchor="ctr"/>
-          <a:lstStyle/>
-          <a:p>
-            <a:pPr algn="ctr"/>
-          </a:p>
-        </p:txBody>
-      </p:sp>
-      <p:sp>
-        <p:nvSpPr>
-          <p:cNvPr id="37" name="TextBox 36"/>
-          <p:cNvSpPr txBox="1"/>
-          <p:nvPr/>
-        </p:nvSpPr>
-        <p:spPr>
-          <a:xfrm>
-            <a:off x="8458200" y="4114800"/>
-            <a:ext cx="3200400" cy="457200"/>
-          </a:xfrm>
-          <a:prstGeom prst="rect">
-            <a:avLst/>
-          </a:prstGeom>
-          <a:noFill/>
-        </p:spPr>
-        <p:txBody>
-          <a:bodyPr wrap="none">
-            <a:spAutoFit/>
-          </a:bodyPr>
-          <a:lstStyle/>
-          <a:p>
-            <a:pPr algn="l">
-              <a:defRPr sz="1300" b="0">
-                <a:solidFill>
-                  <a:srgbClr val="94A3B8"/>
-                </a:solidFill>
-                <a:latin typeface="Segoe UI"/>
-              </a:defRPr>
-            </a:pPr>
-            <a:r>
-              <a:t>Government partnerships</a:t>
-            </a:r>
-          </a:p>
-        </p:txBody>
-      </p:sp>
-      <p:sp>
-        <p:nvSpPr>
-          <p:cNvPr id="38" name="Oval 37"/>
-          <p:cNvSpPr/>
-          <p:nvPr/>
-        </p:nvSpPr>
-        <p:spPr>
-          <a:xfrm>
-            <a:off x="8229600" y="4709160"/>
-            <a:ext cx="109728" cy="109728"/>
-          </a:xfrm>
-          <a:prstGeom prst="ellipse">
-            <a:avLst/>
-          </a:prstGeom>
-          <a:solidFill>
-            <a:srgbClr val="22C55E"/>
-          </a:solidFill>
-          <a:ln>
-            <a:noFill/>
-          </a:ln>
-        </p:spPr>
-        <p:style>
-          <a:lnRef idx="1">
-            <a:schemeClr val="accent1"/>
-          </a:lnRef>
-          <a:fillRef idx="3">
-            <a:schemeClr val="accent1"/>
-          </a:fillRef>
-          <a:effectRef idx="2">
-            <a:schemeClr val="accent1"/>
-          </a:effectRef>
-          <a:fontRef idx="minor">
-            <a:schemeClr val="lt1"/>
-          </a:fontRef>
-        </p:style>
-        <p:txBody>
-          <a:bodyPr rtlCol="0" anchor="ctr"/>
-          <a:lstStyle/>
-          <a:p>
-            <a:pPr algn="ctr"/>
-          </a:p>
-        </p:txBody>
-      </p:sp>
-      <p:sp>
-        <p:nvSpPr>
-          <p:cNvPr id="39" name="TextBox 38"/>
-          <p:cNvSpPr txBox="1"/>
-          <p:nvPr/>
-        </p:nvSpPr>
-        <p:spPr>
-          <a:xfrm>
-            <a:off x="8458200" y="4617720"/>
-            <a:ext cx="3200400" cy="457200"/>
-          </a:xfrm>
-          <a:prstGeom prst="rect">
-            <a:avLst/>
-          </a:prstGeom>
-          <a:noFill/>
-        </p:spPr>
-        <p:txBody>
-          <a:bodyPr wrap="none">
-            <a:spAutoFit/>
-          </a:bodyPr>
-          <a:lstStyle/>
-          <a:p>
-            <a:pPr algn="l">
-              <a:defRPr sz="1300" b="0">
-                <a:solidFill>
-                  <a:srgbClr val="94A3B8"/>
-                </a:solidFill>
-                <a:latin typeface="Segoe UI"/>
-              </a:defRPr>
-            </a:pPr>
-            <a:r>
-              <a:t>Carbon credit integration</a:t>
-            </a:r>
-          </a:p>
-        </p:txBody>
-      </p:sp>
-    </p:spTree>
-  </p:cSld>
-  <p:clrMapOvr>
-    <a:masterClrMapping/>
-  </p:clrMapOvr>
-</p:sld>
-</file>
-
-<file path=ppt/slides/slide15.xml><?xml version="1.0" encoding="utf-8"?>
-<p:sld xmlns:a="http://schemas.openxmlformats.org/drawingml/2006/main" xmlns:p="http://schemas.openxmlformats.org/presentationml/2006/main" xmlns:r="http://schemas.openxmlformats.org/officeDocument/2006/relationships">
-  <p:cSld>
-    <p:spTree>
-      <p:nvGrpSpPr>
-        <p:cNvPr id="1" name=""/>
-        <p:cNvGrpSpPr/>
-        <p:nvPr/>
-      </p:nvGrpSpPr>
-      <p:grpSpPr/>
-      <p:sp>
-        <p:nvSpPr>
-          <p:cNvPr id="2" name="Rectangle 1"/>
-          <p:cNvSpPr/>
-          <p:nvPr/>
-        </p:nvSpPr>
-        <p:spPr>
-          <a:xfrm>
-            <a:off x="0" y="0"/>
-            <a:ext cx="12191695" cy="6858000"/>
-          </a:xfrm>
-          <a:prstGeom prst="rect">
-            <a:avLst/>
-          </a:prstGeom>
-          <a:solidFill>
-            <a:srgbClr val="080B0F"/>
-          </a:solidFill>
-          <a:ln>
-            <a:noFill/>
-          </a:ln>
-        </p:spPr>
-        <p:style>
-          <a:lnRef idx="1">
-            <a:schemeClr val="accent1"/>
-          </a:lnRef>
-          <a:fillRef idx="3">
-            <a:schemeClr val="accent1"/>
-          </a:fillRef>
-          <a:effectRef idx="2">
-            <a:schemeClr val="accent1"/>
-          </a:effectRef>
-          <a:fontRef idx="minor">
-            <a:schemeClr val="lt1"/>
-          </a:fontRef>
-        </p:style>
-        <p:txBody>
-          <a:bodyPr rtlCol="0" anchor="ctr"/>
-          <a:lstStyle/>
-          <a:p>
-            <a:pPr algn="ctr"/>
+            <a:endParaRPr/>
           </a:p>
         </p:txBody>
       </p:sp>
@@ -8740,6 +8227,7 @@
           <a:lstStyle/>
           <a:p>
             <a:pPr algn="ctr"/>
+            <a:endParaRPr/>
           </a:p>
         </p:txBody>
       </p:sp>
@@ -8786,6 +8274,7 @@
           <a:lstStyle/>
           <a:p>
             <a:pPr algn="ctr"/>
+            <a:endParaRPr/>
           </a:p>
         </p:txBody>
       </p:sp>
@@ -8901,6 +8390,7 @@
           <a:lstStyle/>
           <a:p>
             <a:pPr algn="ctr"/>
+            <a:endParaRPr/>
           </a:p>
         </p:txBody>
       </p:sp>
@@ -9021,7 +8511,7 @@
 </file>
 
 <file path=ppt/slides/slide2.xml><?xml version="1.0" encoding="utf-8"?>
-<p:sld xmlns:a="http://schemas.openxmlformats.org/drawingml/2006/main" xmlns:p="http://schemas.openxmlformats.org/presentationml/2006/main" xmlns:r="http://schemas.openxmlformats.org/officeDocument/2006/relationships">
+<p:sld xmlns:a="http://schemas.openxmlformats.org/drawingml/2006/main" xmlns:r="http://schemas.openxmlformats.org/officeDocument/2006/relationships" xmlns:p="http://schemas.openxmlformats.org/presentationml/2006/main">
   <p:cSld>
     <p:spTree>
       <p:nvGrpSpPr>
@@ -9029,7 +8519,14 @@
         <p:cNvGrpSpPr/>
         <p:nvPr/>
       </p:nvGrpSpPr>
-      <p:grpSpPr/>
+      <p:grpSpPr>
+        <a:xfrm>
+          <a:off x="0" y="0"/>
+          <a:ext cx="0" cy="0"/>
+          <a:chOff x="0" y="0"/>
+          <a:chExt cx="0" cy="0"/>
+        </a:xfrm>
+      </p:grpSpPr>
       <p:sp>
         <p:nvSpPr>
           <p:cNvPr id="2" name="Rectangle 1"/>
@@ -9070,6 +8567,7 @@
           <a:lstStyle/>
           <a:p>
             <a:pPr algn="ctr"/>
+            <a:endParaRPr/>
           </a:p>
         </p:txBody>
       </p:sp>
@@ -9185,6 +8683,7 @@
           <a:lstStyle/>
           <a:p>
             <a:pPr algn="ctr"/>
+            <a:endParaRPr/>
           </a:p>
         </p:txBody>
       </p:sp>
@@ -9306,6 +8805,7 @@
           <a:lstStyle/>
           <a:p>
             <a:pPr algn="ctr"/>
+            <a:endParaRPr/>
           </a:p>
         </p:txBody>
       </p:sp>
@@ -9423,6 +8923,7 @@
           <a:lstStyle/>
           <a:p>
             <a:pPr algn="ctr"/>
+            <a:endParaRPr/>
           </a:p>
         </p:txBody>
       </p:sp>
@@ -9540,6 +9041,7 @@
           <a:lstStyle/>
           <a:p>
             <a:pPr algn="ctr"/>
+            <a:endParaRPr/>
           </a:p>
         </p:txBody>
       </p:sp>
@@ -9660,7 +9162,7 @@
 </file>
 
 <file path=ppt/slides/slide3.xml><?xml version="1.0" encoding="utf-8"?>
-<p:sld xmlns:a="http://schemas.openxmlformats.org/drawingml/2006/main" xmlns:p="http://schemas.openxmlformats.org/presentationml/2006/main" xmlns:r="http://schemas.openxmlformats.org/officeDocument/2006/relationships">
+<p:sld xmlns:a="http://schemas.openxmlformats.org/drawingml/2006/main" xmlns:r="http://schemas.openxmlformats.org/officeDocument/2006/relationships" xmlns:p="http://schemas.openxmlformats.org/presentationml/2006/main">
   <p:cSld>
     <p:spTree>
       <p:nvGrpSpPr>
@@ -9668,7 +9170,14 @@
         <p:cNvGrpSpPr/>
         <p:nvPr/>
       </p:nvGrpSpPr>
-      <p:grpSpPr/>
+      <p:grpSpPr>
+        <a:xfrm>
+          <a:off x="0" y="0"/>
+          <a:ext cx="0" cy="0"/>
+          <a:chOff x="0" y="0"/>
+          <a:chExt cx="0" cy="0"/>
+        </a:xfrm>
+      </p:grpSpPr>
       <p:sp>
         <p:nvSpPr>
           <p:cNvPr id="2" name="Rectangle 1"/>
@@ -9709,6 +9218,7 @@
           <a:lstStyle/>
           <a:p>
             <a:pPr algn="ctr"/>
+            <a:endParaRPr/>
           </a:p>
         </p:txBody>
       </p:sp>
@@ -9833,6 +9343,7 @@
           <a:lstStyle/>
           <a:p>
             <a:pPr algn="ctr"/>
+            <a:endParaRPr/>
           </a:p>
         </p:txBody>
       </p:sp>
@@ -9876,6 +9387,7 @@
           <a:lstStyle/>
           <a:p>
             <a:pPr algn="ctr"/>
+            <a:endParaRPr/>
           </a:p>
         </p:txBody>
       </p:sp>
@@ -10032,6 +9544,7 @@
           <a:lstStyle/>
           <a:p>
             <a:pPr algn="ctr"/>
+            <a:endParaRPr/>
           </a:p>
         </p:txBody>
       </p:sp>
@@ -10075,6 +9588,7 @@
           <a:lstStyle/>
           <a:p>
             <a:pPr algn="ctr"/>
+            <a:endParaRPr/>
           </a:p>
         </p:txBody>
       </p:sp>
@@ -10231,6 +9745,7 @@
           <a:lstStyle/>
           <a:p>
             <a:pPr algn="ctr"/>
+            <a:endParaRPr/>
           </a:p>
         </p:txBody>
       </p:sp>
@@ -10274,6 +9789,7 @@
           <a:lstStyle/>
           <a:p>
             <a:pPr algn="ctr"/>
+            <a:endParaRPr/>
           </a:p>
         </p:txBody>
       </p:sp>
@@ -10430,6 +9946,7 @@
           <a:lstStyle/>
           <a:p>
             <a:pPr algn="ctr"/>
+            <a:endParaRPr/>
           </a:p>
         </p:txBody>
       </p:sp>
@@ -10473,6 +9990,7 @@
           <a:lstStyle/>
           <a:p>
             <a:pPr algn="ctr"/>
+            <a:endParaRPr/>
           </a:p>
         </p:txBody>
       </p:sp>
@@ -10593,7 +10111,7 @@
 </file>
 
 <file path=ppt/slides/slide4.xml><?xml version="1.0" encoding="utf-8"?>
-<p:sld xmlns:a="http://schemas.openxmlformats.org/drawingml/2006/main" xmlns:p="http://schemas.openxmlformats.org/presentationml/2006/main" xmlns:r="http://schemas.openxmlformats.org/officeDocument/2006/relationships">
+<p:sld xmlns:a="http://schemas.openxmlformats.org/drawingml/2006/main" xmlns:r="http://schemas.openxmlformats.org/officeDocument/2006/relationships" xmlns:p="http://schemas.openxmlformats.org/presentationml/2006/main">
   <p:cSld>
     <p:spTree>
       <p:nvGrpSpPr>
@@ -10601,7 +10119,14 @@
         <p:cNvGrpSpPr/>
         <p:nvPr/>
       </p:nvGrpSpPr>
-      <p:grpSpPr/>
+      <p:grpSpPr>
+        <a:xfrm>
+          <a:off x="0" y="0"/>
+          <a:ext cx="0" cy="0"/>
+          <a:chOff x="0" y="0"/>
+          <a:chExt cx="0" cy="0"/>
+        </a:xfrm>
+      </p:grpSpPr>
       <p:sp>
         <p:nvSpPr>
           <p:cNvPr id="2" name="Rectangle 1"/>
@@ -10642,6 +10167,7 @@
           <a:lstStyle/>
           <a:p>
             <a:pPr algn="ctr"/>
+            <a:endParaRPr/>
           </a:p>
         </p:txBody>
       </p:sp>
@@ -10688,6 +10214,7 @@
           <a:lstStyle/>
           <a:p>
             <a:pPr algn="ctr"/>
+            <a:endParaRPr/>
           </a:p>
         </p:txBody>
       </p:sp>
@@ -10839,6 +10366,7 @@
           <a:lstStyle/>
           <a:p>
             <a:pPr algn="ctr"/>
+            <a:endParaRPr/>
           </a:p>
         </p:txBody>
       </p:sp>
@@ -10918,6 +10446,7 @@
           <a:lstStyle/>
           <a:p>
             <a:pPr algn="ctr"/>
+            <a:endParaRPr/>
           </a:p>
         </p:txBody>
       </p:sp>
@@ -10997,6 +10526,7 @@
           <a:lstStyle/>
           <a:p>
             <a:pPr algn="ctr"/>
+            <a:endParaRPr/>
           </a:p>
         </p:txBody>
       </p:sp>
@@ -11076,6 +10606,7 @@
           <a:lstStyle/>
           <a:p>
             <a:pPr algn="ctr"/>
+            <a:endParaRPr/>
           </a:p>
         </p:txBody>
       </p:sp>
@@ -11155,6 +10686,7 @@
           <a:lstStyle/>
           <a:p>
             <a:pPr algn="ctr"/>
+            <a:endParaRPr/>
           </a:p>
         </p:txBody>
       </p:sp>
@@ -11236,6 +10768,7 @@
           <a:lstStyle/>
           <a:p>
             <a:pPr algn="ctr"/>
+            <a:endParaRPr/>
           </a:p>
         </p:txBody>
       </p:sp>
@@ -11307,7 +10840,7 @@
 </file>
 
 <file path=ppt/slides/slide5.xml><?xml version="1.0" encoding="utf-8"?>
-<p:sld xmlns:a="http://schemas.openxmlformats.org/drawingml/2006/main" xmlns:p="http://schemas.openxmlformats.org/presentationml/2006/main" xmlns:r="http://schemas.openxmlformats.org/officeDocument/2006/relationships">
+<p:sld xmlns:a="http://schemas.openxmlformats.org/drawingml/2006/main" xmlns:r="http://schemas.openxmlformats.org/officeDocument/2006/relationships" xmlns:p="http://schemas.openxmlformats.org/presentationml/2006/main">
   <p:cSld>
     <p:spTree>
       <p:nvGrpSpPr>
@@ -11315,7 +10848,14 @@
         <p:cNvGrpSpPr/>
         <p:nvPr/>
       </p:nvGrpSpPr>
-      <p:grpSpPr/>
+      <p:grpSpPr>
+        <a:xfrm>
+          <a:off x="0" y="0"/>
+          <a:ext cx="0" cy="0"/>
+          <a:chOff x="0" y="0"/>
+          <a:chExt cx="0" cy="0"/>
+        </a:xfrm>
+      </p:grpSpPr>
       <p:sp>
         <p:nvSpPr>
           <p:cNvPr id="2" name="Rectangle 1"/>
@@ -11356,6 +10896,7 @@
           <a:lstStyle/>
           <a:p>
             <a:pPr algn="ctr"/>
+            <a:endParaRPr/>
           </a:p>
         </p:txBody>
       </p:sp>
@@ -11471,6 +11012,7 @@
           <a:lstStyle/>
           <a:p>
             <a:pPr algn="ctr"/>
+            <a:endParaRPr/>
           </a:p>
         </p:txBody>
       </p:sp>
@@ -11553,6 +11095,7 @@
           <a:lstStyle/>
           <a:p>
             <a:pPr algn="ctr"/>
+            <a:endParaRPr/>
           </a:p>
         </p:txBody>
       </p:sp>
@@ -11668,6 +11211,7 @@
           <a:lstStyle/>
           <a:p>
             <a:pPr algn="ctr"/>
+            <a:endParaRPr/>
           </a:p>
         </p:txBody>
       </p:sp>
@@ -11750,6 +11294,7 @@
           <a:lstStyle/>
           <a:p>
             <a:pPr algn="ctr"/>
+            <a:endParaRPr/>
           </a:p>
         </p:txBody>
       </p:sp>
@@ -11865,6 +11410,7 @@
           <a:lstStyle/>
           <a:p>
             <a:pPr algn="ctr"/>
+            <a:endParaRPr/>
           </a:p>
         </p:txBody>
       </p:sp>
@@ -11947,6 +11493,7 @@
           <a:lstStyle/>
           <a:p>
             <a:pPr algn="ctr"/>
+            <a:endParaRPr/>
           </a:p>
         </p:txBody>
       </p:sp>
@@ -12062,6 +11609,7 @@
           <a:lstStyle/>
           <a:p>
             <a:pPr algn="ctr"/>
+            <a:endParaRPr/>
           </a:p>
         </p:txBody>
       </p:sp>
@@ -12215,6 +11763,7 @@
           <a:lstStyle/>
           <a:p>
             <a:pPr algn="ctr"/>
+            <a:endParaRPr/>
           </a:p>
         </p:txBody>
       </p:sp>
@@ -12299,6 +11848,7 @@
           <a:lstStyle/>
           <a:p>
             <a:pPr algn="ctr"/>
+            <a:endParaRPr/>
           </a:p>
         </p:txBody>
       </p:sp>
@@ -12383,6 +11933,7 @@
           <a:lstStyle/>
           <a:p>
             <a:pPr algn="ctr"/>
+            <a:endParaRPr/>
           </a:p>
         </p:txBody>
       </p:sp>
@@ -12467,6 +12018,7 @@
           <a:lstStyle/>
           <a:p>
             <a:pPr algn="ctr"/>
+            <a:endParaRPr/>
           </a:p>
         </p:txBody>
       </p:sp>
@@ -12551,6 +12103,7 @@
           <a:lstStyle/>
           <a:p>
             <a:pPr algn="ctr"/>
+            <a:endParaRPr/>
           </a:p>
         </p:txBody>
       </p:sp>
@@ -12635,6 +12188,7 @@
           <a:lstStyle/>
           <a:p>
             <a:pPr algn="ctr"/>
+            <a:endParaRPr/>
           </a:p>
         </p:txBody>
       </p:sp>
@@ -12719,6 +12273,7 @@
           <a:lstStyle/>
           <a:p>
             <a:pPr algn="ctr"/>
+            <a:endParaRPr/>
           </a:p>
         </p:txBody>
       </p:sp>
@@ -12767,7 +12322,7 @@
 </file>
 
 <file path=ppt/slides/slide6.xml><?xml version="1.0" encoding="utf-8"?>
-<p:sld xmlns:a="http://schemas.openxmlformats.org/drawingml/2006/main" xmlns:p="http://schemas.openxmlformats.org/presentationml/2006/main" xmlns:r="http://schemas.openxmlformats.org/officeDocument/2006/relationships">
+<p:sld xmlns:a="http://schemas.openxmlformats.org/drawingml/2006/main" xmlns:r="http://schemas.openxmlformats.org/officeDocument/2006/relationships" xmlns:p="http://schemas.openxmlformats.org/presentationml/2006/main">
   <p:cSld>
     <p:spTree>
       <p:nvGrpSpPr>
@@ -12775,7 +12330,14 @@
         <p:cNvGrpSpPr/>
         <p:nvPr/>
       </p:nvGrpSpPr>
-      <p:grpSpPr/>
+      <p:grpSpPr>
+        <a:xfrm>
+          <a:off x="0" y="0"/>
+          <a:ext cx="0" cy="0"/>
+          <a:chOff x="0" y="0"/>
+          <a:chExt cx="0" cy="0"/>
+        </a:xfrm>
+      </p:grpSpPr>
       <p:sp>
         <p:nvSpPr>
           <p:cNvPr id="2" name="Rectangle 1"/>
@@ -12816,6 +12378,7 @@
           <a:lstStyle/>
           <a:p>
             <a:pPr algn="ctr"/>
+            <a:endParaRPr/>
           </a:p>
         </p:txBody>
       </p:sp>
@@ -13003,6 +12566,7 @@
           <a:lstStyle/>
           <a:p>
             <a:pPr algn="ctr"/>
+            <a:endParaRPr/>
           </a:p>
         </p:txBody>
       </p:sp>
@@ -13046,6 +12610,7 @@
           <a:lstStyle/>
           <a:p>
             <a:pPr algn="ctr"/>
+            <a:endParaRPr/>
           </a:p>
         </p:txBody>
       </p:sp>
@@ -13161,6 +12726,7 @@
           <a:lstStyle/>
           <a:p>
             <a:pPr algn="ctr"/>
+            <a:endParaRPr/>
           </a:p>
         </p:txBody>
       </p:sp>
@@ -13204,6 +12770,7 @@
           <a:lstStyle/>
           <a:p>
             <a:pPr algn="ctr"/>
+            <a:endParaRPr/>
           </a:p>
         </p:txBody>
       </p:sp>
@@ -13319,6 +12886,7 @@
           <a:lstStyle/>
           <a:p>
             <a:pPr algn="ctr"/>
+            <a:endParaRPr/>
           </a:p>
         </p:txBody>
       </p:sp>
@@ -13362,6 +12930,7 @@
           <a:lstStyle/>
           <a:p>
             <a:pPr algn="ctr"/>
+            <a:endParaRPr/>
           </a:p>
         </p:txBody>
       </p:sp>
@@ -13477,6 +13046,7 @@
           <a:lstStyle/>
           <a:p>
             <a:pPr algn="ctr"/>
+            <a:endParaRPr/>
           </a:p>
         </p:txBody>
       </p:sp>
@@ -13520,6 +13090,7 @@
           <a:lstStyle/>
           <a:p>
             <a:pPr algn="ctr"/>
+            <a:endParaRPr/>
           </a:p>
         </p:txBody>
       </p:sp>
@@ -13635,6 +13206,7 @@
           <a:lstStyle/>
           <a:p>
             <a:pPr algn="ctr"/>
+            <a:endParaRPr/>
           </a:p>
         </p:txBody>
       </p:sp>
@@ -13678,6 +13250,7 @@
           <a:lstStyle/>
           <a:p>
             <a:pPr algn="ctr"/>
+            <a:endParaRPr/>
           </a:p>
         </p:txBody>
       </p:sp>
@@ -13793,6 +13366,7 @@
           <a:lstStyle/>
           <a:p>
             <a:pPr algn="ctr"/>
+            <a:endParaRPr/>
           </a:p>
         </p:txBody>
       </p:sp>
@@ -13836,6 +13410,7 @@
           <a:lstStyle/>
           <a:p>
             <a:pPr algn="ctr"/>
+            <a:endParaRPr/>
           </a:p>
         </p:txBody>
       </p:sp>
@@ -13951,6 +13526,7 @@
           <a:lstStyle/>
           <a:p>
             <a:pPr algn="ctr"/>
+            <a:endParaRPr/>
           </a:p>
         </p:txBody>
       </p:sp>
@@ -13994,6 +13570,7 @@
           <a:lstStyle/>
           <a:p>
             <a:pPr algn="ctr"/>
+            <a:endParaRPr/>
           </a:p>
         </p:txBody>
       </p:sp>
@@ -14109,6 +13686,7 @@
           <a:lstStyle/>
           <a:p>
             <a:pPr algn="ctr"/>
+            <a:endParaRPr/>
           </a:p>
         </p:txBody>
       </p:sp>
@@ -14152,6 +13730,7 @@
           <a:lstStyle/>
           <a:p>
             <a:pPr algn="ctr"/>
+            <a:endParaRPr/>
           </a:p>
         </p:txBody>
       </p:sp>
@@ -14233,6 +13812,7 @@
           <a:lstStyle/>
           <a:p>
             <a:pPr algn="ctr"/>
+            <a:endParaRPr/>
           </a:p>
         </p:txBody>
       </p:sp>
@@ -14281,7 +13861,7 @@
 </file>
 
 <file path=ppt/slides/slide7.xml><?xml version="1.0" encoding="utf-8"?>
-<p:sld xmlns:a="http://schemas.openxmlformats.org/drawingml/2006/main" xmlns:p="http://schemas.openxmlformats.org/presentationml/2006/main" xmlns:r="http://schemas.openxmlformats.org/officeDocument/2006/relationships">
+<p:sld xmlns:a="http://schemas.openxmlformats.org/drawingml/2006/main" xmlns:r="http://schemas.openxmlformats.org/officeDocument/2006/relationships" xmlns:p="http://schemas.openxmlformats.org/presentationml/2006/main">
   <p:cSld>
     <p:spTree>
       <p:nvGrpSpPr>
@@ -14289,7 +13869,14 @@
         <p:cNvGrpSpPr/>
         <p:nvPr/>
       </p:nvGrpSpPr>
-      <p:grpSpPr/>
+      <p:grpSpPr>
+        <a:xfrm>
+          <a:off x="0" y="0"/>
+          <a:ext cx="0" cy="0"/>
+          <a:chOff x="0" y="0"/>
+          <a:chExt cx="0" cy="0"/>
+        </a:xfrm>
+      </p:grpSpPr>
       <p:sp>
         <p:nvSpPr>
           <p:cNvPr id="2" name="Rectangle 1"/>
@@ -14330,6 +13917,7 @@
           <a:lstStyle/>
           <a:p>
             <a:pPr algn="ctr"/>
+            <a:endParaRPr/>
           </a:p>
         </p:txBody>
       </p:sp>
@@ -14483,6 +14071,7 @@
           <a:lstStyle/>
           <a:p>
             <a:pPr algn="ctr"/>
+            <a:endParaRPr/>
           </a:p>
         </p:txBody>
       </p:sp>
@@ -14526,6 +14115,7 @@
           <a:lstStyle/>
           <a:p>
             <a:pPr algn="ctr"/>
+            <a:endParaRPr/>
           </a:p>
         </p:txBody>
       </p:sp>
@@ -14679,6 +14269,7 @@
           <a:lstStyle/>
           <a:p>
             <a:pPr algn="ctr"/>
+            <a:endParaRPr/>
           </a:p>
         </p:txBody>
       </p:sp>
@@ -14722,6 +14313,7 @@
           <a:lstStyle/>
           <a:p>
             <a:pPr algn="ctr"/>
+            <a:endParaRPr/>
           </a:p>
         </p:txBody>
       </p:sp>
@@ -14875,6 +14467,7 @@
           <a:lstStyle/>
           <a:p>
             <a:pPr algn="ctr"/>
+            <a:endParaRPr/>
           </a:p>
         </p:txBody>
       </p:sp>
@@ -14918,6 +14511,7 @@
           <a:lstStyle/>
           <a:p>
             <a:pPr algn="ctr"/>
+            <a:endParaRPr/>
           </a:p>
         </p:txBody>
       </p:sp>
@@ -15071,6 +14665,7 @@
           <a:lstStyle/>
           <a:p>
             <a:pPr algn="ctr"/>
+            <a:endParaRPr/>
           </a:p>
         </p:txBody>
       </p:sp>
@@ -15114,6 +14709,7 @@
           <a:lstStyle/>
           <a:p>
             <a:pPr algn="ctr"/>
+            <a:endParaRPr/>
           </a:p>
         </p:txBody>
       </p:sp>
@@ -15267,6 +14863,7 @@
           <a:lstStyle/>
           <a:p>
             <a:pPr algn="ctr"/>
+            <a:endParaRPr/>
           </a:p>
         </p:txBody>
       </p:sp>
@@ -15310,6 +14907,7 @@
           <a:lstStyle/>
           <a:p>
             <a:pPr algn="ctr"/>
+            <a:endParaRPr/>
           </a:p>
         </p:txBody>
       </p:sp>
@@ -15463,6 +15061,7 @@
           <a:lstStyle/>
           <a:p>
             <a:pPr algn="ctr"/>
+            <a:endParaRPr/>
           </a:p>
         </p:txBody>
       </p:sp>
@@ -15506,6 +15105,7 @@
           <a:lstStyle/>
           <a:p>
             <a:pPr algn="ctr"/>
+            <a:endParaRPr/>
           </a:p>
         </p:txBody>
       </p:sp>
@@ -15626,7 +15226,7 @@
 </file>
 
 <file path=ppt/slides/slide8.xml><?xml version="1.0" encoding="utf-8"?>
-<p:sld xmlns:a="http://schemas.openxmlformats.org/drawingml/2006/main" xmlns:p="http://schemas.openxmlformats.org/presentationml/2006/main" xmlns:r="http://schemas.openxmlformats.org/officeDocument/2006/relationships">
+<p:sld xmlns:a="http://schemas.openxmlformats.org/drawingml/2006/main" xmlns:r="http://schemas.openxmlformats.org/officeDocument/2006/relationships" xmlns:p="http://schemas.openxmlformats.org/presentationml/2006/main">
   <p:cSld>
     <p:spTree>
       <p:nvGrpSpPr>
@@ -15634,7 +15234,14 @@
         <p:cNvGrpSpPr/>
         <p:nvPr/>
       </p:nvGrpSpPr>
-      <p:grpSpPr/>
+      <p:grpSpPr>
+        <a:xfrm>
+          <a:off x="0" y="0"/>
+          <a:ext cx="0" cy="0"/>
+          <a:chOff x="0" y="0"/>
+          <a:chExt cx="0" cy="0"/>
+        </a:xfrm>
+      </p:grpSpPr>
       <p:sp>
         <p:nvSpPr>
           <p:cNvPr id="2" name="Rectangle 1"/>
@@ -15675,6 +15282,7 @@
           <a:lstStyle/>
           <a:p>
             <a:pPr algn="ctr"/>
+            <a:endParaRPr/>
           </a:p>
         </p:txBody>
       </p:sp>
@@ -15828,6 +15436,7 @@
           <a:lstStyle/>
           <a:p>
             <a:pPr algn="ctr"/>
+            <a:endParaRPr/>
           </a:p>
         </p:txBody>
       </p:sp>
@@ -15874,6 +15483,7 @@
           <a:lstStyle/>
           <a:p>
             <a:pPr algn="ctr"/>
+            <a:endParaRPr/>
           </a:p>
         </p:txBody>
       </p:sp>
@@ -16063,6 +15673,7 @@
           <a:lstStyle/>
           <a:p>
             <a:pPr algn="ctr"/>
+            <a:endParaRPr/>
           </a:p>
         </p:txBody>
       </p:sp>
@@ -16109,6 +15720,7 @@
           <a:lstStyle/>
           <a:p>
             <a:pPr algn="ctr"/>
+            <a:endParaRPr/>
           </a:p>
         </p:txBody>
       </p:sp>
@@ -16298,6 +15910,7 @@
           <a:lstStyle/>
           <a:p>
             <a:pPr algn="ctr"/>
+            <a:endParaRPr/>
           </a:p>
         </p:txBody>
       </p:sp>
@@ -16344,6 +15957,7 @@
           <a:lstStyle/>
           <a:p>
             <a:pPr algn="ctr"/>
+            <a:endParaRPr/>
           </a:p>
         </p:txBody>
       </p:sp>
@@ -16533,6 +16147,7 @@
           <a:lstStyle/>
           <a:p>
             <a:pPr algn="ctr"/>
+            <a:endParaRPr/>
           </a:p>
         </p:txBody>
       </p:sp>
@@ -16579,6 +16194,7 @@
           <a:lstStyle/>
           <a:p>
             <a:pPr algn="ctr"/>
+            <a:endParaRPr/>
           </a:p>
         </p:txBody>
       </p:sp>
@@ -16768,6 +16384,7 @@
           <a:lstStyle/>
           <a:p>
             <a:pPr algn="ctr"/>
+            <a:endParaRPr/>
           </a:p>
         </p:txBody>
       </p:sp>
@@ -16814,6 +16431,7 @@
           <a:lstStyle/>
           <a:p>
             <a:pPr algn="ctr"/>
+            <a:endParaRPr/>
           </a:p>
         </p:txBody>
       </p:sp>
@@ -17003,6 +16621,7 @@
           <a:lstStyle/>
           <a:p>
             <a:pPr algn="ctr"/>
+            <a:endParaRPr/>
           </a:p>
         </p:txBody>
       </p:sp>
@@ -17049,6 +16668,7 @@
           <a:lstStyle/>
           <a:p>
             <a:pPr algn="ctr"/>
+            <a:endParaRPr/>
           </a:p>
         </p:txBody>
       </p:sp>
@@ -17205,7 +16825,7 @@
 </file>
 
 <file path=ppt/slides/slide9.xml><?xml version="1.0" encoding="utf-8"?>
-<p:sld xmlns:a="http://schemas.openxmlformats.org/drawingml/2006/main" xmlns:p="http://schemas.openxmlformats.org/presentationml/2006/main" xmlns:r="http://schemas.openxmlformats.org/officeDocument/2006/relationships">
+<p:sld xmlns:a="http://schemas.openxmlformats.org/drawingml/2006/main" xmlns:r="http://schemas.openxmlformats.org/officeDocument/2006/relationships" xmlns:p="http://schemas.openxmlformats.org/presentationml/2006/main">
   <p:cSld>
     <p:spTree>
       <p:nvGrpSpPr>
@@ -17213,7 +16833,14 @@
         <p:cNvGrpSpPr/>
         <p:nvPr/>
       </p:nvGrpSpPr>
-      <p:grpSpPr/>
+      <p:grpSpPr>
+        <a:xfrm>
+          <a:off x="0" y="0"/>
+          <a:ext cx="0" cy="0"/>
+          <a:chOff x="0" y="0"/>
+          <a:chExt cx="0" cy="0"/>
+        </a:xfrm>
+      </p:grpSpPr>
       <p:sp>
         <p:nvSpPr>
           <p:cNvPr id="2" name="Rectangle 1"/>
@@ -17254,6 +16881,7 @@
           <a:lstStyle/>
           <a:p>
             <a:pPr algn="ctr"/>
+            <a:endParaRPr/>
           </a:p>
         </p:txBody>
       </p:sp>
@@ -17371,6 +16999,7 @@
           <a:lstStyle/>
           <a:p>
             <a:pPr algn="ctr"/>
+            <a:endParaRPr/>
           </a:p>
         </p:txBody>
       </p:sp>
@@ -17417,6 +17046,7 @@
           <a:lstStyle/>
           <a:p>
             <a:pPr algn="ctr"/>
+            <a:endParaRPr/>
           </a:p>
         </p:txBody>
       </p:sp>
@@ -17570,6 +17200,7 @@
           <a:lstStyle/>
           <a:p>
             <a:pPr algn="ctr"/>
+            <a:endParaRPr/>
           </a:p>
         </p:txBody>
       </p:sp>
@@ -17616,6 +17247,7 @@
           <a:lstStyle/>
           <a:p>
             <a:pPr algn="ctr"/>
+            <a:endParaRPr/>
           </a:p>
         </p:txBody>
       </p:sp>
@@ -17769,6 +17401,7 @@
           <a:lstStyle/>
           <a:p>
             <a:pPr algn="ctr"/>
+            <a:endParaRPr/>
           </a:p>
         </p:txBody>
       </p:sp>
@@ -17815,6 +17448,7 @@
           <a:lstStyle/>
           <a:p>
             <a:pPr algn="ctr"/>
+            <a:endParaRPr/>
           </a:p>
         </p:txBody>
       </p:sp>
@@ -17968,6 +17602,7 @@
           <a:lstStyle/>
           <a:p>
             <a:pPr algn="ctr"/>
+            <a:endParaRPr/>
           </a:p>
         </p:txBody>
       </p:sp>
@@ -18014,6 +17649,7 @@
           <a:lstStyle/>
           <a:p>
             <a:pPr algn="ctr"/>
+            <a:endParaRPr/>
           </a:p>
         </p:txBody>
       </p:sp>
@@ -18167,6 +17803,7 @@
           <a:lstStyle/>
           <a:p>
             <a:pPr algn="ctr"/>
+            <a:endParaRPr/>
           </a:p>
         </p:txBody>
       </p:sp>
@@ -18213,6 +17850,7 @@
           <a:lstStyle/>
           <a:p>
             <a:pPr algn="ctr"/>
+            <a:endParaRPr/>
           </a:p>
         </p:txBody>
       </p:sp>
@@ -18366,6 +18004,7 @@
           <a:lstStyle/>
           <a:p>
             <a:pPr algn="ctr"/>
+            <a:endParaRPr/>
           </a:p>
         </p:txBody>
       </p:sp>
@@ -18412,6 +18051,7 @@
           <a:lstStyle/>
           <a:p>
             <a:pPr algn="ctr"/>
+            <a:endParaRPr/>
           </a:p>
         </p:txBody>
       </p:sp>
@@ -18565,6 +18205,7 @@
           <a:lstStyle/>
           <a:p>
             <a:pPr algn="ctr"/>
+            <a:endParaRPr/>
           </a:p>
         </p:txBody>
       </p:sp>
@@ -18611,6 +18252,7 @@
           <a:lstStyle/>
           <a:p>
             <a:pPr algn="ctr"/>
+            <a:endParaRPr/>
           </a:p>
         </p:txBody>
       </p:sp>
@@ -18764,6 +18406,7 @@
           <a:lstStyle/>
           <a:p>
             <a:pPr algn="ctr"/>
+            <a:endParaRPr/>
           </a:p>
         </p:txBody>
       </p:sp>
@@ -18810,6 +18453,7 @@
           <a:lstStyle/>
           <a:p>
             <a:pPr algn="ctr"/>
+            <a:endParaRPr/>
           </a:p>
         </p:txBody>
       </p:sp>
@@ -18963,6 +18607,7 @@
           <a:lstStyle/>
           <a:p>
             <a:pPr algn="ctr"/>
+            <a:endParaRPr/>
           </a:p>
         </p:txBody>
       </p:sp>
@@ -19009,6 +18654,7 @@
           <a:lstStyle/>
           <a:p>
             <a:pPr algn="ctr"/>
+            <a:endParaRPr/>
           </a:p>
         </p:txBody>
       </p:sp>
